--- a/overview/os_affective_computing_2026_Claude.pptx
+++ b/overview/os_affective_computing_2026_Claude.pptx
@@ -1202,7 +1202,7 @@
           <a:p>
             <a:r>
               <a:rPr lang="en-US" dirty="0"/>
-              <a:t>Google逐格出处：Gemini情感(TechCrunch 2026-01)；EVI(Contrary Research)；MediaPipe开发者工具；Fitbit 2021收购$2.1B、Body Response EDA(Fitbit Sense文档)；Google Health app+Fitbit Air(blog.google 2026-05)；UsageStats(developer.android.com)；Pause Point/Spark/Halo(Android Show &amp; I/O 2026, blog.google 2026-05)。I/O 2026全场无情感计算布局。</a:t>
+              <a:t>Google逐格出处：Gemini情感(TechCrunch 2026-01)；EVI(Contrary Research)；MediaPipe开发者工具；Fitbit 2021收购$2.1B、Body Response EDA(Fitbit Sense文档)；Google Health app+Fitbit Air(blog.google 2026-05)；UsageStats(developer.android.com)；Gemini长上下文为百万级token(Google官方,非128K)；MediaPipe输出FaceMesh关键点/blendshapes而非FACS AU；Body Response为Pixel Watch 2 cEDA传感特性(Google官方2023)；Pause Point/Spark/Halo(Android Show &amp; I/O 2026, blog.google 2026-05)。I/O 2026全场无情感计算布局。</a:t>
             </a:r>
             <a:endParaRPr lang="en-US" dirty="0"/>
           </a:p>
@@ -1290,7 +1290,7 @@
           <a:p>
             <a:r>
               <a:rPr lang="en-US" dirty="0"/>
-              <a:t>Apple逐格出处：Siri AI 2026.6发布、Gemini底层(apple.com/newsroom 2026-06；appleinsider 2026-04)；读屏/图库问答(WWDC26)；State of Mind/PHQ/GAD端侧(Apple Support 105070)；Watch传感(Apple官方)。路线图信号：windowsnews.ai(2026-06)报道'expanding the on-device model to understand tone and emotional cues by late 2026'——媒体报道非官方确认，需持续跟踪。</a:t>
+              <a:t>Apple逐格出处：Siri AI 2026.6发布、Gemini底层(apple.com/newsroom 2026-06；appleinsider 2026-04)；读屏/图库问答(WWDC26)；State of Mind/PHQ/GAD端侧(Apple Support 105070)；Watch传感(Apple官方)。低可信度信号(仅备注)：windowsnews.ai(2026-06,内容可靠性一般)称Apple或于2026底让端侧模型理解语气/情绪线索——未经官方确认，待WWDC/官方渠道验证。Siri智能层用Gemini为appleinsider等多家报道(2026-04)，Apple未官方确认模型供应商；Foundation Models框架为Apple自研(WWDC24/25官方)。</a:t>
             </a:r>
             <a:endParaRPr lang="en-US" dirty="0"/>
           </a:p>
@@ -1554,7 +1554,7 @@
           <a:p>
             <a:r>
               <a:rPr lang="en-US" dirty="0"/>
-              <a:t>微软逐格出处：Copilot Appearance实时表情/情绪表达(neowin 2025-07)；Emotion API 2022主动下架(伦理+表情≠情绪争议)；Recall 2024风暴→2025底重构上线：opt-in、每次搜索需Windows Hello、VBS enclave+TPM密钥、尊重DRM/隐私浏览(medium/hawkdive 2026)；Trail of Bits 2026-05审计发现admin权限仍可提取→已补丁(windowsnews.ai)；Copilot Health 2026.5 preview：接Apple Health穿戴、250+医生、'promoting emotional wellbeing'护栏(microsoft.com blog 2026-05-29)；Focus Mode(Build 2026路线图，敏感窗口暂停Recall)；Clippy(1997-2007)行为感知→主动帮助因判断差移除。</a:t>
+              <a:t>微软逐格出处：Copilot Appearance实时表情/情绪表达(neowin 2025-07)；Emotion API 2022主动下架(伦理+表情≠情绪争议)；Recall 2024风暴→2025底重构上线：opt-in、每次搜索需Windows Hello、VBS enclave+TPM密钥、尊重DRM/隐私浏览(medium/hawkdive 2026)；Copilot Health 2026.5 preview：接Apple Health穿戴、250+医生、'promoting emotional wellbeing'护栏(microsoft.com blog 2026-05-29)；Focus Mode(仅windowsnews.ai报道·低可信度·待Build官方确认)；Clippy(1997-2007)行为感知→主动帮助因判断差移除。</a:t>
             </a:r>
             <a:endParaRPr lang="en-US" dirty="0"/>
           </a:p>
@@ -18972,7 +18972,7 @@
                 <a:ea typeface="Arial" pitchFamily="34" charset="-122"/>
                 <a:cs typeface="Arial" pitchFamily="34" charset="-120"/>
               </a:rPr>
-              <a:t>Gemini上下文</a:t>
+              <a:t>Gemini长上下文</a:t>
             </a:r>
             <a:endParaRPr lang="en-US" sz="690" dirty="0"/>
           </a:p>
@@ -19011,7 +19011,7 @@
                 <a:ea typeface="Arial" pitchFamily="34" charset="-122"/>
                 <a:cs typeface="Arial" pitchFamily="34" charset="-120"/>
               </a:rPr>
-              <a:t>128K+多模态</a:t>
+              <a:t>百万级token·多模态</a:t>
             </a:r>
             <a:endParaRPr lang="en-US" sz="610" dirty="0"/>
           </a:p>
@@ -19235,7 +19235,7 @@
                 <a:ea typeface="Arial" pitchFamily="34" charset="-122"/>
                 <a:cs typeface="Arial" pitchFamily="34" charset="-120"/>
               </a:rPr>
-              <a:t>AU/FaceMesh·开发者工具</a:t>
+              <a:t>FaceMesh关键点·开发者工具</a:t>
             </a:r>
             <a:endParaRPr lang="en-US" sz="610" dirty="0"/>
           </a:p>
@@ -21935,7 +21935,7 @@
                 <a:ea typeface="Arial" pitchFamily="34" charset="-122"/>
                 <a:cs typeface="Arial" pitchFamily="34" charset="-120"/>
               </a:rPr>
-              <a:t>Foundation Models</a:t>
+              <a:t>Siri智能层(据报Gemini)</a:t>
             </a:r>
             <a:endParaRPr lang="en-US" sz="690" dirty="0"/>
           </a:p>
@@ -21974,7 +21974,7 @@
                 <a:ea typeface="Arial" pitchFamily="34" charset="-122"/>
                 <a:cs typeface="Arial" pitchFamily="34" charset="-120"/>
               </a:rPr>
-              <a:t>Gemini底层(多年协议)</a:t>
+              <a:t>Foundation Models为自研框架</a:t>
             </a:r>
             <a:endParaRPr lang="en-US" sz="610" dirty="0"/>
           </a:p>
@@ -22986,7 +22986,7 @@
                 <a:ea typeface="Arial" pitchFamily="34" charset="-122"/>
                 <a:cs typeface="Arial" pitchFamily="34" charset="-120"/>
               </a:rPr>
-              <a:t>唯一④全栈绿的厂商(健康框架给了情绪正当叙事)；①③技术很强但主动不做情绪(隐私哲学)；⑤止于统计。外媒报道其路线图含2026底端侧模型理解语气/情绪线索——若成真将是①②的边界突破</a:t>
+              <a:t>唯一④全栈绿的厂商(健康框架给了情绪正当叙事)；①③技术很强但主动不做情绪(隐私哲学)；⑤止于统计——隐私哲学是边界的根本原因，也是其它厂商无法复制的差异化</a:t>
             </a:r>
             <a:endParaRPr lang="en-US" sz="760" dirty="0"/>
           </a:p>
@@ -28348,7 +28348,7 @@
                 <a:ea typeface="Arial" pitchFamily="34" charset="-122"/>
                 <a:cs typeface="Arial" pitchFamily="34" charset="-120"/>
               </a:rPr>
-              <a:t>Focus Mode</a:t>
+              <a:t>Focus Mode(报道)</a:t>
             </a:r>
             <a:endParaRPr lang="en-US" sz="690" dirty="0"/>
           </a:p>
@@ -28387,7 +28387,7 @@
                 <a:ea typeface="Arial" pitchFamily="34" charset="-122"/>
                 <a:cs typeface="Arial" pitchFamily="34" charset="-120"/>
               </a:rPr>
-              <a:t>Build 2026路线图</a:t>
+              <a:t>待官方证实</a:t>
             </a:r>
             <a:endParaRPr lang="en-US" sz="610" dirty="0"/>
           </a:p>

--- a/overview/os_affective_computing_2026_Claude.pptx
+++ b/overview/os_affective_computing_2026_Claude.pptx
@@ -2,7 +2,7 @@
 <file path=ppt/presentation.xml><?xml version="1.0" encoding="utf-8"?>
 <p:presentation xmlns:a="http://schemas.openxmlformats.org/drawingml/2006/main" xmlns:r="http://schemas.openxmlformats.org/officeDocument/2006/relationships" xmlns:p="http://schemas.openxmlformats.org/presentationml/2006/main" saveSubsetFonts="1" autoCompressPictures="0">
   <p:sldMasterIdLst>
-    <p:sldMasterId id="2147483648" r:id="rId24"/>
+    <p:sldMasterId id="2147483648" r:id="rId25"/>
   </p:sldMasterIdLst>
   <p:sldIdLst>
     <p:sldId id="256" r:id="rId1"/>
@@ -28,9 +28,10 @@
     <p:sldId id="276" r:id="rId21"/>
     <p:sldId id="277" r:id="rId22"/>
     <p:sldId id="278" r:id="rId23"/>
+    <p:sldId id="279" r:id="rId24"/>
   </p:sldIdLst>
   <p:notesMasterIdLst>
-    <p:notesMasterId r:id="rId25"/>
+    <p:notesMasterId r:id="rId26"/>
   </p:notesMasterIdLst>
   <p:sldSz cx="9144000" cy="5143500"/>
   <p:notesSz cx="5143500" cy="9144000"/>
@@ -1730,7 +1731,7 @@
           <a:p>
             <a:r>
               <a:rPr lang="en-US" dirty="0"/>
-              <a:t/>
+              <a:t>模型厂商出处：Hume(TechCrunch 2026-01-22收购报道；Contrary Research公司报告：EVI技术、$1亿营收目标、独立运营)；Character.AI/Replika(公开产品与诉讼报道)；xAI Grok Companions(公开产品)；Grok进Optimus V3(optimusk.blog 2026及多家报道,'Grok voice AI'为V3配置)；Inflection团队2024入微软(官方公告)；OpenAI-MIT情感依赖研究(2025公开论文)及心理健康护栏(OpenAI 2025公告)；Anthropic使用政策。</a:t>
             </a:r>
             <a:endParaRPr lang="en-US" dirty="0"/>
           </a:p>
@@ -1753,7 +1754,7 @@
           <a:p>
             <a:fld id="{F7021451-1387-4CA6-816F-3879F97B5CBC}" type="slidenum">
               <a:rPr lang="en-US"/>
-              <a:t>6</a:t>
+              <a:t>2</a:t>
             </a:fld>
             <a:endParaRPr lang="en-US"/>
           </a:p>
@@ -1818,7 +1819,7 @@
           <a:p>
             <a:r>
               <a:rPr lang="en-US" dirty="0"/>
-              <a:t/>
+              <a:t>机器人出处：Optimus V3(22-DoF/AI5/Grok voice/2026夏量产：optimusk.blog 2026-06及多家；注意该域名为爱好者站,Grok配置有多源交叉)；Figure 03 BMW部署$25/时、BotQ 1台/小时(lumichats/humanoid.press 2026)；Unitree 5500+台2025出货、UnifoLM-VLA-0开源2026-03、$580M上海IPO申报、G1 $17,990上架Amazon(lumichats 2026-03)；1X NEO $20,000/月付$499、1万+预订、OpenAI背书、'building emotional bonds'(humanoid.press编辑页/robozaps 2026)；陪伴机器人情绪识别(standardbots 2026-01)。数据多为行业媒体聚合,精确数字以厂商官方为准。</a:t>
             </a:r>
             <a:endParaRPr lang="en-US" dirty="0"/>
           </a:p>
@@ -1841,7 +1842,95 @@
           <a:p>
             <a:fld id="{F7021451-1387-4CA6-816F-3879F97B5CBC}" type="slidenum">
               <a:rPr lang="en-US"/>
-              <a:t>7</a:t>
+              <a:t>3</a:t>
+            </a:fld>
+            <a:endParaRPr lang="en-US"/>
+          </a:p>
+        </p:txBody>
+      </p:sp>
+    </p:spTree>
+    <p:extLst>
+      <p:ext uri="{BB962C8B-B14F-4D97-AF65-F5344CB8AC3E}">
+        <p14:creationId xmlns:p14="http://schemas.microsoft.com/office/powerpoint/2010/main" val="1024086991"/>
+      </p:ext>
+    </p:extLst>
+  </p:cSld>
+  <p:clrMapOvr>
+    <a:masterClrMapping/>
+  </p:clrMapOvr>
+</p:notes>
+</file>
+
+<file path=ppt/notesSlides/notesSlide24.xml><?xml version="1.0" encoding="utf-8"?>
+<p:notes xmlns:a="http://schemas.openxmlformats.org/drawingml/2006/main" xmlns:r="http://schemas.openxmlformats.org/officeDocument/2006/relationships" xmlns:p="http://schemas.openxmlformats.org/presentationml/2006/main">
+  <p:cSld>
+    <p:spTree>
+      <p:nvGrpSpPr>
+        <p:cNvPr id="1" name=""/>
+        <p:cNvGrpSpPr/>
+        <p:nvPr/>
+      </p:nvGrpSpPr>
+      <p:grpSpPr>
+        <a:xfrm>
+          <a:off x="0" y="0"/>
+          <a:ext cx="0" cy="0"/>
+          <a:chOff x="0" y="0"/>
+          <a:chExt cx="0" cy="0"/>
+        </a:xfrm>
+      </p:grpSpPr>
+      <p:sp>
+        <p:nvSpPr>
+          <p:cNvPr id="2" name="Slide Image Placeholder 1"/>
+          <p:cNvSpPr>
+            <a:spLocks noGrp="1" noRot="1" noChangeAspect="1"/>
+          </p:cNvSpPr>
+          <p:nvPr>
+            <p:ph type="sldImg"/>
+          </p:nvPr>
+        </p:nvSpPr>
+        <p:spPr/>
+      </p:sp>
+      <p:sp>
+        <p:nvSpPr>
+          <p:cNvPr id="3" name="Notes Placeholder 2"/>
+          <p:cNvSpPr>
+            <a:spLocks noGrp="1"/>
+          </p:cNvSpPr>
+          <p:nvPr>
+            <p:ph type="body" idx="1"/>
+          </p:nvPr>
+        </p:nvSpPr>
+        <p:spPr/>
+        <p:txBody>
+          <a:bodyPr/>
+          <a:lstStyle/>
+          <a:p>
+            <a:r>
+              <a:rPr lang="en-US" dirty="0"/>
+              <a:t>Samsung逐格出处：Energy Score(0-100,睡眠/活动/睡眠心率/HRV,需Watch4+)与Vitals(5项夜间生理信号vs个人静息基线,仅显著偏离通知)——Samsung Global Newsroom 2025-10-17及2026-06-04、官方支持文档ANS10003272；Galaxy AI基于Gemini(Samsung-Google合作,官方发布)；Circle to Search(2024与Google联合首发)；Watch/Ring传感(官方规格)。判断：Vitals的'个人基线偏离'方法论与UTM的L2同构,但信号源是生理非行为,且输出止于健康提醒——validates方法、留空场景。</a:t>
+            </a:r>
+            <a:endParaRPr lang="en-US" dirty="0"/>
+          </a:p>
+        </p:txBody>
+      </p:sp>
+      <p:sp>
+        <p:nvSpPr>
+          <p:cNvPr id="4" name="Slide Number Placeholder 3"/>
+          <p:cNvSpPr>
+            <a:spLocks noGrp="1"/>
+          </p:cNvSpPr>
+          <p:nvPr>
+            <p:ph type="sldNum" sz="quarter" idx="10"/>
+          </p:nvPr>
+        </p:nvSpPr>
+        <p:spPr/>
+        <p:txBody>
+          <a:bodyPr/>
+          <a:lstStyle/>
+          <a:p>
+            <a:fld id="{F7021451-1387-4CA6-816F-3879F97B5CBC}" type="slidenum">
+              <a:rPr lang="en-US"/>
+              <a:t>1</a:t>
             </a:fld>
             <a:endParaRPr lang="en-US"/>
           </a:p>
@@ -31110,7 +31199,7 @@
 
 <file path=ppt/slides/slide23.xml><?xml version="1.0" encoding="utf-8"?>
 <p:sld xmlns:a="http://schemas.openxmlformats.org/drawingml/2006/main" xmlns:r="http://schemas.openxmlformats.org/officeDocument/2006/relationships" xmlns:p="http://schemas.openxmlformats.org/presentationml/2006/main">
-  <p:cSld name="Slide 6">
+  <p:cSld name="Slide 2">
     <p:bg>
       <p:bgPr>
         <a:solidFill>
@@ -31159,13 +31248,13 @@
             <a:r>
               <a:rPr lang="en-US" sz="900" b="1" spc="300" kern="0" dirty="0">
                 <a:solidFill>
-                  <a:srgbClr val="475569"/>
-                </a:solidFill>
-                <a:latin typeface="Arial" pitchFamily="34" charset="0"/>
-                <a:ea typeface="Arial" pitchFamily="34" charset="-122"/>
-                <a:cs typeface="Arial" pitchFamily="34" charset="-120"/>
-              </a:rPr>
-              <a:t>竞品深析 · 待补充</a:t>
+                  <a:srgbClr val="4ADE80"/>
+                </a:solidFill>
+                <a:latin typeface="Arial" pitchFamily="34" charset="0"/>
+                <a:ea typeface="Arial" pitchFamily="34" charset="-122"/>
+                <a:cs typeface="Arial" pitchFamily="34" charset="-120"/>
+              </a:rPr>
+              <a:t>竞品深析 · AI模型厂商</a:t>
             </a:r>
             <a:endParaRPr lang="en-US" sz="900" dirty="0"/>
           </a:p>
@@ -31180,23 +31269,23 @@
         <p:spPr>
           <a:xfrm>
             <a:off x="365760" y="384048"/>
-            <a:ext cx="8412480" cy="411480"/>
-          </a:xfrm>
-          <a:prstGeom prst="rect">
-            <a:avLst/>
-          </a:prstGeom>
-          <a:noFill/>
-          <a:ln/>
-        </p:spPr>
-        <p:txBody>
-          <a:bodyPr wrap="square" lIns="0" tIns="0" rIns="0" bIns="0" rtlCol="0" anchor="ctr"/>
-          <a:lstStyle/>
-          <a:p>
-            <a:pPr indent="0" marL="0">
-              <a:buNone/>
-            </a:pPr>
-            <a:r>
-              <a:rPr lang="en-US" sz="2000" b="1" dirty="0">
+            <a:ext cx="8412480" cy="384048"/>
+          </a:xfrm>
+          <a:prstGeom prst="rect">
+            <a:avLst/>
+          </a:prstGeom>
+          <a:noFill/>
+          <a:ln/>
+        </p:spPr>
+        <p:txBody>
+          <a:bodyPr wrap="square" lIns="0" tIns="0" rIns="0" bIns="0" rtlCol="0" anchor="ctr"/>
+          <a:lstStyle/>
+          <a:p>
+            <a:pPr indent="0" marL="0">
+              <a:buNone/>
+            </a:pPr>
+            <a:r>
+              <a:rPr lang="en-US" sz="1800" b="1" dirty="0">
                 <a:solidFill>
                   <a:srgbClr val="F8FAFC"/>
                 </a:solidFill>
@@ -31204,9 +31293,9 @@
                 <a:ea typeface="Cambria" pitchFamily="34" charset="-122"/>
                 <a:cs typeface="Cambria" pitchFamily="34" charset="-120"/>
               </a:rPr>
-              <a:t>AI模型厂商：情感布局分析（占位）</a:t>
-            </a:r>
-            <a:endParaRPr lang="en-US" sz="2000" dirty="0"/>
+              <a:t>模型厂商：拥抱派 vs 克制派，共同止于对话</a:t>
+            </a:r>
+            <a:endParaRPr lang="en-US" sz="1800" dirty="0"/>
           </a:p>
         </p:txBody>
       </p:sp>
@@ -31218,24 +31307,24 @@
         </p:nvSpPr>
         <p:spPr>
           <a:xfrm>
-            <a:off x="365760" y="804672"/>
-            <a:ext cx="8412480" cy="228600"/>
-          </a:xfrm>
-          <a:prstGeom prst="rect">
-            <a:avLst/>
-          </a:prstGeom>
-          <a:noFill/>
-          <a:ln/>
-        </p:spPr>
-        <p:txBody>
-          <a:bodyPr wrap="square" lIns="0" tIns="0" rIns="0" bIns="0" rtlCol="0" anchor="ctr"/>
-          <a:lstStyle/>
-          <a:p>
-            <a:pPr indent="0" marL="0">
-              <a:buNone/>
-            </a:pPr>
-            <a:r>
-              <a:rPr lang="en-US" sz="950" dirty="0">
+            <a:off x="365760" y="777240"/>
+            <a:ext cx="8412480" cy="201168"/>
+          </a:xfrm>
+          <a:prstGeom prst="rect">
+            <a:avLst/>
+          </a:prstGeom>
+          <a:noFill/>
+          <a:ln/>
+        </p:spPr>
+        <p:txBody>
+          <a:bodyPr wrap="square" lIns="0" tIns="0" rIns="0" bIns="0" rtlCol="0" anchor="ctr"/>
+          <a:lstStyle/>
+          <a:p>
+            <a:pPr indent="0" marL="0">
+              <a:buNone/>
+            </a:pPr>
+            <a:r>
+              <a:rPr lang="en-US" sz="900" dirty="0">
                 <a:solidFill>
                   <a:srgbClr val="94A3B8"/>
                 </a:solidFill>
@@ -31243,9 +31332,9 @@
                 <a:ea typeface="Arial" pitchFamily="34" charset="-122"/>
                 <a:cs typeface="Arial" pitchFamily="34" charset="-120"/>
               </a:rPr>
-              <a:t>候选：OpenAI · Anthropic · Hume · Character.AI · xAI · Inflection/微软</a:t>
-            </a:r>
-            <a:endParaRPr lang="en-US" sz="950" dirty="0"/>
+              <a:t>按情感策略分派 · 全部只能触及①②对话内模态</a:t>
+            </a:r>
+            <a:endParaRPr lang="en-US" sz="900" dirty="0"/>
           </a:p>
         </p:txBody>
       </p:sp>
@@ -31257,18 +31346,18 @@
         </p:nvSpPr>
         <p:spPr>
           <a:xfrm>
-            <a:off x="365760" y="1234440"/>
-            <a:ext cx="8412480" cy="621792"/>
+            <a:off x="365760" y="1078992"/>
+            <a:ext cx="8412480" cy="484632"/>
           </a:xfrm>
           <a:prstGeom prst="roundRect">
             <a:avLst>
-              <a:gd name="adj" fmla="val 4412"/>
+              <a:gd name="adj" fmla="val 5660"/>
             </a:avLst>
           </a:prstGeom>
           <a:solidFill>
-            <a:srgbClr val="0A0C11"/>
+            <a:srgbClr val="0D1017"/>
           </a:solidFill>
-          <a:ln w="10160">
+          <a:ln w="7620">
             <a:solidFill>
               <a:srgbClr val="1A1F2E"/>
             </a:solidFill>
@@ -31291,57 +31380,135 @@
         </p:nvSpPr>
         <p:spPr>
           <a:xfrm>
-            <a:off x="502920" y="1234440"/>
-            <a:ext cx="8138160" cy="621792"/>
-          </a:xfrm>
-          <a:prstGeom prst="rect">
-            <a:avLst/>
-          </a:prstGeom>
-          <a:noFill/>
-          <a:ln/>
-        </p:spPr>
-        <p:txBody>
-          <a:bodyPr wrap="square" lIns="0" tIns="0" rIns="0" bIns="0" rtlCol="0" anchor="ctr"/>
-          <a:lstStyle/>
-          <a:p>
-            <a:pPr indent="0" marL="0">
-              <a:buNone/>
-            </a:pPr>
-            <a:r>
-              <a:rPr lang="en-US" sz="1000" b="1" dirty="0">
-                <a:solidFill>
-                  <a:srgbClr val="475569"/>
-                </a:solidFill>
-                <a:latin typeface="Arial" pitchFamily="34" charset="0"/>
-                <a:ea typeface="Arial" pitchFamily="34" charset="-122"/>
-                <a:cs typeface="Arial" pitchFamily="34" charset="-120"/>
-              </a:rPr>
-              <a:t>OpenAI —— 克制派：MIT情感依赖研究·2025心理健康护栏·GPT-4o有情感语音能力但不做推断服务</a:t>
-            </a:r>
-            <a:endParaRPr lang="en-US" sz="1000" dirty="0"/>
-          </a:p>
-        </p:txBody>
-      </p:sp>
-      <p:sp>
-        <p:nvSpPr>
-          <p:cNvPr id="7" name="Shape 5"/>
-          <p:cNvSpPr/>
-          <p:nvPr/>
-        </p:nvSpPr>
-        <p:spPr>
-          <a:xfrm>
-            <a:off x="365760" y="1947672"/>
-            <a:ext cx="8412480" cy="621792"/>
+            <a:off x="502920" y="1078992"/>
+            <a:ext cx="1737360" cy="484632"/>
+          </a:xfrm>
+          <a:prstGeom prst="rect">
+            <a:avLst/>
+          </a:prstGeom>
+          <a:noFill/>
+          <a:ln/>
+        </p:spPr>
+        <p:txBody>
+          <a:bodyPr wrap="square" lIns="0" tIns="0" rIns="0" bIns="0" rtlCol="0" anchor="ctr"/>
+          <a:lstStyle/>
+          <a:p>
+            <a:pPr indent="0" marL="0">
+              <a:buNone/>
+            </a:pPr>
+            <a:r>
+              <a:rPr lang="en-US" sz="950" b="1" dirty="0">
+                <a:solidFill>
+                  <a:srgbClr val="4ADE80"/>
+                </a:solidFill>
+                <a:latin typeface="Arial" pitchFamily="34" charset="0"/>
+                <a:ea typeface="Arial" pitchFamily="34" charset="-122"/>
+                <a:cs typeface="Arial" pitchFamily="34" charset="-120"/>
+              </a:rPr>
+              <a:t>Hume AI</a:t>
+            </a:r>
+            <a:endParaRPr lang="en-US" sz="950" dirty="0"/>
+          </a:p>
+        </p:txBody>
+      </p:sp>
+      <p:sp>
+        <p:nvSpPr>
+          <p:cNvPr id="7" name="Text 5"/>
+          <p:cNvSpPr/>
+          <p:nvPr/>
+        </p:nvSpPr>
+        <p:spPr>
+          <a:xfrm>
+            <a:off x="2286000" y="1078992"/>
+            <a:ext cx="914400" cy="484632"/>
+          </a:xfrm>
+          <a:prstGeom prst="rect">
+            <a:avLst/>
+          </a:prstGeom>
+          <a:noFill/>
+          <a:ln/>
+        </p:spPr>
+        <p:txBody>
+          <a:bodyPr wrap="square" lIns="0" tIns="0" rIns="0" bIns="0" rtlCol="0" anchor="ctr"/>
+          <a:lstStyle/>
+          <a:p>
+            <a:pPr indent="0" marL="0">
+              <a:buNone/>
+            </a:pPr>
+            <a:r>
+              <a:rPr lang="en-US" sz="800" b="1" dirty="0">
+                <a:solidFill>
+                  <a:srgbClr val="4ADE80"/>
+                </a:solidFill>
+                <a:latin typeface="Arial" pitchFamily="34" charset="0"/>
+                <a:ea typeface="Arial" pitchFamily="34" charset="-122"/>
+                <a:cs typeface="Arial" pitchFamily="34" charset="-120"/>
+              </a:rPr>
+              <a:t>拥抱·专职</a:t>
+            </a:r>
+            <a:endParaRPr lang="en-US" sz="800" dirty="0"/>
+          </a:p>
+        </p:txBody>
+      </p:sp>
+      <p:sp>
+        <p:nvSpPr>
+          <p:cNvPr id="8" name="Text 6"/>
+          <p:cNvSpPr/>
+          <p:nvPr/>
+        </p:nvSpPr>
+        <p:spPr>
+          <a:xfrm>
+            <a:off x="3246120" y="1078992"/>
+            <a:ext cx="5394960" cy="484632"/>
+          </a:xfrm>
+          <a:prstGeom prst="rect">
+            <a:avLst/>
+          </a:prstGeom>
+          <a:noFill/>
+          <a:ln/>
+        </p:spPr>
+        <p:txBody>
+          <a:bodyPr wrap="square" lIns="0" tIns="0" rIns="0" bIns="0" rtlCol="0" anchor="ctr"/>
+          <a:lstStyle/>
+          <a:p>
+            <a:pPr indent="0" marL="0">
+              <a:buNone/>
+            </a:pPr>
+            <a:r>
+              <a:rPr lang="en-US" sz="760" dirty="0">
+                <a:solidFill>
+                  <a:srgbClr val="94A3B8"/>
+                </a:solidFill>
+                <a:latin typeface="Arial" pitchFamily="34" charset="0"/>
+                <a:ea typeface="Arial" pitchFamily="34" charset="-122"/>
+                <a:cs typeface="Arial" pitchFamily="34" charset="-120"/>
+              </a:rPr>
+              <a:t>EVI情感语音专职厂商；&lt;300ms韵律推断+eLLM生成；2026.1团队入Google DeepMind(非独家授权)，公司独立运营，2026目标营收$1亿</a:t>
+            </a:r>
+            <a:endParaRPr lang="en-US" sz="760" dirty="0"/>
+          </a:p>
+        </p:txBody>
+      </p:sp>
+      <p:sp>
+        <p:nvSpPr>
+          <p:cNvPr id="9" name="Shape 7"/>
+          <p:cNvSpPr/>
+          <p:nvPr/>
+        </p:nvSpPr>
+        <p:spPr>
+          <a:xfrm>
+            <a:off x="365760" y="1627632"/>
+            <a:ext cx="8412480" cy="484632"/>
           </a:xfrm>
           <a:prstGeom prst="roundRect">
             <a:avLst>
-              <a:gd name="adj" fmla="val 4412"/>
+              <a:gd name="adj" fmla="val 5660"/>
             </a:avLst>
           </a:prstGeom>
           <a:solidFill>
-            <a:srgbClr val="0A0C11"/>
+            <a:srgbClr val="0D1017"/>
           </a:solidFill>
-          <a:ln w="10160">
+          <a:ln w="7620">
             <a:solidFill>
               <a:srgbClr val="1A1F2E"/>
             </a:solidFill>
@@ -31358,63 +31525,141 @@
       </p:sp>
       <p:sp>
         <p:nvSpPr>
-          <p:cNvPr id="8" name="Text 6"/>
-          <p:cNvSpPr/>
-          <p:nvPr/>
-        </p:nvSpPr>
-        <p:spPr>
-          <a:xfrm>
-            <a:off x="502920" y="1947672"/>
-            <a:ext cx="8138160" cy="621792"/>
-          </a:xfrm>
-          <a:prstGeom prst="rect">
-            <a:avLst/>
-          </a:prstGeom>
-          <a:noFill/>
-          <a:ln/>
-        </p:spPr>
-        <p:txBody>
-          <a:bodyPr wrap="square" lIns="0" tIns="0" rIns="0" bIns="0" rtlCol="0" anchor="ctr"/>
-          <a:lstStyle/>
-          <a:p>
-            <a:pPr indent="0" marL="0">
-              <a:buNone/>
-            </a:pPr>
-            <a:r>
-              <a:rPr lang="en-US" sz="1000" b="1" dirty="0">
-                <a:solidFill>
-                  <a:srgbClr val="475569"/>
-                </a:solidFill>
-                <a:latin typeface="Arial" pitchFamily="34" charset="0"/>
-                <a:ea typeface="Arial" pitchFamily="34" charset="-122"/>
-                <a:cs typeface="Arial" pitchFamily="34" charset="-120"/>
-              </a:rPr>
-              <a:t>Anthropic —— 克制派：情感支持场景明确谨慎</a:t>
-            </a:r>
-            <a:endParaRPr lang="en-US" sz="1000" dirty="0"/>
-          </a:p>
-        </p:txBody>
-      </p:sp>
-      <p:sp>
-        <p:nvSpPr>
-          <p:cNvPr id="9" name="Shape 7"/>
-          <p:cNvSpPr/>
-          <p:nvPr/>
-        </p:nvSpPr>
-        <p:spPr>
-          <a:xfrm>
-            <a:off x="365760" y="2660904"/>
-            <a:ext cx="8412480" cy="621792"/>
+          <p:cNvPr id="10" name="Text 8"/>
+          <p:cNvSpPr/>
+          <p:nvPr/>
+        </p:nvSpPr>
+        <p:spPr>
+          <a:xfrm>
+            <a:off x="502920" y="1627632"/>
+            <a:ext cx="1737360" cy="484632"/>
+          </a:xfrm>
+          <a:prstGeom prst="rect">
+            <a:avLst/>
+          </a:prstGeom>
+          <a:noFill/>
+          <a:ln/>
+        </p:spPr>
+        <p:txBody>
+          <a:bodyPr wrap="square" lIns="0" tIns="0" rIns="0" bIns="0" rtlCol="0" anchor="ctr"/>
+          <a:lstStyle/>
+          <a:p>
+            <a:pPr indent="0" marL="0">
+              <a:buNone/>
+            </a:pPr>
+            <a:r>
+              <a:rPr lang="en-US" sz="950" b="1" dirty="0">
+                <a:solidFill>
+                  <a:srgbClr val="4ADE80"/>
+                </a:solidFill>
+                <a:latin typeface="Arial" pitchFamily="34" charset="0"/>
+                <a:ea typeface="Arial" pitchFamily="34" charset="-122"/>
+                <a:cs typeface="Arial" pitchFamily="34" charset="-120"/>
+              </a:rPr>
+              <a:t>Character.AI / Replika</a:t>
+            </a:r>
+            <a:endParaRPr lang="en-US" sz="950" dirty="0"/>
+          </a:p>
+        </p:txBody>
+      </p:sp>
+      <p:sp>
+        <p:nvSpPr>
+          <p:cNvPr id="11" name="Text 9"/>
+          <p:cNvSpPr/>
+          <p:nvPr/>
+        </p:nvSpPr>
+        <p:spPr>
+          <a:xfrm>
+            <a:off x="2286000" y="1627632"/>
+            <a:ext cx="914400" cy="484632"/>
+          </a:xfrm>
+          <a:prstGeom prst="rect">
+            <a:avLst/>
+          </a:prstGeom>
+          <a:noFill/>
+          <a:ln/>
+        </p:spPr>
+        <p:txBody>
+          <a:bodyPr wrap="square" lIns="0" tIns="0" rIns="0" bIns="0" rtlCol="0" anchor="ctr"/>
+          <a:lstStyle/>
+          <a:p>
+            <a:pPr indent="0" marL="0">
+              <a:buNone/>
+            </a:pPr>
+            <a:r>
+              <a:rPr lang="en-US" sz="800" b="1" dirty="0">
+                <a:solidFill>
+                  <a:srgbClr val="4ADE80"/>
+                </a:solidFill>
+                <a:latin typeface="Arial" pitchFamily="34" charset="0"/>
+                <a:ea typeface="Arial" pitchFamily="34" charset="-122"/>
+                <a:cs typeface="Arial" pitchFamily="34" charset="-120"/>
+              </a:rPr>
+              <a:t>拥抱·陪伴</a:t>
+            </a:r>
+            <a:endParaRPr lang="en-US" sz="800" dirty="0"/>
+          </a:p>
+        </p:txBody>
+      </p:sp>
+      <p:sp>
+        <p:nvSpPr>
+          <p:cNvPr id="12" name="Text 10"/>
+          <p:cNvSpPr/>
+          <p:nvPr/>
+        </p:nvSpPr>
+        <p:spPr>
+          <a:xfrm>
+            <a:off x="3246120" y="1627632"/>
+            <a:ext cx="5394960" cy="484632"/>
+          </a:xfrm>
+          <a:prstGeom prst="rect">
+            <a:avLst/>
+          </a:prstGeom>
+          <a:noFill/>
+          <a:ln/>
+        </p:spPr>
+        <p:txBody>
+          <a:bodyPr wrap="square" lIns="0" tIns="0" rIns="0" bIns="0" rtlCol="0" anchor="ctr"/>
+          <a:lstStyle/>
+          <a:p>
+            <a:pPr indent="0" marL="0">
+              <a:buNone/>
+            </a:pPr>
+            <a:r>
+              <a:rPr lang="en-US" sz="760" dirty="0">
+                <a:solidFill>
+                  <a:srgbClr val="94A3B8"/>
+                </a:solidFill>
+                <a:latin typeface="Arial" pitchFamily="34" charset="0"/>
+                <a:ea typeface="Arial" pitchFamily="34" charset="-122"/>
+                <a:cs typeface="Arial" pitchFamily="34" charset="-120"/>
+              </a:rPr>
+              <a:t>情感陪伴产品化最深；用户日均使用时长业内最高；多起监管与诉讼争议(未成年人依赖)</a:t>
+            </a:r>
+            <a:endParaRPr lang="en-US" sz="760" dirty="0"/>
+          </a:p>
+        </p:txBody>
+      </p:sp>
+      <p:sp>
+        <p:nvSpPr>
+          <p:cNvPr id="13" name="Shape 11"/>
+          <p:cNvSpPr/>
+          <p:nvPr/>
+        </p:nvSpPr>
+        <p:spPr>
+          <a:xfrm>
+            <a:off x="365760" y="2176272"/>
+            <a:ext cx="8412480" cy="484632"/>
           </a:xfrm>
           <a:prstGeom prst="roundRect">
             <a:avLst>
-              <a:gd name="adj" fmla="val 4412"/>
+              <a:gd name="adj" fmla="val 5660"/>
             </a:avLst>
           </a:prstGeom>
           <a:solidFill>
-            <a:srgbClr val="0A0C11"/>
+            <a:srgbClr val="0D1017"/>
           </a:solidFill>
-          <a:ln w="10160">
+          <a:ln w="7620">
             <a:solidFill>
               <a:srgbClr val="1A1F2E"/>
             </a:solidFill>
@@ -31431,63 +31676,141 @@
       </p:sp>
       <p:sp>
         <p:nvSpPr>
-          <p:cNvPr id="10" name="Text 8"/>
-          <p:cNvSpPr/>
-          <p:nvPr/>
-        </p:nvSpPr>
-        <p:spPr>
-          <a:xfrm>
-            <a:off x="502920" y="2660904"/>
-            <a:ext cx="8138160" cy="621792"/>
-          </a:xfrm>
-          <a:prstGeom prst="rect">
-            <a:avLst/>
-          </a:prstGeom>
-          <a:noFill/>
-          <a:ln/>
-        </p:spPr>
-        <p:txBody>
-          <a:bodyPr wrap="square" lIns="0" tIns="0" rIns="0" bIns="0" rtlCol="0" anchor="ctr"/>
-          <a:lstStyle/>
-          <a:p>
-            <a:pPr indent="0" marL="0">
-              <a:buNone/>
-            </a:pPr>
-            <a:r>
-              <a:rPr lang="en-US" sz="1000" b="1" dirty="0">
-                <a:solidFill>
-                  <a:srgbClr val="475569"/>
-                </a:solidFill>
-                <a:latin typeface="Arial" pitchFamily="34" charset="0"/>
-                <a:ea typeface="Arial" pitchFamily="34" charset="-122"/>
-                <a:cs typeface="Arial" pitchFamily="34" charset="-120"/>
-              </a:rPr>
-              <a:t>Hume / Character.AI / Replika / Pi —— 拥抱派：专职情感语音/陪伴</a:t>
-            </a:r>
-            <a:endParaRPr lang="en-US" sz="1000" dirty="0"/>
-          </a:p>
-        </p:txBody>
-      </p:sp>
-      <p:sp>
-        <p:nvSpPr>
-          <p:cNvPr id="11" name="Shape 9"/>
-          <p:cNvSpPr/>
-          <p:nvPr/>
-        </p:nvSpPr>
-        <p:spPr>
-          <a:xfrm>
-            <a:off x="365760" y="3374136"/>
-            <a:ext cx="8412480" cy="621792"/>
+          <p:cNvPr id="14" name="Text 12"/>
+          <p:cNvSpPr/>
+          <p:nvPr/>
+        </p:nvSpPr>
+        <p:spPr>
+          <a:xfrm>
+            <a:off x="502920" y="2176272"/>
+            <a:ext cx="1737360" cy="484632"/>
+          </a:xfrm>
+          <a:prstGeom prst="rect">
+            <a:avLst/>
+          </a:prstGeom>
+          <a:noFill/>
+          <a:ln/>
+        </p:spPr>
+        <p:txBody>
+          <a:bodyPr wrap="square" lIns="0" tIns="0" rIns="0" bIns="0" rtlCol="0" anchor="ctr"/>
+          <a:lstStyle/>
+          <a:p>
+            <a:pPr indent="0" marL="0">
+              <a:buNone/>
+            </a:pPr>
+            <a:r>
+              <a:rPr lang="en-US" sz="950" b="1" dirty="0">
+                <a:solidFill>
+                  <a:srgbClr val="4ADE80"/>
+                </a:solidFill>
+                <a:latin typeface="Arial" pitchFamily="34" charset="0"/>
+                <a:ea typeface="Arial" pitchFamily="34" charset="-122"/>
+                <a:cs typeface="Arial" pitchFamily="34" charset="-120"/>
+              </a:rPr>
+              <a:t>xAI (Grok)</a:t>
+            </a:r>
+            <a:endParaRPr lang="en-US" sz="950" dirty="0"/>
+          </a:p>
+        </p:txBody>
+      </p:sp>
+      <p:sp>
+        <p:nvSpPr>
+          <p:cNvPr id="15" name="Text 13"/>
+          <p:cNvSpPr/>
+          <p:nvPr/>
+        </p:nvSpPr>
+        <p:spPr>
+          <a:xfrm>
+            <a:off x="2286000" y="2176272"/>
+            <a:ext cx="914400" cy="484632"/>
+          </a:xfrm>
+          <a:prstGeom prst="rect">
+            <a:avLst/>
+          </a:prstGeom>
+          <a:noFill/>
+          <a:ln/>
+        </p:spPr>
+        <p:txBody>
+          <a:bodyPr wrap="square" lIns="0" tIns="0" rIns="0" bIns="0" rtlCol="0" anchor="ctr"/>
+          <a:lstStyle/>
+          <a:p>
+            <a:pPr indent="0" marL="0">
+              <a:buNone/>
+            </a:pPr>
+            <a:r>
+              <a:rPr lang="en-US" sz="800" b="1" dirty="0">
+                <a:solidFill>
+                  <a:srgbClr val="4ADE80"/>
+                </a:solidFill>
+                <a:latin typeface="Arial" pitchFamily="34" charset="0"/>
+                <a:ea typeface="Arial" pitchFamily="34" charset="-122"/>
+                <a:cs typeface="Arial" pitchFamily="34" charset="-120"/>
+              </a:rPr>
+              <a:t>拥抱·人格</a:t>
+            </a:r>
+            <a:endParaRPr lang="en-US" sz="800" dirty="0"/>
+          </a:p>
+        </p:txBody>
+      </p:sp>
+      <p:sp>
+        <p:nvSpPr>
+          <p:cNvPr id="16" name="Text 14"/>
+          <p:cNvSpPr/>
+          <p:nvPr/>
+        </p:nvSpPr>
+        <p:spPr>
+          <a:xfrm>
+            <a:off x="3246120" y="2176272"/>
+            <a:ext cx="5394960" cy="484632"/>
+          </a:xfrm>
+          <a:prstGeom prst="rect">
+            <a:avLst/>
+          </a:prstGeom>
+          <a:noFill/>
+          <a:ln/>
+        </p:spPr>
+        <p:txBody>
+          <a:bodyPr wrap="square" lIns="0" tIns="0" rIns="0" bIns="0" rtlCol="0" anchor="ctr"/>
+          <a:lstStyle/>
+          <a:p>
+            <a:pPr indent="0" marL="0">
+              <a:buNone/>
+            </a:pPr>
+            <a:r>
+              <a:rPr lang="en-US" sz="760" dirty="0">
+                <a:solidFill>
+                  <a:srgbClr val="94A3B8"/>
+                </a:solidFill>
+                <a:latin typeface="Arial" pitchFamily="34" charset="0"/>
+                <a:ea typeface="Arial" pitchFamily="34" charset="-122"/>
+                <a:cs typeface="Arial" pitchFamily="34" charset="-120"/>
+              </a:rPr>
+              <a:t>Grok Companions情感人格角色；Grok语音将进入Tesla Optimus V3——模型厂商情感能力进入机器人的首例</a:t>
+            </a:r>
+            <a:endParaRPr lang="en-US" sz="760" dirty="0"/>
+          </a:p>
+        </p:txBody>
+      </p:sp>
+      <p:sp>
+        <p:nvSpPr>
+          <p:cNvPr id="17" name="Shape 15"/>
+          <p:cNvSpPr/>
+          <p:nvPr/>
+        </p:nvSpPr>
+        <p:spPr>
+          <a:xfrm>
+            <a:off x="365760" y="2724912"/>
+            <a:ext cx="8412480" cy="484632"/>
           </a:xfrm>
           <a:prstGeom prst="roundRect">
             <a:avLst>
-              <a:gd name="adj" fmla="val 4412"/>
+              <a:gd name="adj" fmla="val 5660"/>
             </a:avLst>
           </a:prstGeom>
           <a:solidFill>
-            <a:srgbClr val="0A0C11"/>
+            <a:srgbClr val="0D1017"/>
           </a:solidFill>
-          <a:ln w="10160">
+          <a:ln w="7620">
             <a:solidFill>
               <a:srgbClr val="1A1F2E"/>
             </a:solidFill>
@@ -31504,79 +31827,507 @@
       </p:sp>
       <p:sp>
         <p:nvSpPr>
-          <p:cNvPr id="12" name="Text 10"/>
-          <p:cNvSpPr/>
-          <p:nvPr/>
-        </p:nvSpPr>
-        <p:spPr>
-          <a:xfrm>
-            <a:off x="502920" y="3374136"/>
-            <a:ext cx="8138160" cy="621792"/>
-          </a:xfrm>
-          <a:prstGeom prst="rect">
-            <a:avLst/>
-          </a:prstGeom>
-          <a:noFill/>
-          <a:ln/>
-        </p:spPr>
-        <p:txBody>
-          <a:bodyPr wrap="square" lIns="0" tIns="0" rIns="0" bIns="0" rtlCol="0" anchor="ctr"/>
-          <a:lstStyle/>
-          <a:p>
-            <a:pPr indent="0" marL="0">
-              <a:buNone/>
-            </a:pPr>
-            <a:r>
-              <a:rPr lang="en-US" sz="1000" b="1" dirty="0">
-                <a:solidFill>
-                  <a:srgbClr val="475569"/>
-                </a:solidFill>
-                <a:latin typeface="Arial" pitchFamily="34" charset="0"/>
-                <a:ea typeface="Arial" pitchFamily="34" charset="-122"/>
-                <a:cs typeface="Arial" pitchFamily="34" charset="-120"/>
-              </a:rPr>
-              <a:t>共同边界：只能做对话内情感(①②)——行为数据在OS手里，结构性拿不到</a:t>
-            </a:r>
-            <a:endParaRPr lang="en-US" sz="1000" dirty="0"/>
-          </a:p>
-        </p:txBody>
-      </p:sp>
-      <p:sp>
-        <p:nvSpPr>
-          <p:cNvPr id="13" name="Text 11"/>
-          <p:cNvSpPr/>
-          <p:nvPr/>
-        </p:nvSpPr>
-        <p:spPr>
-          <a:xfrm>
-            <a:off x="365760" y="4709160"/>
-            <a:ext cx="8412480" cy="274320"/>
-          </a:xfrm>
-          <a:prstGeom prst="rect">
-            <a:avLst/>
-          </a:prstGeom>
-          <a:noFill/>
-          <a:ln/>
-        </p:spPr>
-        <p:txBody>
-          <a:bodyPr wrap="square" lIns="0" tIns="0" rIns="0" bIns="0" rtlCol="0" anchor="ctr"/>
-          <a:lstStyle/>
-          <a:p>
-            <a:pPr algn="ctr" indent="0" marL="0">
-              <a:buNone/>
-            </a:pPr>
-            <a:r>
-              <a:rPr lang="en-US" sz="900" i="1" dirty="0">
-                <a:solidFill>
-                  <a:srgbClr val="475569"/>
-                </a:solidFill>
-                <a:latin typeface="Arial" pitchFamily="34" charset="0"/>
-                <a:ea typeface="Arial" pitchFamily="34" charset="-122"/>
-                <a:cs typeface="Arial" pitchFamily="34" charset="-120"/>
-              </a:rPr>
-              <a:t>[ 待调研补充 ]</a:t>
-            </a:r>
-            <a:endParaRPr lang="en-US" sz="900" dirty="0"/>
+          <p:cNvPr id="18" name="Text 16"/>
+          <p:cNvSpPr/>
+          <p:nvPr/>
+        </p:nvSpPr>
+        <p:spPr>
+          <a:xfrm>
+            <a:off x="502920" y="2724912"/>
+            <a:ext cx="1737360" cy="484632"/>
+          </a:xfrm>
+          <a:prstGeom prst="rect">
+            <a:avLst/>
+          </a:prstGeom>
+          <a:noFill/>
+          <a:ln/>
+        </p:spPr>
+        <p:txBody>
+          <a:bodyPr wrap="square" lIns="0" tIns="0" rIns="0" bIns="0" rtlCol="0" anchor="ctr"/>
+          <a:lstStyle/>
+          <a:p>
+            <a:pPr indent="0" marL="0">
+              <a:buNone/>
+            </a:pPr>
+            <a:r>
+              <a:rPr lang="en-US" sz="950" b="1" dirty="0">
+                <a:solidFill>
+                  <a:srgbClr val="FB923C"/>
+                </a:solidFill>
+                <a:latin typeface="Arial" pitchFamily="34" charset="0"/>
+                <a:ea typeface="Arial" pitchFamily="34" charset="-122"/>
+                <a:cs typeface="Arial" pitchFamily="34" charset="-120"/>
+              </a:rPr>
+              <a:t>Inflection → 微软</a:t>
+            </a:r>
+            <a:endParaRPr lang="en-US" sz="950" dirty="0"/>
+          </a:p>
+        </p:txBody>
+      </p:sp>
+      <p:sp>
+        <p:nvSpPr>
+          <p:cNvPr id="19" name="Text 17"/>
+          <p:cNvSpPr/>
+          <p:nvPr/>
+        </p:nvSpPr>
+        <p:spPr>
+          <a:xfrm>
+            <a:off x="2286000" y="2724912"/>
+            <a:ext cx="914400" cy="484632"/>
+          </a:xfrm>
+          <a:prstGeom prst="rect">
+            <a:avLst/>
+          </a:prstGeom>
+          <a:noFill/>
+          <a:ln/>
+        </p:spPr>
+        <p:txBody>
+          <a:bodyPr wrap="square" lIns="0" tIns="0" rIns="0" bIns="0" rtlCol="0" anchor="ctr"/>
+          <a:lstStyle/>
+          <a:p>
+            <a:pPr indent="0" marL="0">
+              <a:buNone/>
+            </a:pPr>
+            <a:r>
+              <a:rPr lang="en-US" sz="800" b="1" dirty="0">
+                <a:solidFill>
+                  <a:srgbClr val="FB923C"/>
+                </a:solidFill>
+                <a:latin typeface="Arial" pitchFamily="34" charset="0"/>
+                <a:ea typeface="Arial" pitchFamily="34" charset="-122"/>
+                <a:cs typeface="Arial" pitchFamily="34" charset="-120"/>
+              </a:rPr>
+              <a:t>拥抱→吸收</a:t>
+            </a:r>
+            <a:endParaRPr lang="en-US" sz="800" dirty="0"/>
+          </a:p>
+        </p:txBody>
+      </p:sp>
+      <p:sp>
+        <p:nvSpPr>
+          <p:cNvPr id="20" name="Text 18"/>
+          <p:cNvSpPr/>
+          <p:nvPr/>
+        </p:nvSpPr>
+        <p:spPr>
+          <a:xfrm>
+            <a:off x="3246120" y="2724912"/>
+            <a:ext cx="5394960" cy="484632"/>
+          </a:xfrm>
+          <a:prstGeom prst="rect">
+            <a:avLst/>
+          </a:prstGeom>
+          <a:noFill/>
+          <a:ln/>
+        </p:spPr>
+        <p:txBody>
+          <a:bodyPr wrap="square" lIns="0" tIns="0" rIns="0" bIns="0" rtlCol="0" anchor="ctr"/>
+          <a:lstStyle/>
+          <a:p>
+            <a:pPr indent="0" marL="0">
+              <a:buNone/>
+            </a:pPr>
+            <a:r>
+              <a:rPr lang="en-US" sz="760" dirty="0">
+                <a:solidFill>
+                  <a:srgbClr val="94A3B8"/>
+                </a:solidFill>
+                <a:latin typeface="Arial" pitchFamily="34" charset="0"/>
+                <a:ea typeface="Arial" pitchFamily="34" charset="-122"/>
+                <a:cs typeface="Arial" pitchFamily="34" charset="-120"/>
+              </a:rPr>
+              <a:t>Pi主打EQ；2024核心团队入微软，Copilot「温暖化」的来源；印证情感能力的价值最终被平台吸收</a:t>
+            </a:r>
+            <a:endParaRPr lang="en-US" sz="760" dirty="0"/>
+          </a:p>
+        </p:txBody>
+      </p:sp>
+      <p:sp>
+        <p:nvSpPr>
+          <p:cNvPr id="21" name="Shape 19"/>
+          <p:cNvSpPr/>
+          <p:nvPr/>
+        </p:nvSpPr>
+        <p:spPr>
+          <a:xfrm>
+            <a:off x="365760" y="3273552"/>
+            <a:ext cx="8412480" cy="484632"/>
+          </a:xfrm>
+          <a:prstGeom prst="roundRect">
+            <a:avLst>
+              <a:gd name="adj" fmla="val 5660"/>
+            </a:avLst>
+          </a:prstGeom>
+          <a:solidFill>
+            <a:srgbClr val="0D1017"/>
+          </a:solidFill>
+          <a:ln w="7620">
+            <a:solidFill>
+              <a:srgbClr val="1A1F2E"/>
+            </a:solidFill>
+            <a:prstDash val="solid"/>
+          </a:ln>
+          <a:effectLst>
+            <a:outerShdw sx="100000" sy="100000" kx="0" ky="0" algn="bl" rotWithShape="0" blurRad="63500" dist="25400" dir="2700000">
+              <a:srgbClr val="000000">
+                <a:alpha val="18000"/>
+              </a:srgbClr>
+            </a:outerShdw>
+          </a:effectLst>
+        </p:spPr>
+      </p:sp>
+      <p:sp>
+        <p:nvSpPr>
+          <p:cNvPr id="22" name="Text 20"/>
+          <p:cNvSpPr/>
+          <p:nvPr/>
+        </p:nvSpPr>
+        <p:spPr>
+          <a:xfrm>
+            <a:off x="502920" y="3273552"/>
+            <a:ext cx="1737360" cy="484632"/>
+          </a:xfrm>
+          <a:prstGeom prst="rect">
+            <a:avLst/>
+          </a:prstGeom>
+          <a:noFill/>
+          <a:ln/>
+        </p:spPr>
+        <p:txBody>
+          <a:bodyPr wrap="square" lIns="0" tIns="0" rIns="0" bIns="0" rtlCol="0" anchor="ctr"/>
+          <a:lstStyle/>
+          <a:p>
+            <a:pPr indent="0" marL="0">
+              <a:buNone/>
+            </a:pPr>
+            <a:r>
+              <a:rPr lang="en-US" sz="950" b="1" dirty="0">
+                <a:solidFill>
+                  <a:srgbClr val="60A5FA"/>
+                </a:solidFill>
+                <a:latin typeface="Arial" pitchFamily="34" charset="0"/>
+                <a:ea typeface="Arial" pitchFamily="34" charset="-122"/>
+                <a:cs typeface="Arial" pitchFamily="34" charset="-120"/>
+              </a:rPr>
+              <a:t>OpenAI</a:t>
+            </a:r>
+            <a:endParaRPr lang="en-US" sz="950" dirty="0"/>
+          </a:p>
+        </p:txBody>
+      </p:sp>
+      <p:sp>
+        <p:nvSpPr>
+          <p:cNvPr id="23" name="Text 21"/>
+          <p:cNvSpPr/>
+          <p:nvPr/>
+        </p:nvSpPr>
+        <p:spPr>
+          <a:xfrm>
+            <a:off x="2286000" y="3273552"/>
+            <a:ext cx="914400" cy="484632"/>
+          </a:xfrm>
+          <a:prstGeom prst="rect">
+            <a:avLst/>
+          </a:prstGeom>
+          <a:noFill/>
+          <a:ln/>
+        </p:spPr>
+        <p:txBody>
+          <a:bodyPr wrap="square" lIns="0" tIns="0" rIns="0" bIns="0" rtlCol="0" anchor="ctr"/>
+          <a:lstStyle/>
+          <a:p>
+            <a:pPr indent="0" marL="0">
+              <a:buNone/>
+            </a:pPr>
+            <a:r>
+              <a:rPr lang="en-US" sz="800" b="1" dirty="0">
+                <a:solidFill>
+                  <a:srgbClr val="60A5FA"/>
+                </a:solidFill>
+                <a:latin typeface="Arial" pitchFamily="34" charset="0"/>
+                <a:ea typeface="Arial" pitchFamily="34" charset="-122"/>
+                <a:cs typeface="Arial" pitchFamily="34" charset="-120"/>
+              </a:rPr>
+              <a:t>克制</a:t>
+            </a:r>
+            <a:endParaRPr lang="en-US" sz="800" dirty="0"/>
+          </a:p>
+        </p:txBody>
+      </p:sp>
+      <p:sp>
+        <p:nvSpPr>
+          <p:cNvPr id="24" name="Text 22"/>
+          <p:cNvSpPr/>
+          <p:nvPr/>
+        </p:nvSpPr>
+        <p:spPr>
+          <a:xfrm>
+            <a:off x="3246120" y="3273552"/>
+            <a:ext cx="5394960" cy="484632"/>
+          </a:xfrm>
+          <a:prstGeom prst="rect">
+            <a:avLst/>
+          </a:prstGeom>
+          <a:noFill/>
+          <a:ln/>
+        </p:spPr>
+        <p:txBody>
+          <a:bodyPr wrap="square" lIns="0" tIns="0" rIns="0" bIns="0" rtlCol="0" anchor="ctr"/>
+          <a:lstStyle/>
+          <a:p>
+            <a:pPr indent="0" marL="0">
+              <a:buNone/>
+            </a:pPr>
+            <a:r>
+              <a:rPr lang="en-US" sz="760" dirty="0">
+                <a:solidFill>
+                  <a:srgbClr val="94A3B8"/>
+                </a:solidFill>
+                <a:latin typeface="Arial" pitchFamily="34" charset="0"/>
+                <a:ea typeface="Arial" pitchFamily="34" charset="-122"/>
+                <a:cs typeface="Arial" pitchFamily="34" charset="-120"/>
+              </a:rPr>
+              <a:t>GPT-4o有情感语音表达能力但不做情绪推断服务；与MIT合作情感依赖研究；2025年诉讼后加心理健康护栏</a:t>
+            </a:r>
+            <a:endParaRPr lang="en-US" sz="760" dirty="0"/>
+          </a:p>
+        </p:txBody>
+      </p:sp>
+      <p:sp>
+        <p:nvSpPr>
+          <p:cNvPr id="25" name="Shape 23"/>
+          <p:cNvSpPr/>
+          <p:nvPr/>
+        </p:nvSpPr>
+        <p:spPr>
+          <a:xfrm>
+            <a:off x="365760" y="3822192"/>
+            <a:ext cx="8412480" cy="484632"/>
+          </a:xfrm>
+          <a:prstGeom prst="roundRect">
+            <a:avLst>
+              <a:gd name="adj" fmla="val 5660"/>
+            </a:avLst>
+          </a:prstGeom>
+          <a:solidFill>
+            <a:srgbClr val="0D1017"/>
+          </a:solidFill>
+          <a:ln w="7620">
+            <a:solidFill>
+              <a:srgbClr val="1A1F2E"/>
+            </a:solidFill>
+            <a:prstDash val="solid"/>
+          </a:ln>
+          <a:effectLst>
+            <a:outerShdw sx="100000" sy="100000" kx="0" ky="0" algn="bl" rotWithShape="0" blurRad="63500" dist="25400" dir="2700000">
+              <a:srgbClr val="000000">
+                <a:alpha val="18000"/>
+              </a:srgbClr>
+            </a:outerShdw>
+          </a:effectLst>
+        </p:spPr>
+      </p:sp>
+      <p:sp>
+        <p:nvSpPr>
+          <p:cNvPr id="26" name="Text 24"/>
+          <p:cNvSpPr/>
+          <p:nvPr/>
+        </p:nvSpPr>
+        <p:spPr>
+          <a:xfrm>
+            <a:off x="502920" y="3822192"/>
+            <a:ext cx="1737360" cy="484632"/>
+          </a:xfrm>
+          <a:prstGeom prst="rect">
+            <a:avLst/>
+          </a:prstGeom>
+          <a:noFill/>
+          <a:ln/>
+        </p:spPr>
+        <p:txBody>
+          <a:bodyPr wrap="square" lIns="0" tIns="0" rIns="0" bIns="0" rtlCol="0" anchor="ctr"/>
+          <a:lstStyle/>
+          <a:p>
+            <a:pPr indent="0" marL="0">
+              <a:buNone/>
+            </a:pPr>
+            <a:r>
+              <a:rPr lang="en-US" sz="950" b="1" dirty="0">
+                <a:solidFill>
+                  <a:srgbClr val="60A5FA"/>
+                </a:solidFill>
+                <a:latin typeface="Arial" pitchFamily="34" charset="0"/>
+                <a:ea typeface="Arial" pitchFamily="34" charset="-122"/>
+                <a:cs typeface="Arial" pitchFamily="34" charset="-120"/>
+              </a:rPr>
+              <a:t>Anthropic</a:t>
+            </a:r>
+            <a:endParaRPr lang="en-US" sz="950" dirty="0"/>
+          </a:p>
+        </p:txBody>
+      </p:sp>
+      <p:sp>
+        <p:nvSpPr>
+          <p:cNvPr id="27" name="Text 25"/>
+          <p:cNvSpPr/>
+          <p:nvPr/>
+        </p:nvSpPr>
+        <p:spPr>
+          <a:xfrm>
+            <a:off x="2286000" y="3822192"/>
+            <a:ext cx="914400" cy="484632"/>
+          </a:xfrm>
+          <a:prstGeom prst="rect">
+            <a:avLst/>
+          </a:prstGeom>
+          <a:noFill/>
+          <a:ln/>
+        </p:spPr>
+        <p:txBody>
+          <a:bodyPr wrap="square" lIns="0" tIns="0" rIns="0" bIns="0" rtlCol="0" anchor="ctr"/>
+          <a:lstStyle/>
+          <a:p>
+            <a:pPr indent="0" marL="0">
+              <a:buNone/>
+            </a:pPr>
+            <a:r>
+              <a:rPr lang="en-US" sz="800" b="1" dirty="0">
+                <a:solidFill>
+                  <a:srgbClr val="60A5FA"/>
+                </a:solidFill>
+                <a:latin typeface="Arial" pitchFamily="34" charset="0"/>
+                <a:ea typeface="Arial" pitchFamily="34" charset="-122"/>
+                <a:cs typeface="Arial" pitchFamily="34" charset="-120"/>
+              </a:rPr>
+              <a:t>克制</a:t>
+            </a:r>
+            <a:endParaRPr lang="en-US" sz="800" dirty="0"/>
+          </a:p>
+        </p:txBody>
+      </p:sp>
+      <p:sp>
+        <p:nvSpPr>
+          <p:cNvPr id="28" name="Text 26"/>
+          <p:cNvSpPr/>
+          <p:nvPr/>
+        </p:nvSpPr>
+        <p:spPr>
+          <a:xfrm>
+            <a:off x="3246120" y="3822192"/>
+            <a:ext cx="5394960" cy="484632"/>
+          </a:xfrm>
+          <a:prstGeom prst="rect">
+            <a:avLst/>
+          </a:prstGeom>
+          <a:noFill/>
+          <a:ln/>
+        </p:spPr>
+        <p:txBody>
+          <a:bodyPr wrap="square" lIns="0" tIns="0" rIns="0" bIns="0" rtlCol="0" anchor="ctr"/>
+          <a:lstStyle/>
+          <a:p>
+            <a:pPr indent="0" marL="0">
+              <a:buNone/>
+            </a:pPr>
+            <a:r>
+              <a:rPr lang="en-US" sz="760" dirty="0">
+                <a:solidFill>
+                  <a:srgbClr val="94A3B8"/>
+                </a:solidFill>
+                <a:latin typeface="Arial" pitchFamily="34" charset="0"/>
+                <a:ea typeface="Arial" pitchFamily="34" charset="-122"/>
+                <a:cs typeface="Arial" pitchFamily="34" charset="-120"/>
+              </a:rPr>
+              <a:t>对情感支持场景明确谨慎；Claude定位专业助手而非陪伴</a:t>
+            </a:r>
+            <a:endParaRPr lang="en-US" sz="760" dirty="0"/>
+          </a:p>
+        </p:txBody>
+      </p:sp>
+      <p:sp>
+        <p:nvSpPr>
+          <p:cNvPr id="29" name="Shape 27"/>
+          <p:cNvSpPr/>
+          <p:nvPr/>
+        </p:nvSpPr>
+        <p:spPr>
+          <a:xfrm>
+            <a:off x="365760" y="4462272"/>
+            <a:ext cx="8412480" cy="566928"/>
+          </a:xfrm>
+          <a:prstGeom prst="roundRect">
+            <a:avLst>
+              <a:gd name="adj" fmla="val 4839"/>
+            </a:avLst>
+          </a:prstGeom>
+          <a:solidFill>
+            <a:srgbClr val="0A1A1F"/>
+          </a:solidFill>
+          <a:ln w="12700">
+            <a:solidFill>
+              <a:srgbClr val="22D3EE"/>
+            </a:solidFill>
+            <a:prstDash val="solid"/>
+          </a:ln>
+          <a:effectLst>
+            <a:outerShdw sx="100000" sy="100000" kx="0" ky="0" algn="bl" rotWithShape="0" blurRad="63500" dist="25400" dir="2700000">
+              <a:srgbClr val="000000">
+                <a:alpha val="18000"/>
+              </a:srgbClr>
+            </a:outerShdw>
+          </a:effectLst>
+        </p:spPr>
+      </p:sp>
+      <p:sp>
+        <p:nvSpPr>
+          <p:cNvPr id="30" name="Text 28"/>
+          <p:cNvSpPr/>
+          <p:nvPr/>
+        </p:nvSpPr>
+        <p:spPr>
+          <a:xfrm>
+            <a:off x="502920" y="4462272"/>
+            <a:ext cx="8138160" cy="566928"/>
+          </a:xfrm>
+          <a:prstGeom prst="rect">
+            <a:avLst/>
+          </a:prstGeom>
+          <a:noFill/>
+          <a:ln/>
+        </p:spPr>
+        <p:txBody>
+          <a:bodyPr wrap="square" lIns="0" tIns="0" rIns="0" bIns="0" rtlCol="0" anchor="ctr"/>
+          <a:lstStyle/>
+          <a:p>
+            <a:pPr indent="0" marL="0">
+              <a:buNone/>
+            </a:pPr>
+            <a:r>
+              <a:rPr lang="en-US" sz="800" b="1" dirty="0">
+                <a:solidFill>
+                  <a:srgbClr val="22D3EE"/>
+                </a:solidFill>
+                <a:latin typeface="Arial" pitchFamily="34" charset="0"/>
+                <a:ea typeface="Arial" pitchFamily="34" charset="-122"/>
+                <a:cs typeface="Arial" pitchFamily="34" charset="-120"/>
+              </a:rPr>
+              <a:t>结构性边界：</a:t>
+            </a:r>
+            <a:pPr indent="0" marL="0">
+              <a:buNone/>
+            </a:pPr>
+            <a:r>
+              <a:rPr lang="en-US" sz="800" dirty="0">
+                <a:solidFill>
+                  <a:srgbClr val="94A3B8"/>
+                </a:solidFill>
+                <a:latin typeface="Arial" pitchFamily="34" charset="0"/>
+                <a:ea typeface="Arial" pitchFamily="34" charset="-122"/>
+                <a:cs typeface="Arial" pitchFamily="34" charset="-120"/>
+              </a:rPr>
+              <a:t>无论拥抱还是克制，模型厂商都只能感知「对话内」的情绪(①②)——行为数据(⑤)在OS手里，API拿不到。这是OS厂商对模型厂商的结构性数据壁垒，也是UTM「OS层不可替代」论点的最强佐证</a:t>
+            </a:r>
+            <a:endParaRPr lang="en-US" sz="800" dirty="0"/>
           </a:p>
         </p:txBody>
       </p:sp>
@@ -31590,7 +32341,7 @@
 
 <file path=ppt/slides/slide24.xml><?xml version="1.0" encoding="utf-8"?>
 <p:sld xmlns:a="http://schemas.openxmlformats.org/drawingml/2006/main" xmlns:r="http://schemas.openxmlformats.org/officeDocument/2006/relationships" xmlns:p="http://schemas.openxmlformats.org/presentationml/2006/main">
-  <p:cSld name="Slide 7">
+  <p:cSld name="Slide 3">
     <p:bg>
       <p:bgPr>
         <a:solidFill>
@@ -31639,13 +32390,13 @@
             <a:r>
               <a:rPr lang="en-US" sz="900" b="1" spc="300" kern="0" dirty="0">
                 <a:solidFill>
-                  <a:srgbClr val="475569"/>
-                </a:solidFill>
-                <a:latin typeface="Arial" pitchFamily="34" charset="0"/>
-                <a:ea typeface="Arial" pitchFamily="34" charset="-122"/>
-                <a:cs typeface="Arial" pitchFamily="34" charset="-120"/>
-              </a:rPr>
-              <a:t>竞品深析 · 待补充</a:t>
+                  <a:srgbClr val="FB923C"/>
+                </a:solidFill>
+                <a:latin typeface="Arial" pitchFamily="34" charset="0"/>
+                <a:ea typeface="Arial" pitchFamily="34" charset="-122"/>
+                <a:cs typeface="Arial" pitchFamily="34" charset="-120"/>
+              </a:rPr>
+              <a:t>竞品深析 · 机器人Top公司</a:t>
             </a:r>
             <a:endParaRPr lang="en-US" sz="900" dirty="0"/>
           </a:p>
@@ -31660,23 +32411,23 @@
         <p:spPr>
           <a:xfrm>
             <a:off x="365760" y="384048"/>
-            <a:ext cx="8412480" cy="411480"/>
-          </a:xfrm>
-          <a:prstGeom prst="rect">
-            <a:avLst/>
-          </a:prstGeom>
-          <a:noFill/>
-          <a:ln/>
-        </p:spPr>
-        <p:txBody>
-          <a:bodyPr wrap="square" lIns="0" tIns="0" rIns="0" bIns="0" rtlCol="0" anchor="ctr"/>
-          <a:lstStyle/>
-          <a:p>
-            <a:pPr indent="0" marL="0">
-              <a:buNone/>
-            </a:pPr>
-            <a:r>
-              <a:rPr lang="en-US" sz="2000" b="1" dirty="0">
+            <a:ext cx="8412480" cy="384048"/>
+          </a:xfrm>
+          <a:prstGeom prst="rect">
+            <a:avLst/>
+          </a:prstGeom>
+          <a:noFill/>
+          <a:ln/>
+        </p:spPr>
+        <p:txBody>
+          <a:bodyPr wrap="square" lIns="0" tIns="0" rIns="0" bIns="0" rtlCol="0" anchor="ctr"/>
+          <a:lstStyle/>
+          <a:p>
+            <a:pPr indent="0" marL="0">
+              <a:buNone/>
+            </a:pPr>
+            <a:r>
+              <a:rPr lang="en-US" sz="1700" b="1" dirty="0">
                 <a:solidFill>
                   <a:srgbClr val="F8FAFC"/>
                 </a:solidFill>
@@ -31684,9 +32435,9 @@
                 <a:ea typeface="Cambria" pitchFamily="34" charset="-122"/>
                 <a:cs typeface="Cambria" pitchFamily="34" charset="-120"/>
               </a:rPr>
-              <a:t>机器人Top公司：情感布局分析（占位）</a:t>
-            </a:r>
-            <a:endParaRPr lang="en-US" sz="2000" dirty="0"/>
+              <a:t>机器人：工业零情感，家庭讲「情感纽带」，语音层进口</a:t>
+            </a:r>
+            <a:endParaRPr lang="en-US" sz="1700" dirty="0"/>
           </a:p>
         </p:txBody>
       </p:sp>
@@ -31698,24 +32449,24 @@
         </p:nvSpPr>
         <p:spPr>
           <a:xfrm>
-            <a:off x="365760" y="804672"/>
-            <a:ext cx="8412480" cy="228600"/>
-          </a:xfrm>
-          <a:prstGeom prst="rect">
-            <a:avLst/>
-          </a:prstGeom>
-          <a:noFill/>
-          <a:ln/>
-        </p:spPr>
-        <p:txBody>
-          <a:bodyPr wrap="square" lIns="0" tIns="0" rIns="0" bIns="0" rtlCol="0" anchor="ctr"/>
-          <a:lstStyle/>
-          <a:p>
-            <a:pPr indent="0" marL="0">
-              <a:buNone/>
-            </a:pPr>
-            <a:r>
-              <a:rPr lang="en-US" sz="950" dirty="0">
+            <a:off x="365760" y="777240"/>
+            <a:ext cx="8412480" cy="201168"/>
+          </a:xfrm>
+          <a:prstGeom prst="rect">
+            <a:avLst/>
+          </a:prstGeom>
+          <a:noFill/>
+          <a:ln/>
+        </p:spPr>
+        <p:txBody>
+          <a:bodyPr wrap="square" lIns="0" tIns="0" rIns="0" bIns="0" rtlCol="0" anchor="ctr"/>
+          <a:lstStyle/>
+          <a:p>
+            <a:pPr indent="0" marL="0">
+              <a:buNone/>
+            </a:pPr>
+            <a:r>
+              <a:rPr lang="en-US" sz="900" dirty="0">
                 <a:solidFill>
                   <a:srgbClr val="94A3B8"/>
                 </a:solidFill>
@@ -31723,9 +32474,9 @@
                 <a:ea typeface="Arial" pitchFamily="34" charset="-122"/>
                 <a:cs typeface="Arial" pitchFamily="34" charset="-120"/>
               </a:rPr>
-              <a:t>候选：Tesla Optimus · Figure · 宇树 Unitree · 智元 · 1X · Boston Dynamics</a:t>
-            </a:r>
-            <a:endParaRPr lang="en-US" sz="950" dirty="0"/>
+              <a:t>2026已是量产品类(Unitree $17,990上架Amazon)· 情感布局按场景分裂</a:t>
+            </a:r>
+            <a:endParaRPr lang="en-US" sz="900" dirty="0"/>
           </a:p>
         </p:txBody>
       </p:sp>
@@ -31737,18 +32488,18 @@
         </p:nvSpPr>
         <p:spPr>
           <a:xfrm>
-            <a:off x="365760" y="1234440"/>
-            <a:ext cx="8412480" cy="621792"/>
+            <a:off x="365760" y="1078992"/>
+            <a:ext cx="8412480" cy="530352"/>
           </a:xfrm>
           <a:prstGeom prst="roundRect">
             <a:avLst>
-              <a:gd name="adj" fmla="val 4412"/>
+              <a:gd name="adj" fmla="val 5172"/>
             </a:avLst>
           </a:prstGeom>
           <a:solidFill>
-            <a:srgbClr val="0A0C11"/>
+            <a:srgbClr val="0D1017"/>
           </a:solidFill>
-          <a:ln w="10160">
+          <a:ln w="7620">
             <a:solidFill>
               <a:srgbClr val="1A1F2E"/>
             </a:solidFill>
@@ -31771,57 +32522,135 @@
         </p:nvSpPr>
         <p:spPr>
           <a:xfrm>
-            <a:off x="502920" y="1234440"/>
-            <a:ext cx="8138160" cy="621792"/>
-          </a:xfrm>
-          <a:prstGeom prst="rect">
-            <a:avLst/>
-          </a:prstGeom>
-          <a:noFill/>
-          <a:ln/>
-        </p:spPr>
-        <p:txBody>
-          <a:bodyPr wrap="square" lIns="0" tIns="0" rIns="0" bIns="0" rtlCol="0" anchor="ctr"/>
-          <a:lstStyle/>
-          <a:p>
-            <a:pPr indent="0" marL="0">
-              <a:buNone/>
-            </a:pPr>
-            <a:r>
-              <a:rPr lang="en-US" sz="1000" b="1" dirty="0">
-                <a:solidFill>
-                  <a:srgbClr val="475569"/>
-                </a:solidFill>
-                <a:latin typeface="Arial" pitchFamily="34" charset="0"/>
-                <a:ea typeface="Arial" pitchFamily="34" charset="-122"/>
-                <a:cs typeface="Arial" pitchFamily="34" charset="-120"/>
-              </a:rPr>
-              <a:t>具身智能的情感感知：多模态(视觉+语音+接触)天然融合场景</a:t>
-            </a:r>
-            <a:endParaRPr lang="en-US" sz="1000" dirty="0"/>
-          </a:p>
-        </p:txBody>
-      </p:sp>
-      <p:sp>
-        <p:nvSpPr>
-          <p:cNvPr id="7" name="Shape 5"/>
-          <p:cNvSpPr/>
-          <p:nvPr/>
-        </p:nvSpPr>
-        <p:spPr>
-          <a:xfrm>
-            <a:off x="365760" y="1947672"/>
-            <a:ext cx="8412480" cy="621792"/>
+            <a:off x="502920" y="1078992"/>
+            <a:ext cx="1737360" cy="530352"/>
+          </a:xfrm>
+          <a:prstGeom prst="rect">
+            <a:avLst/>
+          </a:prstGeom>
+          <a:noFill/>
+          <a:ln/>
+        </p:spPr>
+        <p:txBody>
+          <a:bodyPr wrap="square" lIns="0" tIns="0" rIns="0" bIns="0" rtlCol="0" anchor="ctr"/>
+          <a:lstStyle/>
+          <a:p>
+            <a:pPr indent="0" marL="0">
+              <a:buNone/>
+            </a:pPr>
+            <a:r>
+              <a:rPr lang="en-US" sz="950" b="1" dirty="0">
+                <a:solidFill>
+                  <a:srgbClr val="F87171"/>
+                </a:solidFill>
+                <a:latin typeface="Arial" pitchFamily="34" charset="0"/>
+                <a:ea typeface="Arial" pitchFamily="34" charset="-122"/>
+                <a:cs typeface="Arial" pitchFamily="34" charset="-120"/>
+              </a:rPr>
+              <a:t>Tesla Optimus V3</a:t>
+            </a:r>
+            <a:endParaRPr lang="en-US" sz="950" dirty="0"/>
+          </a:p>
+        </p:txBody>
+      </p:sp>
+      <p:sp>
+        <p:nvSpPr>
+          <p:cNvPr id="7" name="Text 5"/>
+          <p:cNvSpPr/>
+          <p:nvPr/>
+        </p:nvSpPr>
+        <p:spPr>
+          <a:xfrm>
+            <a:off x="2286000" y="1078992"/>
+            <a:ext cx="960120" cy="530352"/>
+          </a:xfrm>
+          <a:prstGeom prst="rect">
+            <a:avLst/>
+          </a:prstGeom>
+          <a:noFill/>
+          <a:ln/>
+        </p:spPr>
+        <p:txBody>
+          <a:bodyPr wrap="square" lIns="0" tIns="0" rIns="0" bIns="0" rtlCol="0" anchor="ctr"/>
+          <a:lstStyle/>
+          <a:p>
+            <a:pPr indent="0" marL="0">
+              <a:buNone/>
+            </a:pPr>
+            <a:r>
+              <a:rPr lang="en-US" sz="800" b="1" dirty="0">
+                <a:solidFill>
+                  <a:srgbClr val="F87171"/>
+                </a:solidFill>
+                <a:latin typeface="Arial" pitchFamily="34" charset="0"/>
+                <a:ea typeface="Arial" pitchFamily="34" charset="-122"/>
+                <a:cs typeface="Arial" pitchFamily="34" charset="-120"/>
+              </a:rPr>
+              <a:t>工业→家庭</a:t>
+            </a:r>
+            <a:endParaRPr lang="en-US" sz="800" dirty="0"/>
+          </a:p>
+        </p:txBody>
+      </p:sp>
+      <p:sp>
+        <p:nvSpPr>
+          <p:cNvPr id="8" name="Text 6"/>
+          <p:cNvSpPr/>
+          <p:nvPr/>
+        </p:nvSpPr>
+        <p:spPr>
+          <a:xfrm>
+            <a:off x="3291840" y="1078992"/>
+            <a:ext cx="5349240" cy="530352"/>
+          </a:xfrm>
+          <a:prstGeom prst="rect">
+            <a:avLst/>
+          </a:prstGeom>
+          <a:noFill/>
+          <a:ln/>
+        </p:spPr>
+        <p:txBody>
+          <a:bodyPr wrap="square" lIns="0" tIns="0" rIns="0" bIns="0" rtlCol="0" anchor="ctr"/>
+          <a:lstStyle/>
+          <a:p>
+            <a:pPr indent="0" marL="0">
+              <a:buNone/>
+            </a:pPr>
+            <a:r>
+              <a:rPr lang="en-US" sz="760" dirty="0">
+                <a:solidFill>
+                  <a:srgbClr val="94A3B8"/>
+                </a:solidFill>
+                <a:latin typeface="Arial" pitchFamily="34" charset="0"/>
+                <a:ea typeface="Arial" pitchFamily="34" charset="-122"/>
+                <a:cs typeface="Arial" pitchFamily="34" charset="-120"/>
+              </a:rPr>
+              <a:t>22-DoF手+AI5芯片，2026夏Fremont量产；语音层直接用Grok——情感能力从模型厂商进口，自身无情感感知研发</a:t>
+            </a:r>
+            <a:endParaRPr lang="en-US" sz="760" dirty="0"/>
+          </a:p>
+        </p:txBody>
+      </p:sp>
+      <p:sp>
+        <p:nvSpPr>
+          <p:cNvPr id="9" name="Shape 7"/>
+          <p:cNvSpPr/>
+          <p:nvPr/>
+        </p:nvSpPr>
+        <p:spPr>
+          <a:xfrm>
+            <a:off x="365760" y="1682496"/>
+            <a:ext cx="8412480" cy="530352"/>
           </a:xfrm>
           <a:prstGeom prst="roundRect">
             <a:avLst>
-              <a:gd name="adj" fmla="val 4412"/>
+              <a:gd name="adj" fmla="val 5172"/>
             </a:avLst>
           </a:prstGeom>
           <a:solidFill>
-            <a:srgbClr val="0A0C11"/>
+            <a:srgbClr val="0D1017"/>
           </a:solidFill>
-          <a:ln w="10160">
+          <a:ln w="7620">
             <a:solidFill>
               <a:srgbClr val="1A1F2E"/>
             </a:solidFill>
@@ -31838,63 +32667,141 @@
       </p:sp>
       <p:sp>
         <p:nvSpPr>
-          <p:cNvPr id="8" name="Text 6"/>
-          <p:cNvSpPr/>
-          <p:nvPr/>
-        </p:nvSpPr>
-        <p:spPr>
-          <a:xfrm>
-            <a:off x="502920" y="1947672"/>
-            <a:ext cx="8138160" cy="621792"/>
-          </a:xfrm>
-          <a:prstGeom prst="rect">
-            <a:avLst/>
-          </a:prstGeom>
-          <a:noFill/>
-          <a:ln/>
-        </p:spPr>
-        <p:txBody>
-          <a:bodyPr wrap="square" lIns="0" tIns="0" rIns="0" bIns="0" rtlCol="0" anchor="ctr"/>
-          <a:lstStyle/>
-          <a:p>
-            <a:pPr indent="0" marL="0">
-              <a:buNone/>
-            </a:pPr>
-            <a:r>
-              <a:rPr lang="en-US" sz="1000" b="1" dirty="0">
-                <a:solidFill>
-                  <a:srgbClr val="475569"/>
-                </a:solidFill>
-                <a:latin typeface="Arial" pitchFamily="34" charset="0"/>
-                <a:ea typeface="Arial" pitchFamily="34" charset="-122"/>
-                <a:cs typeface="Arial" pitchFamily="34" charset="-120"/>
-              </a:rPr>
-              <a:t>服务/陪伴机器人 vs 工业机器人的情感需求分野</a:t>
-            </a:r>
-            <a:endParaRPr lang="en-US" sz="1000" dirty="0"/>
-          </a:p>
-        </p:txBody>
-      </p:sp>
-      <p:sp>
-        <p:nvSpPr>
-          <p:cNvPr id="9" name="Shape 7"/>
-          <p:cNvSpPr/>
-          <p:nvPr/>
-        </p:nvSpPr>
-        <p:spPr>
-          <a:xfrm>
-            <a:off x="365760" y="2660904"/>
-            <a:ext cx="8412480" cy="621792"/>
+          <p:cNvPr id="10" name="Text 8"/>
+          <p:cNvSpPr/>
+          <p:nvPr/>
+        </p:nvSpPr>
+        <p:spPr>
+          <a:xfrm>
+            <a:off x="502920" y="1682496"/>
+            <a:ext cx="1737360" cy="530352"/>
+          </a:xfrm>
+          <a:prstGeom prst="rect">
+            <a:avLst/>
+          </a:prstGeom>
+          <a:noFill/>
+          <a:ln/>
+        </p:spPr>
+        <p:txBody>
+          <a:bodyPr wrap="square" lIns="0" tIns="0" rIns="0" bIns="0" rtlCol="0" anchor="ctr"/>
+          <a:lstStyle/>
+          <a:p>
+            <a:pPr indent="0" marL="0">
+              <a:buNone/>
+            </a:pPr>
+            <a:r>
+              <a:rPr lang="en-US" sz="950" b="1" dirty="0">
+                <a:solidFill>
+                  <a:srgbClr val="60A5FA"/>
+                </a:solidFill>
+                <a:latin typeface="Arial" pitchFamily="34" charset="0"/>
+                <a:ea typeface="Arial" pitchFamily="34" charset="-122"/>
+                <a:cs typeface="Arial" pitchFamily="34" charset="-120"/>
+              </a:rPr>
+              <a:t>Figure 03</a:t>
+            </a:r>
+            <a:endParaRPr lang="en-US" sz="950" dirty="0"/>
+          </a:p>
+        </p:txBody>
+      </p:sp>
+      <p:sp>
+        <p:nvSpPr>
+          <p:cNvPr id="11" name="Text 9"/>
+          <p:cNvSpPr/>
+          <p:nvPr/>
+        </p:nvSpPr>
+        <p:spPr>
+          <a:xfrm>
+            <a:off x="2286000" y="1682496"/>
+            <a:ext cx="960120" cy="530352"/>
+          </a:xfrm>
+          <a:prstGeom prst="rect">
+            <a:avLst/>
+          </a:prstGeom>
+          <a:noFill/>
+          <a:ln/>
+        </p:spPr>
+        <p:txBody>
+          <a:bodyPr wrap="square" lIns="0" tIns="0" rIns="0" bIns="0" rtlCol="0" anchor="ctr"/>
+          <a:lstStyle/>
+          <a:p>
+            <a:pPr indent="0" marL="0">
+              <a:buNone/>
+            </a:pPr>
+            <a:r>
+              <a:rPr lang="en-US" sz="800" b="1" dirty="0">
+                <a:solidFill>
+                  <a:srgbClr val="60A5FA"/>
+                </a:solidFill>
+                <a:latin typeface="Arial" pitchFamily="34" charset="0"/>
+                <a:ea typeface="Arial" pitchFamily="34" charset="-122"/>
+                <a:cs typeface="Arial" pitchFamily="34" charset="-120"/>
+              </a:rPr>
+              <a:t>工业</a:t>
+            </a:r>
+            <a:endParaRPr lang="en-US" sz="800" dirty="0"/>
+          </a:p>
+        </p:txBody>
+      </p:sp>
+      <p:sp>
+        <p:nvSpPr>
+          <p:cNvPr id="12" name="Text 10"/>
+          <p:cNvSpPr/>
+          <p:nvPr/>
+        </p:nvSpPr>
+        <p:spPr>
+          <a:xfrm>
+            <a:off x="3291840" y="1682496"/>
+            <a:ext cx="5349240" cy="530352"/>
+          </a:xfrm>
+          <a:prstGeom prst="rect">
+            <a:avLst/>
+          </a:prstGeom>
+          <a:noFill/>
+          <a:ln/>
+        </p:spPr>
+        <p:txBody>
+          <a:bodyPr wrap="square" lIns="0" tIns="0" rIns="0" bIns="0" rtlCol="0" anchor="ctr"/>
+          <a:lstStyle/>
+          <a:p>
+            <a:pPr indent="0" marL="0">
+              <a:buNone/>
+            </a:pPr>
+            <a:r>
+              <a:rPr lang="en-US" sz="760" dirty="0">
+                <a:solidFill>
+                  <a:srgbClr val="94A3B8"/>
+                </a:solidFill>
+                <a:latin typeface="Arial" pitchFamily="34" charset="0"/>
+                <a:ea typeface="Arial" pitchFamily="34" charset="-122"/>
+                <a:cs typeface="Arial" pitchFamily="34" charset="-120"/>
+              </a:rPr>
+              <a:t>BMW工厂商用(约$25/机器人小时)；Helix VLA专注任务执行——工业场景零情感需求，全部算力给操作</a:t>
+            </a:r>
+            <a:endParaRPr lang="en-US" sz="760" dirty="0"/>
+          </a:p>
+        </p:txBody>
+      </p:sp>
+      <p:sp>
+        <p:nvSpPr>
+          <p:cNvPr id="13" name="Shape 11"/>
+          <p:cNvSpPr/>
+          <p:nvPr/>
+        </p:nvSpPr>
+        <p:spPr>
+          <a:xfrm>
+            <a:off x="365760" y="2286000"/>
+            <a:ext cx="8412480" cy="530352"/>
           </a:xfrm>
           <a:prstGeom prst="roundRect">
             <a:avLst>
-              <a:gd name="adj" fmla="val 4412"/>
+              <a:gd name="adj" fmla="val 5172"/>
             </a:avLst>
           </a:prstGeom>
           <a:solidFill>
-            <a:srgbClr val="0A0C11"/>
+            <a:srgbClr val="0D1017"/>
           </a:solidFill>
-          <a:ln w="10160">
+          <a:ln w="7620">
             <a:solidFill>
               <a:srgbClr val="1A1F2E"/>
             </a:solidFill>
@@ -31911,63 +32818,141 @@
       </p:sp>
       <p:sp>
         <p:nvSpPr>
-          <p:cNvPr id="10" name="Text 8"/>
-          <p:cNvSpPr/>
-          <p:nvPr/>
-        </p:nvSpPr>
-        <p:spPr>
-          <a:xfrm>
-            <a:off x="502920" y="2660904"/>
-            <a:ext cx="8138160" cy="621792"/>
-          </a:xfrm>
-          <a:prstGeom prst="rect">
-            <a:avLst/>
-          </a:prstGeom>
-          <a:noFill/>
-          <a:ln/>
-        </p:spPr>
-        <p:txBody>
-          <a:bodyPr wrap="square" lIns="0" tIns="0" rIns="0" bIns="0" rtlCol="0" anchor="ctr"/>
-          <a:lstStyle/>
-          <a:p>
-            <a:pPr indent="0" marL="0">
-              <a:buNone/>
-            </a:pPr>
-            <a:r>
-              <a:rPr lang="en-US" sz="1000" b="1" dirty="0">
-                <a:solidFill>
-                  <a:srgbClr val="475569"/>
-                </a:solidFill>
-                <a:latin typeface="Arial" pitchFamily="34" charset="0"/>
-                <a:ea typeface="Arial" pitchFamily="34" charset="-122"/>
-                <a:cs typeface="Arial" pitchFamily="34" charset="-120"/>
-              </a:rPr>
-              <a:t>与手机OS的关系：状态模型可否跨设备共享</a:t>
-            </a:r>
-            <a:endParaRPr lang="en-US" sz="1000" dirty="0"/>
-          </a:p>
-        </p:txBody>
-      </p:sp>
-      <p:sp>
-        <p:nvSpPr>
-          <p:cNvPr id="11" name="Shape 9"/>
-          <p:cNvSpPr/>
-          <p:nvPr/>
-        </p:nvSpPr>
-        <p:spPr>
-          <a:xfrm>
-            <a:off x="365760" y="3374136"/>
-            <a:ext cx="8412480" cy="621792"/>
+          <p:cNvPr id="14" name="Text 12"/>
+          <p:cNvSpPr/>
+          <p:nvPr/>
+        </p:nvSpPr>
+        <p:spPr>
+          <a:xfrm>
+            <a:off x="502920" y="2286000"/>
+            <a:ext cx="1737360" cy="530352"/>
+          </a:xfrm>
+          <a:prstGeom prst="rect">
+            <a:avLst/>
+          </a:prstGeom>
+          <a:noFill/>
+          <a:ln/>
+        </p:spPr>
+        <p:txBody>
+          <a:bodyPr wrap="square" lIns="0" tIns="0" rIns="0" bIns="0" rtlCol="0" anchor="ctr"/>
+          <a:lstStyle/>
+          <a:p>
+            <a:pPr indent="0" marL="0">
+              <a:buNone/>
+            </a:pPr>
+            <a:r>
+              <a:rPr lang="en-US" sz="950" b="1" dirty="0">
+                <a:solidFill>
+                  <a:srgbClr val="22D3EE"/>
+                </a:solidFill>
+                <a:latin typeface="Arial" pitchFamily="34" charset="0"/>
+                <a:ea typeface="Arial" pitchFamily="34" charset="-122"/>
+                <a:cs typeface="Arial" pitchFamily="34" charset="-120"/>
+              </a:rPr>
+              <a:t>Unitree G1/H1</a:t>
+            </a:r>
+            <a:endParaRPr lang="en-US" sz="950" dirty="0"/>
+          </a:p>
+        </p:txBody>
+      </p:sp>
+      <p:sp>
+        <p:nvSpPr>
+          <p:cNvPr id="15" name="Text 13"/>
+          <p:cNvSpPr/>
+          <p:nvPr/>
+        </p:nvSpPr>
+        <p:spPr>
+          <a:xfrm>
+            <a:off x="2286000" y="2286000"/>
+            <a:ext cx="960120" cy="530352"/>
+          </a:xfrm>
+          <a:prstGeom prst="rect">
+            <a:avLst/>
+          </a:prstGeom>
+          <a:noFill/>
+          <a:ln/>
+        </p:spPr>
+        <p:txBody>
+          <a:bodyPr wrap="square" lIns="0" tIns="0" rIns="0" bIns="0" rtlCol="0" anchor="ctr"/>
+          <a:lstStyle/>
+          <a:p>
+            <a:pPr indent="0" marL="0">
+              <a:buNone/>
+            </a:pPr>
+            <a:r>
+              <a:rPr lang="en-US" sz="800" b="1" dirty="0">
+                <a:solidFill>
+                  <a:srgbClr val="22D3EE"/>
+                </a:solidFill>
+                <a:latin typeface="Arial" pitchFamily="34" charset="0"/>
+                <a:ea typeface="Arial" pitchFamily="34" charset="-122"/>
+                <a:cs typeface="Arial" pitchFamily="34" charset="-120"/>
+              </a:rPr>
+              <a:t>开放平台</a:t>
+            </a:r>
+            <a:endParaRPr lang="en-US" sz="800" dirty="0"/>
+          </a:p>
+        </p:txBody>
+      </p:sp>
+      <p:sp>
+        <p:nvSpPr>
+          <p:cNvPr id="16" name="Text 14"/>
+          <p:cNvSpPr/>
+          <p:nvPr/>
+        </p:nvSpPr>
+        <p:spPr>
+          <a:xfrm>
+            <a:off x="3291840" y="2286000"/>
+            <a:ext cx="5349240" cy="530352"/>
+          </a:xfrm>
+          <a:prstGeom prst="rect">
+            <a:avLst/>
+          </a:prstGeom>
+          <a:noFill/>
+          <a:ln/>
+        </p:spPr>
+        <p:txBody>
+          <a:bodyPr wrap="square" lIns="0" tIns="0" rIns="0" bIns="0" rtlCol="0" anchor="ctr"/>
+          <a:lstStyle/>
+          <a:p>
+            <a:pPr indent="0" marL="0">
+              <a:buNone/>
+            </a:pPr>
+            <a:r>
+              <a:rPr lang="en-US" sz="760" dirty="0">
+                <a:solidFill>
+                  <a:srgbClr val="94A3B8"/>
+                </a:solidFill>
+                <a:latin typeface="Arial" pitchFamily="34" charset="0"/>
+                <a:ea typeface="Arial" pitchFamily="34" charset="-122"/>
+                <a:cs typeface="Arial" pitchFamily="34" charset="-120"/>
+              </a:rPr>
+              <a:t>5500+台出货(2025)；开源UnifoLM-VLA-0；开放SDK=情感能力留给开发者生态，自身不做</a:t>
+            </a:r>
+            <a:endParaRPr lang="en-US" sz="760" dirty="0"/>
+          </a:p>
+        </p:txBody>
+      </p:sp>
+      <p:sp>
+        <p:nvSpPr>
+          <p:cNvPr id="17" name="Shape 15"/>
+          <p:cNvSpPr/>
+          <p:nvPr/>
+        </p:nvSpPr>
+        <p:spPr>
+          <a:xfrm>
+            <a:off x="365760" y="2889504"/>
+            <a:ext cx="8412480" cy="530352"/>
           </a:xfrm>
           <a:prstGeom prst="roundRect">
             <a:avLst>
-              <a:gd name="adj" fmla="val 4412"/>
+              <a:gd name="adj" fmla="val 5172"/>
             </a:avLst>
           </a:prstGeom>
           <a:solidFill>
-            <a:srgbClr val="0A0C11"/>
+            <a:srgbClr val="0D1017"/>
           </a:solidFill>
-          <a:ln w="10160">
+          <a:ln w="7620">
             <a:solidFill>
               <a:srgbClr val="1A1F2E"/>
             </a:solidFill>
@@ -31984,30 +32969,1007 @@
       </p:sp>
       <p:sp>
         <p:nvSpPr>
+          <p:cNvPr id="18" name="Text 16"/>
+          <p:cNvSpPr/>
+          <p:nvPr/>
+        </p:nvSpPr>
+        <p:spPr>
+          <a:xfrm>
+            <a:off x="502920" y="2889504"/>
+            <a:ext cx="1737360" cy="530352"/>
+          </a:xfrm>
+          <a:prstGeom prst="rect">
+            <a:avLst/>
+          </a:prstGeom>
+          <a:noFill/>
+          <a:ln/>
+        </p:spPr>
+        <p:txBody>
+          <a:bodyPr wrap="square" lIns="0" tIns="0" rIns="0" bIns="0" rtlCol="0" anchor="ctr"/>
+          <a:lstStyle/>
+          <a:p>
+            <a:pPr indent="0" marL="0">
+              <a:buNone/>
+            </a:pPr>
+            <a:r>
+              <a:rPr lang="en-US" sz="950" b="1" dirty="0">
+                <a:solidFill>
+                  <a:srgbClr val="4ADE80"/>
+                </a:solidFill>
+                <a:latin typeface="Arial" pitchFamily="34" charset="0"/>
+                <a:ea typeface="Arial" pitchFamily="34" charset="-122"/>
+                <a:cs typeface="Arial" pitchFamily="34" charset="-120"/>
+              </a:rPr>
+              <a:t>1X NEO</a:t>
+            </a:r>
+            <a:endParaRPr lang="en-US" sz="950" dirty="0"/>
+          </a:p>
+        </p:txBody>
+      </p:sp>
+      <p:sp>
+        <p:nvSpPr>
+          <p:cNvPr id="19" name="Text 17"/>
+          <p:cNvSpPr/>
+          <p:nvPr/>
+        </p:nvSpPr>
+        <p:spPr>
+          <a:xfrm>
+            <a:off x="2286000" y="2889504"/>
+            <a:ext cx="960120" cy="530352"/>
+          </a:xfrm>
+          <a:prstGeom prst="rect">
+            <a:avLst/>
+          </a:prstGeom>
+          <a:noFill/>
+          <a:ln/>
+        </p:spPr>
+        <p:txBody>
+          <a:bodyPr wrap="square" lIns="0" tIns="0" rIns="0" bIns="0" rtlCol="0" anchor="ctr"/>
+          <a:lstStyle/>
+          <a:p>
+            <a:pPr indent="0" marL="0">
+              <a:buNone/>
+            </a:pPr>
+            <a:r>
+              <a:rPr lang="en-US" sz="800" b="1" dirty="0">
+                <a:solidFill>
+                  <a:srgbClr val="4ADE80"/>
+                </a:solidFill>
+                <a:latin typeface="Arial" pitchFamily="34" charset="0"/>
+                <a:ea typeface="Arial" pitchFamily="34" charset="-122"/>
+                <a:cs typeface="Arial" pitchFamily="34" charset="-120"/>
+              </a:rPr>
+              <a:t>家庭</a:t>
+            </a:r>
+            <a:endParaRPr lang="en-US" sz="800" dirty="0"/>
+          </a:p>
+        </p:txBody>
+      </p:sp>
+      <p:sp>
+        <p:nvSpPr>
+          <p:cNvPr id="20" name="Text 18"/>
+          <p:cNvSpPr/>
+          <p:nvPr/>
+        </p:nvSpPr>
+        <p:spPr>
+          <a:xfrm>
+            <a:off x="3291840" y="2889504"/>
+            <a:ext cx="5349240" cy="530352"/>
+          </a:xfrm>
+          <a:prstGeom prst="rect">
+            <a:avLst/>
+          </a:prstGeom>
+          <a:noFill/>
+          <a:ln/>
+        </p:spPr>
+        <p:txBody>
+          <a:bodyPr wrap="square" lIns="0" tIns="0" rIns="0" bIns="0" rtlCol="0" anchor="ctr"/>
+          <a:lstStyle/>
+          <a:p>
+            <a:pPr indent="0" marL="0">
+              <a:buNone/>
+            </a:pPr>
+            <a:r>
+              <a:rPr lang="en-US" sz="760" dirty="0">
+                <a:solidFill>
+                  <a:srgbClr val="94A3B8"/>
+                </a:solidFill>
+                <a:latin typeface="Arial" pitchFamily="34" charset="0"/>
+                <a:ea typeface="Arial" pitchFamily="34" charset="-122"/>
+                <a:cs typeface="Arial" pitchFamily="34" charset="-120"/>
+              </a:rPr>
+              <a:t>OpenAI系；1万+家庭预订；腱驱动'温和到可近儿童宠物'；官方叙事「building emotional bonds」——唯一把情感纽带写进定位的头部厂商</a:t>
+            </a:r>
+            <a:endParaRPr lang="en-US" sz="760" dirty="0"/>
+          </a:p>
+        </p:txBody>
+      </p:sp>
+      <p:sp>
+        <p:nvSpPr>
+          <p:cNvPr id="21" name="Shape 19"/>
+          <p:cNvSpPr/>
+          <p:nvPr/>
+        </p:nvSpPr>
+        <p:spPr>
+          <a:xfrm>
+            <a:off x="365760" y="3493008"/>
+            <a:ext cx="8412480" cy="530352"/>
+          </a:xfrm>
+          <a:prstGeom prst="roundRect">
+            <a:avLst>
+              <a:gd name="adj" fmla="val 5172"/>
+            </a:avLst>
+          </a:prstGeom>
+          <a:solidFill>
+            <a:srgbClr val="0D1017"/>
+          </a:solidFill>
+          <a:ln w="7620">
+            <a:solidFill>
+              <a:srgbClr val="1A1F2E"/>
+            </a:solidFill>
+            <a:prstDash val="solid"/>
+          </a:ln>
+          <a:effectLst>
+            <a:outerShdw sx="100000" sy="100000" kx="0" ky="0" algn="bl" rotWithShape="0" blurRad="63500" dist="25400" dir="2700000">
+              <a:srgbClr val="000000">
+                <a:alpha val="18000"/>
+              </a:srgbClr>
+            </a:outerShdw>
+          </a:effectLst>
+        </p:spPr>
+      </p:sp>
+      <p:sp>
+        <p:nvSpPr>
+          <p:cNvPr id="22" name="Text 20"/>
+          <p:cNvSpPr/>
+          <p:nvPr/>
+        </p:nvSpPr>
+        <p:spPr>
+          <a:xfrm>
+            <a:off x="502920" y="3493008"/>
+            <a:ext cx="1737360" cy="530352"/>
+          </a:xfrm>
+          <a:prstGeom prst="rect">
+            <a:avLst/>
+          </a:prstGeom>
+          <a:noFill/>
+          <a:ln/>
+        </p:spPr>
+        <p:txBody>
+          <a:bodyPr wrap="square" lIns="0" tIns="0" rIns="0" bIns="0" rtlCol="0" anchor="ctr"/>
+          <a:lstStyle/>
+          <a:p>
+            <a:pPr indent="0" marL="0">
+              <a:buNone/>
+            </a:pPr>
+            <a:r>
+              <a:rPr lang="en-US" sz="950" b="1" dirty="0">
+                <a:solidFill>
+                  <a:srgbClr val="FB923C"/>
+                </a:solidFill>
+                <a:latin typeface="Arial" pitchFamily="34" charset="0"/>
+                <a:ea typeface="Arial" pitchFamily="34" charset="-122"/>
+                <a:cs typeface="Arial" pitchFamily="34" charset="-120"/>
+              </a:rPr>
+              <a:t>UBTECH/优必选 等</a:t>
+            </a:r>
+            <a:endParaRPr lang="en-US" sz="950" dirty="0"/>
+          </a:p>
+        </p:txBody>
+      </p:sp>
+      <p:sp>
+        <p:nvSpPr>
+          <p:cNvPr id="23" name="Text 21"/>
+          <p:cNvSpPr/>
+          <p:nvPr/>
+        </p:nvSpPr>
+        <p:spPr>
+          <a:xfrm>
+            <a:off x="2286000" y="3493008"/>
+            <a:ext cx="960120" cy="530352"/>
+          </a:xfrm>
+          <a:prstGeom prst="rect">
+            <a:avLst/>
+          </a:prstGeom>
+          <a:noFill/>
+          <a:ln/>
+        </p:spPr>
+        <p:txBody>
+          <a:bodyPr wrap="square" lIns="0" tIns="0" rIns="0" bIns="0" rtlCol="0" anchor="ctr"/>
+          <a:lstStyle/>
+          <a:p>
+            <a:pPr indent="0" marL="0">
+              <a:buNone/>
+            </a:pPr>
+            <a:r>
+              <a:rPr lang="en-US" sz="800" b="1" dirty="0">
+                <a:solidFill>
+                  <a:srgbClr val="FB923C"/>
+                </a:solidFill>
+                <a:latin typeface="Arial" pitchFamily="34" charset="0"/>
+                <a:ea typeface="Arial" pitchFamily="34" charset="-122"/>
+                <a:cs typeface="Arial" pitchFamily="34" charset="-120"/>
+              </a:rPr>
+              <a:t>陪伴</a:t>
+            </a:r>
+            <a:endParaRPr lang="en-US" sz="800" dirty="0"/>
+          </a:p>
+        </p:txBody>
+      </p:sp>
+      <p:sp>
+        <p:nvSpPr>
+          <p:cNvPr id="24" name="Text 22"/>
+          <p:cNvSpPr/>
+          <p:nvPr/>
+        </p:nvSpPr>
+        <p:spPr>
+          <a:xfrm>
+            <a:off x="3291840" y="3493008"/>
+            <a:ext cx="5349240" cy="530352"/>
+          </a:xfrm>
+          <a:prstGeom prst="rect">
+            <a:avLst/>
+          </a:prstGeom>
+          <a:noFill/>
+          <a:ln/>
+        </p:spPr>
+        <p:txBody>
+          <a:bodyPr wrap="square" lIns="0" tIns="0" rIns="0" bIns="0" rtlCol="0" anchor="ctr"/>
+          <a:lstStyle/>
+          <a:p>
+            <a:pPr indent="0" marL="0">
+              <a:buNone/>
+            </a:pPr>
+            <a:r>
+              <a:rPr lang="en-US" sz="760" dirty="0">
+                <a:solidFill>
+                  <a:srgbClr val="94A3B8"/>
+                </a:solidFill>
+                <a:latin typeface="Arial" pitchFamily="34" charset="0"/>
+                <a:ea typeface="Arial" pitchFamily="34" charset="-122"/>
+                <a:cs typeface="Arial" pitchFamily="34" charset="-120"/>
+              </a:rPr>
+              <a:t>Alpha Mini类陪伴机器人明确做情绪识别+对话，用于教育/养老——情感感知在陪伴细分是刚需而非选配</a:t>
+            </a:r>
+            <a:endParaRPr lang="en-US" sz="760" dirty="0"/>
+          </a:p>
+        </p:txBody>
+      </p:sp>
+      <p:sp>
+        <p:nvSpPr>
+          <p:cNvPr id="25" name="Shape 23"/>
+          <p:cNvSpPr/>
+          <p:nvPr/>
+        </p:nvSpPr>
+        <p:spPr>
+          <a:xfrm>
+            <a:off x="365760" y="4224528"/>
+            <a:ext cx="8412480" cy="804672"/>
+          </a:xfrm>
+          <a:prstGeom prst="roundRect">
+            <a:avLst>
+              <a:gd name="adj" fmla="val 3409"/>
+            </a:avLst>
+          </a:prstGeom>
+          <a:solidFill>
+            <a:srgbClr val="0A1A1F"/>
+          </a:solidFill>
+          <a:ln w="12700">
+            <a:solidFill>
+              <a:srgbClr val="22D3EE"/>
+            </a:solidFill>
+            <a:prstDash val="solid"/>
+          </a:ln>
+          <a:effectLst>
+            <a:outerShdw sx="100000" sy="100000" kx="0" ky="0" algn="bl" rotWithShape="0" blurRad="63500" dist="25400" dir="2700000">
+              <a:srgbClr val="000000">
+                <a:alpha val="18000"/>
+              </a:srgbClr>
+            </a:outerShdw>
+          </a:effectLst>
+        </p:spPr>
+      </p:sp>
+      <p:sp>
+        <p:nvSpPr>
+          <p:cNvPr id="26" name="Text 24"/>
+          <p:cNvSpPr/>
+          <p:nvPr/>
+        </p:nvSpPr>
+        <p:spPr>
+          <a:xfrm>
+            <a:off x="502920" y="4279392"/>
+            <a:ext cx="8138160" cy="694944"/>
+          </a:xfrm>
+          <a:prstGeom prst="rect">
+            <a:avLst/>
+          </a:prstGeom>
+          <a:noFill/>
+          <a:ln/>
+        </p:spPr>
+        <p:txBody>
+          <a:bodyPr wrap="square" lIns="0" tIns="0" rIns="0" bIns="0" rtlCol="0" anchor="ctr"/>
+          <a:lstStyle/>
+          <a:p>
+            <a:pPr indent="0" marL="0">
+              <a:buNone/>
+            </a:pPr>
+            <a:r>
+              <a:rPr lang="en-US" sz="800" b="1" dirty="0">
+                <a:solidFill>
+                  <a:srgbClr val="22D3EE"/>
+                </a:solidFill>
+                <a:latin typeface="Arial" pitchFamily="34" charset="0"/>
+                <a:ea typeface="Arial" pitchFamily="34" charset="-122"/>
+                <a:cs typeface="Arial" pitchFamily="34" charset="-120"/>
+              </a:rPr>
+              <a:t>对OS的启示：</a:t>
+            </a:r>
+            <a:endParaRPr lang="en-US" sz="800" dirty="0"/>
+          </a:p>
+          <a:p>
+            <a:pPr indent="0" marL="0">
+              <a:buNone/>
+            </a:pPr>
+            <a:r>
+              <a:rPr lang="en-US" sz="800" dirty="0">
+                <a:solidFill>
+                  <a:srgbClr val="94A3B8"/>
+                </a:solidFill>
+                <a:latin typeface="Arial" pitchFamily="34" charset="0"/>
+                <a:ea typeface="Arial" pitchFamily="34" charset="-122"/>
+                <a:cs typeface="Arial" pitchFamily="34" charset="-120"/>
+              </a:rPr>
+              <a:t>① 场景决定情感需求：工业零需求、家庭/陪伴是刚需——与手机「效率/健康/陪伴」的叙事分野同构  </a:t>
+            </a:r>
+            <a:endParaRPr lang="en-US" sz="800" dirty="0"/>
+          </a:p>
+          <a:p>
+            <a:pPr indent="0" marL="0">
+              <a:buNone/>
+            </a:pPr>
+            <a:r>
+              <a:rPr lang="en-US" sz="800" dirty="0">
+                <a:solidFill>
+                  <a:srgbClr val="94A3B8"/>
+                </a:solidFill>
+                <a:latin typeface="Arial" pitchFamily="34" charset="0"/>
+                <a:ea typeface="Arial" pitchFamily="34" charset="-122"/>
+                <a:cs typeface="Arial" pitchFamily="34" charset="-120"/>
+              </a:rPr>
+              <a:t>② 情感能力靠进口(Grok进Optimus)：机器人厂商不自研情感——若OS的用户状态模型可跨设备输出，机器人是天然的下游消费者，UTM状态服务的第二增长曲线</a:t>
+            </a:r>
+            <a:endParaRPr lang="en-US" sz="800" dirty="0"/>
+          </a:p>
+        </p:txBody>
+      </p:sp>
+    </p:spTree>
+  </p:cSld>
+  <p:clrMapOvr>
+    <a:masterClrMapping/>
+  </p:clrMapOvr>
+</p:sld>
+</file>
+
+<file path=ppt/slides/slide25.xml><?xml version="1.0" encoding="utf-8"?>
+<p:sld xmlns:a="http://schemas.openxmlformats.org/drawingml/2006/main" xmlns:r="http://schemas.openxmlformats.org/officeDocument/2006/relationships" xmlns:p="http://schemas.openxmlformats.org/presentationml/2006/main">
+  <p:cSld name="Slide 1">
+    <p:bg>
+      <p:bgPr>
+        <a:solidFill>
+          <a:srgbClr val="07090E"/>
+        </a:solidFill>
+      </p:bgPr>
+    </p:bg>
+    <p:spTree>
+      <p:nvGrpSpPr>
+        <p:cNvPr id="1" name=""/>
+        <p:cNvGrpSpPr/>
+        <p:nvPr/>
+      </p:nvGrpSpPr>
+      <p:grpSpPr>
+        <a:xfrm>
+          <a:off x="0" y="0"/>
+          <a:ext cx="0" cy="0"/>
+          <a:chOff x="0" y="0"/>
+          <a:chExt cx="0" cy="0"/>
+        </a:xfrm>
+      </p:grpSpPr>
+      <p:sp>
+        <p:nvSpPr>
+          <p:cNvPr id="2" name="Text 0"/>
+          <p:cNvSpPr/>
+          <p:nvPr/>
+        </p:nvSpPr>
+        <p:spPr>
+          <a:xfrm>
+            <a:off x="365760" y="128016"/>
+            <a:ext cx="8412480" cy="201168"/>
+          </a:xfrm>
+          <a:prstGeom prst="rect">
+            <a:avLst/>
+          </a:prstGeom>
+          <a:noFill/>
+          <a:ln/>
+        </p:spPr>
+        <p:txBody>
+          <a:bodyPr wrap="square" lIns="0" tIns="0" rIns="0" bIns="0" rtlCol="0" anchor="ctr"/>
+          <a:lstStyle/>
+          <a:p>
+            <a:pPr indent="0" marL="0">
+              <a:buNone/>
+            </a:pPr>
+            <a:r>
+              <a:rPr lang="en-US" sz="850" b="1" spc="300" kern="0" dirty="0">
+                <a:solidFill>
+                  <a:srgbClr val="C084FC"/>
+                </a:solidFill>
+                <a:latin typeface="Arial" pitchFamily="34" charset="0"/>
+                <a:ea typeface="Arial" pitchFamily="34" charset="-122"/>
+                <a:cs typeface="Arial" pitchFamily="34" charset="-120"/>
+              </a:rPr>
+              <a:t>竞品深析 · SAMSUNG / ONE UI</a:t>
+            </a:r>
+            <a:endParaRPr lang="en-US" sz="850" dirty="0"/>
+          </a:p>
+        </p:txBody>
+      </p:sp>
+      <p:sp>
+        <p:nvSpPr>
+          <p:cNvPr id="3" name="Text 1"/>
+          <p:cNvSpPr/>
+          <p:nvPr/>
+        </p:nvSpPr>
+        <p:spPr>
+          <a:xfrm>
+            <a:off x="365760" y="347472"/>
+            <a:ext cx="8412480" cy="365760"/>
+          </a:xfrm>
+          <a:prstGeom prst="rect">
+            <a:avLst/>
+          </a:prstGeom>
+          <a:noFill/>
+          <a:ln/>
+        </p:spPr>
+        <p:txBody>
+          <a:bodyPr wrap="square" lIns="0" tIns="0" rIns="0" bIns="0" rtlCol="0" anchor="ctr"/>
+          <a:lstStyle/>
+          <a:p>
+            <a:pPr indent="0" marL="0">
+              <a:buNone/>
+            </a:pPr>
+            <a:r>
+              <a:rPr lang="en-US" sz="1700" b="1" dirty="0">
+                <a:solidFill>
+                  <a:srgbClr val="F8FAFC"/>
+                </a:solidFill>
+                <a:latin typeface="Cambria" pitchFamily="34" charset="0"/>
+                <a:ea typeface="Cambria" pitchFamily="34" charset="-122"/>
+                <a:cs typeface="Cambria" pitchFamily="34" charset="-120"/>
+              </a:rPr>
+              <a:t>三星：④生理全栈第二家，智能层外包Gemini</a:t>
+            </a:r>
+            <a:endParaRPr lang="en-US" sz="1700" dirty="0"/>
+          </a:p>
+        </p:txBody>
+      </p:sp>
+      <p:sp>
+        <p:nvSpPr>
+          <p:cNvPr id="4" name="Text 2"/>
+          <p:cNvSpPr/>
+          <p:nvPr/>
+        </p:nvSpPr>
+        <p:spPr>
+          <a:xfrm>
+            <a:off x="365760" y="713232"/>
+            <a:ext cx="8412480" cy="182880"/>
+          </a:xfrm>
+          <a:prstGeom prst="rect">
+            <a:avLst/>
+          </a:prstGeom>
+          <a:noFill/>
+          <a:ln/>
+        </p:spPr>
+        <p:txBody>
+          <a:bodyPr wrap="square" lIns="0" tIns="0" rIns="0" bIns="0" rtlCol="0" anchor="ctr"/>
+          <a:lstStyle/>
+          <a:p>
+            <a:pPr indent="0" marL="0">
+              <a:buNone/>
+            </a:pPr>
+            <a:r>
+              <a:rPr lang="en-US" sz="850" dirty="0">
+                <a:solidFill>
+                  <a:srgbClr val="94A3B8"/>
+                </a:solidFill>
+                <a:latin typeface="Arial" pitchFamily="34" charset="0"/>
+                <a:ea typeface="Arial" pitchFamily="34" charset="-122"/>
+                <a:cs typeface="Arial" pitchFamily="34" charset="-120"/>
+              </a:rPr>
+              <a:t>绿=情感/状态分析  黄=有技术·效率或健康向  灰=无</a:t>
+            </a:r>
+            <a:endParaRPr lang="en-US" sz="850" dirty="0"/>
+          </a:p>
+        </p:txBody>
+      </p:sp>
+      <p:sp>
+        <p:nvSpPr>
+          <p:cNvPr id="5" name="Text 3"/>
+          <p:cNvSpPr/>
+          <p:nvPr/>
+        </p:nvSpPr>
+        <p:spPr>
+          <a:xfrm>
+            <a:off x="1060704" y="914400"/>
+            <a:ext cx="1572768" cy="182880"/>
+          </a:xfrm>
+          <a:prstGeom prst="rect">
+            <a:avLst/>
+          </a:prstGeom>
+          <a:noFill/>
+          <a:ln/>
+        </p:spPr>
+        <p:txBody>
+          <a:bodyPr wrap="square" lIns="0" tIns="0" rIns="0" bIns="0" rtlCol="0" anchor="ctr"/>
+          <a:lstStyle/>
+          <a:p>
+            <a:pPr algn="ctr" indent="0" marL="0">
+              <a:buNone/>
+            </a:pPr>
+            <a:r>
+              <a:rPr lang="en-US" sz="780" b="1" dirty="0">
+                <a:solidFill>
+                  <a:srgbClr val="475569"/>
+                </a:solidFill>
+                <a:latin typeface="Arial" pitchFamily="34" charset="0"/>
+                <a:ea typeface="Arial" pitchFamily="34" charset="-122"/>
+                <a:cs typeface="Arial" pitchFamily="34" charset="-120"/>
+              </a:rPr>
+              <a:t>①文本对话</a:t>
+            </a:r>
+            <a:endParaRPr lang="en-US" sz="780" dirty="0"/>
+          </a:p>
+        </p:txBody>
+      </p:sp>
+      <p:sp>
+        <p:nvSpPr>
+          <p:cNvPr id="6" name="Text 4"/>
+          <p:cNvSpPr/>
+          <p:nvPr/>
+        </p:nvSpPr>
+        <p:spPr>
+          <a:xfrm>
+            <a:off x="2670048" y="914400"/>
+            <a:ext cx="1572768" cy="182880"/>
+          </a:xfrm>
+          <a:prstGeom prst="rect">
+            <a:avLst/>
+          </a:prstGeom>
+          <a:noFill/>
+          <a:ln/>
+        </p:spPr>
+        <p:txBody>
+          <a:bodyPr wrap="square" lIns="0" tIns="0" rIns="0" bIns="0" rtlCol="0" anchor="ctr"/>
+          <a:lstStyle/>
+          <a:p>
+            <a:pPr algn="ctr" indent="0" marL="0">
+              <a:buNone/>
+            </a:pPr>
+            <a:r>
+              <a:rPr lang="en-US" sz="780" b="1" dirty="0">
+                <a:solidFill>
+                  <a:srgbClr val="475569"/>
+                </a:solidFill>
+                <a:latin typeface="Arial" pitchFamily="34" charset="0"/>
+                <a:ea typeface="Arial" pitchFamily="34" charset="-122"/>
+                <a:cs typeface="Arial" pitchFamily="34" charset="-120"/>
+              </a:rPr>
+              <a:t>②语音韵律</a:t>
+            </a:r>
+            <a:endParaRPr lang="en-US" sz="780" dirty="0"/>
+          </a:p>
+        </p:txBody>
+      </p:sp>
+      <p:sp>
+        <p:nvSpPr>
+          <p:cNvPr id="7" name="Text 5"/>
+          <p:cNvSpPr/>
+          <p:nvPr/>
+        </p:nvSpPr>
+        <p:spPr>
+          <a:xfrm>
+            <a:off x="4279392" y="914400"/>
+            <a:ext cx="1572768" cy="182880"/>
+          </a:xfrm>
+          <a:prstGeom prst="rect">
+            <a:avLst/>
+          </a:prstGeom>
+          <a:noFill/>
+          <a:ln/>
+        </p:spPr>
+        <p:txBody>
+          <a:bodyPr wrap="square" lIns="0" tIns="0" rIns="0" bIns="0" rtlCol="0" anchor="ctr"/>
+          <a:lstStyle/>
+          <a:p>
+            <a:pPr algn="ctr" indent="0" marL="0">
+              <a:buNone/>
+            </a:pPr>
+            <a:r>
+              <a:rPr lang="en-US" sz="780" b="1" dirty="0">
+                <a:solidFill>
+                  <a:srgbClr val="475569"/>
+                </a:solidFill>
+                <a:latin typeface="Arial" pitchFamily="34" charset="0"/>
+                <a:ea typeface="Arial" pitchFamily="34" charset="-122"/>
+                <a:cs typeface="Arial" pitchFamily="34" charset="-120"/>
+              </a:rPr>
+              <a:t>③视觉</a:t>
+            </a:r>
+            <a:endParaRPr lang="en-US" sz="780" dirty="0"/>
+          </a:p>
+        </p:txBody>
+      </p:sp>
+      <p:sp>
+        <p:nvSpPr>
+          <p:cNvPr id="8" name="Text 6"/>
+          <p:cNvSpPr/>
+          <p:nvPr/>
+        </p:nvSpPr>
+        <p:spPr>
+          <a:xfrm>
+            <a:off x="5888736" y="914400"/>
+            <a:ext cx="1572768" cy="182880"/>
+          </a:xfrm>
+          <a:prstGeom prst="rect">
+            <a:avLst/>
+          </a:prstGeom>
+          <a:noFill/>
+          <a:ln/>
+        </p:spPr>
+        <p:txBody>
+          <a:bodyPr wrap="square" lIns="0" tIns="0" rIns="0" bIns="0" rtlCol="0" anchor="ctr"/>
+          <a:lstStyle/>
+          <a:p>
+            <a:pPr algn="ctr" indent="0" marL="0">
+              <a:buNone/>
+            </a:pPr>
+            <a:r>
+              <a:rPr lang="en-US" sz="780" b="1" dirty="0">
+                <a:solidFill>
+                  <a:srgbClr val="475569"/>
+                </a:solidFill>
+                <a:latin typeface="Arial" pitchFamily="34" charset="0"/>
+                <a:ea typeface="Arial" pitchFamily="34" charset="-122"/>
+                <a:cs typeface="Arial" pitchFamily="34" charset="-120"/>
+              </a:rPr>
+              <a:t>④生理</a:t>
+            </a:r>
+            <a:endParaRPr lang="en-US" sz="780" dirty="0"/>
+          </a:p>
+        </p:txBody>
+      </p:sp>
+      <p:sp>
+        <p:nvSpPr>
+          <p:cNvPr id="9" name="Text 7"/>
+          <p:cNvSpPr/>
+          <p:nvPr/>
+        </p:nvSpPr>
+        <p:spPr>
+          <a:xfrm>
+            <a:off x="7498080" y="914400"/>
+            <a:ext cx="1572768" cy="182880"/>
+          </a:xfrm>
+          <a:prstGeom prst="rect">
+            <a:avLst/>
+          </a:prstGeom>
+          <a:noFill/>
+          <a:ln/>
+        </p:spPr>
+        <p:txBody>
+          <a:bodyPr wrap="square" lIns="0" tIns="0" rIns="0" bIns="0" rtlCol="0" anchor="ctr"/>
+          <a:lstStyle/>
+          <a:p>
+            <a:pPr algn="ctr" indent="0" marL="0">
+              <a:buNone/>
+            </a:pPr>
+            <a:r>
+              <a:rPr lang="en-US" sz="780" b="1" dirty="0">
+                <a:solidFill>
+                  <a:srgbClr val="475569"/>
+                </a:solidFill>
+                <a:latin typeface="Arial" pitchFamily="34" charset="0"/>
+                <a:ea typeface="Arial" pitchFamily="34" charset="-122"/>
+                <a:cs typeface="Arial" pitchFamily="34" charset="-120"/>
+              </a:rPr>
+              <a:t>⑤OS行为</a:t>
+            </a:r>
+            <a:endParaRPr lang="en-US" sz="780" dirty="0"/>
+          </a:p>
+        </p:txBody>
+      </p:sp>
+      <p:sp>
+        <p:nvSpPr>
+          <p:cNvPr id="10" name="Shape 8"/>
+          <p:cNvSpPr/>
+          <p:nvPr/>
+        </p:nvSpPr>
+        <p:spPr>
+          <a:xfrm>
+            <a:off x="365760" y="1115568"/>
+            <a:ext cx="658368" cy="749808"/>
+          </a:xfrm>
+          <a:prstGeom prst="roundRect">
+            <a:avLst>
+              <a:gd name="adj" fmla="val 4167"/>
+            </a:avLst>
+          </a:prstGeom>
+          <a:solidFill>
+            <a:srgbClr val="0D1017"/>
+          </a:solidFill>
+          <a:ln w="10160">
+            <a:solidFill>
+              <a:srgbClr val="C084FC"/>
+            </a:solidFill>
+            <a:prstDash val="solid"/>
+          </a:ln>
+          <a:effectLst>
+            <a:outerShdw sx="100000" sy="100000" kx="0" ky="0" algn="bl" rotWithShape="0" blurRad="63500" dist="25400" dir="2700000">
+              <a:srgbClr val="000000">
+                <a:alpha val="18000"/>
+              </a:srgbClr>
+            </a:outerShdw>
+          </a:effectLst>
+        </p:spPr>
+      </p:sp>
+      <p:sp>
+        <p:nvSpPr>
+          <p:cNvPr id="11" name="Text 9"/>
+          <p:cNvSpPr/>
+          <p:nvPr/>
+        </p:nvSpPr>
+        <p:spPr>
+          <a:xfrm>
+            <a:off x="365760" y="1207008"/>
+            <a:ext cx="658368" cy="219456"/>
+          </a:xfrm>
+          <a:prstGeom prst="rect">
+            <a:avLst/>
+          </a:prstGeom>
+          <a:noFill/>
+          <a:ln/>
+        </p:spPr>
+        <p:txBody>
+          <a:bodyPr wrap="square" lIns="0" tIns="0" rIns="0" bIns="0" rtlCol="0" anchor="ctr"/>
+          <a:lstStyle/>
+          <a:p>
+            <a:pPr algn="ctr" indent="0" marL="0">
+              <a:buNone/>
+            </a:pPr>
+            <a:r>
+              <a:rPr lang="en-US" sz="950" b="1" dirty="0">
+                <a:solidFill>
+                  <a:srgbClr val="C084FC"/>
+                </a:solidFill>
+                <a:latin typeface="Cambria" pitchFamily="34" charset="0"/>
+                <a:ea typeface="Cambria" pitchFamily="34" charset="-122"/>
+                <a:cs typeface="Cambria" pitchFamily="34" charset="-120"/>
+              </a:rPr>
+              <a:t>L4</a:t>
+            </a:r>
+            <a:endParaRPr lang="en-US" sz="950" dirty="0"/>
+          </a:p>
+        </p:txBody>
+      </p:sp>
+      <p:sp>
+        <p:nvSpPr>
           <p:cNvPr id="12" name="Text 10"/>
           <p:cNvSpPr/>
           <p:nvPr/>
         </p:nvSpPr>
         <p:spPr>
           <a:xfrm>
-            <a:off x="502920" y="3374136"/>
-            <a:ext cx="8138160" cy="621792"/>
-          </a:xfrm>
-          <a:prstGeom prst="rect">
-            <a:avLst/>
-          </a:prstGeom>
-          <a:noFill/>
-          <a:ln/>
-        </p:spPr>
-        <p:txBody>
-          <a:bodyPr wrap="square" lIns="0" tIns="0" rIns="0" bIns="0" rtlCol="0" anchor="ctr"/>
-          <a:lstStyle/>
-          <a:p>
-            <a:pPr indent="0" marL="0">
-              <a:buNone/>
-            </a:pPr>
-            <a:r>
-              <a:rPr lang="en-US" sz="1000" b="1" dirty="0">
+            <a:off x="384048" y="1444752"/>
+            <a:ext cx="621792" cy="365760"/>
+          </a:xfrm>
+          <a:prstGeom prst="rect">
+            <a:avLst/>
+          </a:prstGeom>
+          <a:noFill/>
+          <a:ln/>
+        </p:spPr>
+        <p:txBody>
+          <a:bodyPr wrap="square" lIns="0" tIns="0" rIns="0" bIns="0" rtlCol="0" anchor="ctr"/>
+          <a:lstStyle/>
+          <a:p>
+            <a:pPr algn="ctr" indent="0" marL="0">
+              <a:buNone/>
+            </a:pPr>
+            <a:r>
+              <a:rPr lang="en-US" sz="630" b="1" dirty="0">
+                <a:solidFill>
+                  <a:srgbClr val="C084FC"/>
+                </a:solidFill>
+                <a:latin typeface="Arial" pitchFamily="34" charset="0"/>
+                <a:ea typeface="Arial" pitchFamily="34" charset="-122"/>
+                <a:cs typeface="Arial" pitchFamily="34" charset="-120"/>
+              </a:rPr>
+              <a:t>响应执行</a:t>
+            </a:r>
+            <a:endParaRPr lang="en-US" sz="630" dirty="0"/>
+          </a:p>
+        </p:txBody>
+      </p:sp>
+      <p:sp>
+        <p:nvSpPr>
+          <p:cNvPr id="13" name="Shape 11"/>
+          <p:cNvSpPr/>
+          <p:nvPr/>
+        </p:nvSpPr>
+        <p:spPr>
+          <a:xfrm>
+            <a:off x="1060704" y="1115568"/>
+            <a:ext cx="1572768" cy="749808"/>
+          </a:xfrm>
+          <a:prstGeom prst="roundRect">
+            <a:avLst>
+              <a:gd name="adj" fmla="val 3659"/>
+            </a:avLst>
+          </a:prstGeom>
+          <a:solidFill>
+            <a:srgbClr val="332608"/>
+          </a:solidFill>
+          <a:ln w="6350">
+            <a:solidFill>
+              <a:srgbClr val="5C4A12"/>
+            </a:solidFill>
+            <a:prstDash val="solid"/>
+          </a:ln>
+          <a:effectLst>
+            <a:outerShdw sx="100000" sy="100000" kx="0" ky="0" algn="bl" rotWithShape="0" blurRad="63500" dist="25400" dir="2700000">
+              <a:srgbClr val="000000">
+                <a:alpha val="18000"/>
+              </a:srgbClr>
+            </a:outerShdw>
+          </a:effectLst>
+        </p:spPr>
+      </p:sp>
+      <p:sp>
+        <p:nvSpPr>
+          <p:cNvPr id="14" name="Text 12"/>
+          <p:cNvSpPr/>
+          <p:nvPr/>
+        </p:nvSpPr>
+        <p:spPr>
+          <a:xfrm>
+            <a:off x="1106424" y="1170432"/>
+            <a:ext cx="1481328" cy="310896"/>
+          </a:xfrm>
+          <a:prstGeom prst="rect">
+            <a:avLst/>
+          </a:prstGeom>
+          <a:noFill/>
+          <a:ln/>
+        </p:spPr>
+        <p:txBody>
+          <a:bodyPr wrap="square" lIns="0" tIns="0" rIns="0" bIns="0" rtlCol="0" anchor="ctr"/>
+          <a:lstStyle/>
+          <a:p>
+            <a:pPr indent="0" marL="0">
+              <a:buNone/>
+            </a:pPr>
+            <a:r>
+              <a:rPr lang="en-US" sz="690" b="1" dirty="0">
+                <a:solidFill>
+                  <a:srgbClr val="F8FAFC"/>
+                </a:solidFill>
+                <a:latin typeface="Arial" pitchFamily="34" charset="0"/>
+                <a:ea typeface="Arial" pitchFamily="34" charset="-122"/>
+                <a:cs typeface="Arial" pitchFamily="34" charset="-120"/>
+              </a:rPr>
+              <a:t>Galaxy AI写作/摘要</a:t>
+            </a:r>
+            <a:endParaRPr lang="en-US" sz="690" dirty="0"/>
+          </a:p>
+        </p:txBody>
+      </p:sp>
+      <p:sp>
+        <p:nvSpPr>
+          <p:cNvPr id="15" name="Text 13"/>
+          <p:cNvSpPr/>
+          <p:nvPr/>
+        </p:nvSpPr>
+        <p:spPr>
+          <a:xfrm>
+            <a:off x="1106424" y="1499616"/>
+            <a:ext cx="1481328" cy="347472"/>
+          </a:xfrm>
+          <a:prstGeom prst="rect">
+            <a:avLst/>
+          </a:prstGeom>
+          <a:noFill/>
+          <a:ln/>
+        </p:spPr>
+        <p:txBody>
+          <a:bodyPr wrap="square" lIns="0" tIns="0" rIns="0" bIns="0" rtlCol="0" anchor="ctr"/>
+          <a:lstStyle/>
+          <a:p>
+            <a:pPr indent="0" marL="0">
+              <a:buNone/>
+            </a:pPr>
+            <a:r>
+              <a:rPr lang="en-US" sz="610" dirty="0">
+                <a:solidFill>
+                  <a:srgbClr val="94A3B8"/>
+                </a:solidFill>
+                <a:latin typeface="Arial" pitchFamily="34" charset="0"/>
+                <a:ea typeface="Arial" pitchFamily="34" charset="-122"/>
+                <a:cs typeface="Arial" pitchFamily="34" charset="-120"/>
+              </a:rPr>
+              <a:t>效率向</a:t>
+            </a:r>
+            <a:endParaRPr lang="en-US" sz="610" dirty="0"/>
+          </a:p>
+        </p:txBody>
+      </p:sp>
+      <p:sp>
+        <p:nvSpPr>
+          <p:cNvPr id="16" name="Shape 14"/>
+          <p:cNvSpPr/>
+          <p:nvPr/>
+        </p:nvSpPr>
+        <p:spPr>
+          <a:xfrm>
+            <a:off x="2670048" y="1115568"/>
+            <a:ext cx="1572768" cy="749808"/>
+          </a:xfrm>
+          <a:prstGeom prst="roundRect">
+            <a:avLst>
+              <a:gd name="adj" fmla="val 3659"/>
+            </a:avLst>
+          </a:prstGeom>
+          <a:solidFill>
+            <a:srgbClr val="0A0C11"/>
+          </a:solidFill>
+          <a:ln w="6350">
+            <a:solidFill>
+              <a:srgbClr val="1A1F2E"/>
+            </a:solidFill>
+            <a:prstDash val="solid"/>
+          </a:ln>
+          <a:effectLst>
+            <a:outerShdw sx="100000" sy="100000" kx="0" ky="0" algn="bl" rotWithShape="0" blurRad="63500" dist="25400" dir="2700000">
+              <a:srgbClr val="000000">
+                <a:alpha val="18000"/>
+              </a:srgbClr>
+            </a:outerShdw>
+          </a:effectLst>
+        </p:spPr>
+      </p:sp>
+      <p:sp>
+        <p:nvSpPr>
+          <p:cNvPr id="17" name="Text 15"/>
+          <p:cNvSpPr/>
+          <p:nvPr/>
+        </p:nvSpPr>
+        <p:spPr>
+          <a:xfrm>
+            <a:off x="2715768" y="1170432"/>
+            <a:ext cx="1481328" cy="310896"/>
+          </a:xfrm>
+          <a:prstGeom prst="rect">
+            <a:avLst/>
+          </a:prstGeom>
+          <a:noFill/>
+          <a:ln/>
+        </p:spPr>
+        <p:txBody>
+          <a:bodyPr wrap="square" lIns="0" tIns="0" rIns="0" bIns="0" rtlCol="0" anchor="ctr"/>
+          <a:lstStyle/>
+          <a:p>
+            <a:pPr indent="0" marL="0">
+              <a:buNone/>
+            </a:pPr>
+            <a:r>
+              <a:rPr lang="en-US" sz="690" b="1" dirty="0">
                 <a:solidFill>
                   <a:srgbClr val="475569"/>
                 </a:solidFill>
@@ -32015,22 +33977,353 @@
                 <a:ea typeface="Arial" pitchFamily="34" charset="-122"/>
                 <a:cs typeface="Arial" pitchFamily="34" charset="-120"/>
               </a:rPr>
-              <a:t>[ 逐家调研待做 ]</a:t>
-            </a:r>
-            <a:endParaRPr lang="en-US" sz="1000" dirty="0"/>
-          </a:p>
-        </p:txBody>
-      </p:sp>
-      <p:sp>
-        <p:nvSpPr>
-          <p:cNvPr id="13" name="Text 11"/>
-          <p:cNvSpPr/>
-          <p:nvPr/>
-        </p:nvSpPr>
-        <p:spPr>
-          <a:xfrm>
-            <a:off x="365760" y="4709160"/>
-            <a:ext cx="8412480" cy="274320"/>
+              <a:t>—</a:t>
+            </a:r>
+            <a:endParaRPr lang="en-US" sz="690" dirty="0"/>
+          </a:p>
+        </p:txBody>
+      </p:sp>
+      <p:sp>
+        <p:nvSpPr>
+          <p:cNvPr id="18" name="Shape 16"/>
+          <p:cNvSpPr/>
+          <p:nvPr/>
+        </p:nvSpPr>
+        <p:spPr>
+          <a:xfrm>
+            <a:off x="4279392" y="1115568"/>
+            <a:ext cx="1572768" cy="749808"/>
+          </a:xfrm>
+          <a:prstGeom prst="roundRect">
+            <a:avLst>
+              <a:gd name="adj" fmla="val 3659"/>
+            </a:avLst>
+          </a:prstGeom>
+          <a:solidFill>
+            <a:srgbClr val="332608"/>
+          </a:solidFill>
+          <a:ln w="6350">
+            <a:solidFill>
+              <a:srgbClr val="5C4A12"/>
+            </a:solidFill>
+            <a:prstDash val="solid"/>
+          </a:ln>
+          <a:effectLst>
+            <a:outerShdw sx="100000" sy="100000" kx="0" ky="0" algn="bl" rotWithShape="0" blurRad="63500" dist="25400" dir="2700000">
+              <a:srgbClr val="000000">
+                <a:alpha val="18000"/>
+              </a:srgbClr>
+            </a:outerShdw>
+          </a:effectLst>
+        </p:spPr>
+      </p:sp>
+      <p:sp>
+        <p:nvSpPr>
+          <p:cNvPr id="19" name="Text 17"/>
+          <p:cNvSpPr/>
+          <p:nvPr/>
+        </p:nvSpPr>
+        <p:spPr>
+          <a:xfrm>
+            <a:off x="4325112" y="1170432"/>
+            <a:ext cx="1481328" cy="310896"/>
+          </a:xfrm>
+          <a:prstGeom prst="rect">
+            <a:avLst/>
+          </a:prstGeom>
+          <a:noFill/>
+          <a:ln/>
+        </p:spPr>
+        <p:txBody>
+          <a:bodyPr wrap="square" lIns="0" tIns="0" rIns="0" bIns="0" rtlCol="0" anchor="ctr"/>
+          <a:lstStyle/>
+          <a:p>
+            <a:pPr indent="0" marL="0">
+              <a:buNone/>
+            </a:pPr>
+            <a:r>
+              <a:rPr lang="en-US" sz="690" b="1" dirty="0">
+                <a:solidFill>
+                  <a:srgbClr val="F8FAFC"/>
+                </a:solidFill>
+                <a:latin typeface="Arial" pitchFamily="34" charset="0"/>
+                <a:ea typeface="Arial" pitchFamily="34" charset="-122"/>
+                <a:cs typeface="Arial" pitchFamily="34" charset="-120"/>
+              </a:rPr>
+              <a:t>Circle to Search</a:t>
+            </a:r>
+            <a:endParaRPr lang="en-US" sz="690" dirty="0"/>
+          </a:p>
+        </p:txBody>
+      </p:sp>
+      <p:sp>
+        <p:nvSpPr>
+          <p:cNvPr id="20" name="Text 18"/>
+          <p:cNvSpPr/>
+          <p:nvPr/>
+        </p:nvSpPr>
+        <p:spPr>
+          <a:xfrm>
+            <a:off x="4325112" y="1499616"/>
+            <a:ext cx="1481328" cy="347472"/>
+          </a:xfrm>
+          <a:prstGeom prst="rect">
+            <a:avLst/>
+          </a:prstGeom>
+          <a:noFill/>
+          <a:ln/>
+        </p:spPr>
+        <p:txBody>
+          <a:bodyPr wrap="square" lIns="0" tIns="0" rIns="0" bIns="0" rtlCol="0" anchor="ctr"/>
+          <a:lstStyle/>
+          <a:p>
+            <a:pPr indent="0" marL="0">
+              <a:buNone/>
+            </a:pPr>
+            <a:r>
+              <a:rPr lang="en-US" sz="610" dirty="0">
+                <a:solidFill>
+                  <a:srgbClr val="94A3B8"/>
+                </a:solidFill>
+                <a:latin typeface="Arial" pitchFamily="34" charset="0"/>
+                <a:ea typeface="Arial" pitchFamily="34" charset="-122"/>
+                <a:cs typeface="Arial" pitchFamily="34" charset="-120"/>
+              </a:rPr>
+              <a:t>圈选即搜</a:t>
+            </a:r>
+            <a:endParaRPr lang="en-US" sz="610" dirty="0"/>
+          </a:p>
+        </p:txBody>
+      </p:sp>
+      <p:sp>
+        <p:nvSpPr>
+          <p:cNvPr id="21" name="Shape 19"/>
+          <p:cNvSpPr/>
+          <p:nvPr/>
+        </p:nvSpPr>
+        <p:spPr>
+          <a:xfrm>
+            <a:off x="5888736" y="1115568"/>
+            <a:ext cx="1572768" cy="749808"/>
+          </a:xfrm>
+          <a:prstGeom prst="roundRect">
+            <a:avLst>
+              <a:gd name="adj" fmla="val 3659"/>
+            </a:avLst>
+          </a:prstGeom>
+          <a:solidFill>
+            <a:srgbClr val="0C1A10"/>
+          </a:solidFill>
+          <a:ln w="11430">
+            <a:solidFill>
+              <a:srgbClr val="4ADE80"/>
+            </a:solidFill>
+            <a:prstDash val="solid"/>
+          </a:ln>
+          <a:effectLst>
+            <a:outerShdw sx="100000" sy="100000" kx="0" ky="0" algn="bl" rotWithShape="0" blurRad="63500" dist="25400" dir="2700000">
+              <a:srgbClr val="000000">
+                <a:alpha val="18000"/>
+              </a:srgbClr>
+            </a:outerShdw>
+          </a:effectLst>
+        </p:spPr>
+      </p:sp>
+      <p:sp>
+        <p:nvSpPr>
+          <p:cNvPr id="22" name="Text 20"/>
+          <p:cNvSpPr/>
+          <p:nvPr/>
+        </p:nvSpPr>
+        <p:spPr>
+          <a:xfrm>
+            <a:off x="5934456" y="1170432"/>
+            <a:ext cx="1481328" cy="310896"/>
+          </a:xfrm>
+          <a:prstGeom prst="rect">
+            <a:avLst/>
+          </a:prstGeom>
+          <a:noFill/>
+          <a:ln/>
+        </p:spPr>
+        <p:txBody>
+          <a:bodyPr wrap="square" lIns="0" tIns="0" rIns="0" bIns="0" rtlCol="0" anchor="ctr"/>
+          <a:lstStyle/>
+          <a:p>
+            <a:pPr indent="0" marL="0">
+              <a:buNone/>
+            </a:pPr>
+            <a:r>
+              <a:rPr lang="en-US" sz="690" b="1" dirty="0">
+                <a:solidFill>
+                  <a:srgbClr val="F8FAFC"/>
+                </a:solidFill>
+                <a:latin typeface="Arial" pitchFamily="34" charset="0"/>
+                <a:ea typeface="Arial" pitchFamily="34" charset="-122"/>
+                <a:cs typeface="Arial" pitchFamily="34" charset="-120"/>
+              </a:rPr>
+              <a:t>健康提醒+Energy建议</a:t>
+            </a:r>
+            <a:endParaRPr lang="en-US" sz="690" dirty="0"/>
+          </a:p>
+        </p:txBody>
+      </p:sp>
+      <p:sp>
+        <p:nvSpPr>
+          <p:cNvPr id="23" name="Text 21"/>
+          <p:cNvSpPr/>
+          <p:nvPr/>
+        </p:nvSpPr>
+        <p:spPr>
+          <a:xfrm>
+            <a:off x="5934456" y="1499616"/>
+            <a:ext cx="1481328" cy="347472"/>
+          </a:xfrm>
+          <a:prstGeom prst="rect">
+            <a:avLst/>
+          </a:prstGeom>
+          <a:noFill/>
+          <a:ln/>
+        </p:spPr>
+        <p:txBody>
+          <a:bodyPr wrap="square" lIns="0" tIns="0" rIns="0" bIns="0" rtlCol="0" anchor="ctr"/>
+          <a:lstStyle/>
+          <a:p>
+            <a:pPr indent="0" marL="0">
+              <a:buNone/>
+            </a:pPr>
+            <a:r>
+              <a:rPr lang="en-US" sz="610" dirty="0">
+                <a:solidFill>
+                  <a:srgbClr val="94A3B8"/>
+                </a:solidFill>
+                <a:latin typeface="Arial" pitchFamily="34" charset="0"/>
+                <a:ea typeface="Arial" pitchFamily="34" charset="-122"/>
+                <a:cs typeface="Arial" pitchFamily="34" charset="-120"/>
+              </a:rPr>
+              <a:t>仅健康域</a:t>
+            </a:r>
+            <a:endParaRPr lang="en-US" sz="610" dirty="0"/>
+          </a:p>
+        </p:txBody>
+      </p:sp>
+      <p:sp>
+        <p:nvSpPr>
+          <p:cNvPr id="24" name="Shape 22"/>
+          <p:cNvSpPr/>
+          <p:nvPr/>
+        </p:nvSpPr>
+        <p:spPr>
+          <a:xfrm>
+            <a:off x="7498080" y="1115568"/>
+            <a:ext cx="1572768" cy="749808"/>
+          </a:xfrm>
+          <a:prstGeom prst="roundRect">
+            <a:avLst>
+              <a:gd name="adj" fmla="val 3659"/>
+            </a:avLst>
+          </a:prstGeom>
+          <a:solidFill>
+            <a:srgbClr val="0A0C11"/>
+          </a:solidFill>
+          <a:ln w="6350">
+            <a:solidFill>
+              <a:srgbClr val="1A1F2E"/>
+            </a:solidFill>
+            <a:prstDash val="solid"/>
+          </a:ln>
+          <a:effectLst>
+            <a:outerShdw sx="100000" sy="100000" kx="0" ky="0" algn="bl" rotWithShape="0" blurRad="63500" dist="25400" dir="2700000">
+              <a:srgbClr val="000000">
+                <a:alpha val="18000"/>
+              </a:srgbClr>
+            </a:outerShdw>
+          </a:effectLst>
+        </p:spPr>
+      </p:sp>
+      <p:sp>
+        <p:nvSpPr>
+          <p:cNvPr id="25" name="Text 23"/>
+          <p:cNvSpPr/>
+          <p:nvPr/>
+        </p:nvSpPr>
+        <p:spPr>
+          <a:xfrm>
+            <a:off x="7543800" y="1170432"/>
+            <a:ext cx="1481328" cy="310896"/>
+          </a:xfrm>
+          <a:prstGeom prst="rect">
+            <a:avLst/>
+          </a:prstGeom>
+          <a:noFill/>
+          <a:ln/>
+        </p:spPr>
+        <p:txBody>
+          <a:bodyPr wrap="square" lIns="0" tIns="0" rIns="0" bIns="0" rtlCol="0" anchor="ctr"/>
+          <a:lstStyle/>
+          <a:p>
+            <a:pPr indent="0" marL="0">
+              <a:buNone/>
+            </a:pPr>
+            <a:r>
+              <a:rPr lang="en-US" sz="690" b="1" dirty="0">
+                <a:solidFill>
+                  <a:srgbClr val="475569"/>
+                </a:solidFill>
+                <a:latin typeface="Arial" pitchFamily="34" charset="0"/>
+                <a:ea typeface="Arial" pitchFamily="34" charset="-122"/>
+                <a:cs typeface="Arial" pitchFamily="34" charset="-120"/>
+              </a:rPr>
+              <a:t>—</a:t>
+            </a:r>
+            <a:endParaRPr lang="en-US" sz="690" dirty="0"/>
+          </a:p>
+        </p:txBody>
+      </p:sp>
+      <p:sp>
+        <p:nvSpPr>
+          <p:cNvPr id="26" name="Shape 24"/>
+          <p:cNvSpPr/>
+          <p:nvPr/>
+        </p:nvSpPr>
+        <p:spPr>
+          <a:xfrm>
+            <a:off x="365760" y="1911096"/>
+            <a:ext cx="658368" cy="749808"/>
+          </a:xfrm>
+          <a:prstGeom prst="roundRect">
+            <a:avLst>
+              <a:gd name="adj" fmla="val 4167"/>
+            </a:avLst>
+          </a:prstGeom>
+          <a:solidFill>
+            <a:srgbClr val="0D1017"/>
+          </a:solidFill>
+          <a:ln w="10160">
+            <a:solidFill>
+              <a:srgbClr val="60A5FA"/>
+            </a:solidFill>
+            <a:prstDash val="solid"/>
+          </a:ln>
+          <a:effectLst>
+            <a:outerShdw sx="100000" sy="100000" kx="0" ky="0" algn="bl" rotWithShape="0" blurRad="63500" dist="25400" dir="2700000">
+              <a:srgbClr val="000000">
+                <a:alpha val="18000"/>
+              </a:srgbClr>
+            </a:outerShdw>
+          </a:effectLst>
+        </p:spPr>
+      </p:sp>
+      <p:sp>
+        <p:nvSpPr>
+          <p:cNvPr id="27" name="Text 25"/>
+          <p:cNvSpPr/>
+          <p:nvPr/>
+        </p:nvSpPr>
+        <p:spPr>
+          <a:xfrm>
+            <a:off x="365760" y="2002536"/>
+            <a:ext cx="658368" cy="219456"/>
           </a:xfrm>
           <a:prstGeom prst="rect">
             <a:avLst/>
@@ -32046,7 +34339,231 @@
               <a:buNone/>
             </a:pPr>
             <a:r>
-              <a:rPr lang="en-US" sz="900" i="1" dirty="0">
+              <a:rPr lang="en-US" sz="950" b="1" dirty="0">
+                <a:solidFill>
+                  <a:srgbClr val="60A5FA"/>
+                </a:solidFill>
+                <a:latin typeface="Cambria" pitchFamily="34" charset="0"/>
+                <a:ea typeface="Cambria" pitchFamily="34" charset="-122"/>
+                <a:cs typeface="Cambria" pitchFamily="34" charset="-120"/>
+              </a:rPr>
+              <a:t>L3</a:t>
+            </a:r>
+            <a:endParaRPr lang="en-US" sz="950" dirty="0"/>
+          </a:p>
+        </p:txBody>
+      </p:sp>
+      <p:sp>
+        <p:nvSpPr>
+          <p:cNvPr id="28" name="Text 26"/>
+          <p:cNvSpPr/>
+          <p:nvPr/>
+        </p:nvSpPr>
+        <p:spPr>
+          <a:xfrm>
+            <a:off x="384048" y="2240280"/>
+            <a:ext cx="621792" cy="365760"/>
+          </a:xfrm>
+          <a:prstGeom prst="rect">
+            <a:avLst/>
+          </a:prstGeom>
+          <a:noFill/>
+          <a:ln/>
+        </p:spPr>
+        <p:txBody>
+          <a:bodyPr wrap="square" lIns="0" tIns="0" rIns="0" bIns="0" rtlCol="0" anchor="ctr"/>
+          <a:lstStyle/>
+          <a:p>
+            <a:pPr algn="ctr" indent="0" marL="0">
+              <a:buNone/>
+            </a:pPr>
+            <a:r>
+              <a:rPr lang="en-US" sz="630" b="1" dirty="0">
+                <a:solidFill>
+                  <a:srgbClr val="60A5FA"/>
+                </a:solidFill>
+                <a:latin typeface="Arial" pitchFamily="34" charset="0"/>
+                <a:ea typeface="Arial" pitchFamily="34" charset="-122"/>
+                <a:cs typeface="Arial" pitchFamily="34" charset="-120"/>
+              </a:rPr>
+              <a:t>状态/意图推断</a:t>
+            </a:r>
+            <a:endParaRPr lang="en-US" sz="630" dirty="0"/>
+          </a:p>
+        </p:txBody>
+      </p:sp>
+      <p:sp>
+        <p:nvSpPr>
+          <p:cNvPr id="29" name="Shape 27"/>
+          <p:cNvSpPr/>
+          <p:nvPr/>
+        </p:nvSpPr>
+        <p:spPr>
+          <a:xfrm>
+            <a:off x="1060704" y="1911096"/>
+            <a:ext cx="1572768" cy="749808"/>
+          </a:xfrm>
+          <a:prstGeom prst="roundRect">
+            <a:avLst>
+              <a:gd name="adj" fmla="val 3659"/>
+            </a:avLst>
+          </a:prstGeom>
+          <a:solidFill>
+            <a:srgbClr val="332608"/>
+          </a:solidFill>
+          <a:ln w="6350">
+            <a:solidFill>
+              <a:srgbClr val="5C4A12"/>
+            </a:solidFill>
+            <a:prstDash val="solid"/>
+          </a:ln>
+          <a:effectLst>
+            <a:outerShdw sx="100000" sy="100000" kx="0" ky="0" algn="bl" rotWithShape="0" blurRad="63500" dist="25400" dir="2700000">
+              <a:srgbClr val="000000">
+                <a:alpha val="18000"/>
+              </a:srgbClr>
+            </a:outerShdw>
+          </a:effectLst>
+        </p:spPr>
+      </p:sp>
+      <p:sp>
+        <p:nvSpPr>
+          <p:cNvPr id="30" name="Text 28"/>
+          <p:cNvSpPr/>
+          <p:nvPr/>
+        </p:nvSpPr>
+        <p:spPr>
+          <a:xfrm>
+            <a:off x="1106424" y="1965960"/>
+            <a:ext cx="1481328" cy="310896"/>
+          </a:xfrm>
+          <a:prstGeom prst="rect">
+            <a:avLst/>
+          </a:prstGeom>
+          <a:noFill/>
+          <a:ln/>
+        </p:spPr>
+        <p:txBody>
+          <a:bodyPr wrap="square" lIns="0" tIns="0" rIns="0" bIns="0" rtlCol="0" anchor="ctr"/>
+          <a:lstStyle/>
+          <a:p>
+            <a:pPr indent="0" marL="0">
+              <a:buNone/>
+            </a:pPr>
+            <a:r>
+              <a:rPr lang="en-US" sz="690" b="1" dirty="0">
+                <a:solidFill>
+                  <a:srgbClr val="F8FAFC"/>
+                </a:solidFill>
+                <a:latin typeface="Arial" pitchFamily="34" charset="0"/>
+                <a:ea typeface="Arial" pitchFamily="34" charset="-122"/>
+                <a:cs typeface="Arial" pitchFamily="34" charset="-120"/>
+              </a:rPr>
+              <a:t>任务理解(Gemini)</a:t>
+            </a:r>
+            <a:endParaRPr lang="en-US" sz="690" dirty="0"/>
+          </a:p>
+        </p:txBody>
+      </p:sp>
+      <p:sp>
+        <p:nvSpPr>
+          <p:cNvPr id="31" name="Text 29"/>
+          <p:cNvSpPr/>
+          <p:nvPr/>
+        </p:nvSpPr>
+        <p:spPr>
+          <a:xfrm>
+            <a:off x="1106424" y="2295144"/>
+            <a:ext cx="1481328" cy="347472"/>
+          </a:xfrm>
+          <a:prstGeom prst="rect">
+            <a:avLst/>
+          </a:prstGeom>
+          <a:noFill/>
+          <a:ln/>
+        </p:spPr>
+        <p:txBody>
+          <a:bodyPr wrap="square" lIns="0" tIns="0" rIns="0" bIns="0" rtlCol="0" anchor="ctr"/>
+          <a:lstStyle/>
+          <a:p>
+            <a:pPr indent="0" marL="0">
+              <a:buNone/>
+            </a:pPr>
+            <a:r>
+              <a:rPr lang="en-US" sz="610" dirty="0">
+                <a:solidFill>
+                  <a:srgbClr val="94A3B8"/>
+                </a:solidFill>
+                <a:latin typeface="Arial" pitchFamily="34" charset="0"/>
+                <a:ea typeface="Arial" pitchFamily="34" charset="-122"/>
+                <a:cs typeface="Arial" pitchFamily="34" charset="-120"/>
+              </a:rPr>
+              <a:t>智能层外包</a:t>
+            </a:r>
+            <a:endParaRPr lang="en-US" sz="610" dirty="0"/>
+          </a:p>
+        </p:txBody>
+      </p:sp>
+      <p:sp>
+        <p:nvSpPr>
+          <p:cNvPr id="32" name="Shape 30"/>
+          <p:cNvSpPr/>
+          <p:nvPr/>
+        </p:nvSpPr>
+        <p:spPr>
+          <a:xfrm>
+            <a:off x="2670048" y="1911096"/>
+            <a:ext cx="1572768" cy="749808"/>
+          </a:xfrm>
+          <a:prstGeom prst="roundRect">
+            <a:avLst>
+              <a:gd name="adj" fmla="val 3659"/>
+            </a:avLst>
+          </a:prstGeom>
+          <a:solidFill>
+            <a:srgbClr val="0A0C11"/>
+          </a:solidFill>
+          <a:ln w="6350">
+            <a:solidFill>
+              <a:srgbClr val="1A1F2E"/>
+            </a:solidFill>
+            <a:prstDash val="solid"/>
+          </a:ln>
+          <a:effectLst>
+            <a:outerShdw sx="100000" sy="100000" kx="0" ky="0" algn="bl" rotWithShape="0" blurRad="63500" dist="25400" dir="2700000">
+              <a:srgbClr val="000000">
+                <a:alpha val="18000"/>
+              </a:srgbClr>
+            </a:outerShdw>
+          </a:effectLst>
+        </p:spPr>
+      </p:sp>
+      <p:sp>
+        <p:nvSpPr>
+          <p:cNvPr id="33" name="Text 31"/>
+          <p:cNvSpPr/>
+          <p:nvPr/>
+        </p:nvSpPr>
+        <p:spPr>
+          <a:xfrm>
+            <a:off x="2715768" y="1965960"/>
+            <a:ext cx="1481328" cy="310896"/>
+          </a:xfrm>
+          <a:prstGeom prst="rect">
+            <a:avLst/>
+          </a:prstGeom>
+          <a:noFill/>
+          <a:ln/>
+        </p:spPr>
+        <p:txBody>
+          <a:bodyPr wrap="square" lIns="0" tIns="0" rIns="0" bIns="0" rtlCol="0" anchor="ctr"/>
+          <a:lstStyle/>
+          <a:p>
+            <a:pPr indent="0" marL="0">
+              <a:buNone/>
+            </a:pPr>
+            <a:r>
+              <a:rPr lang="en-US" sz="690" b="1" dirty="0">
                 <a:solidFill>
                   <a:srgbClr val="475569"/>
                 </a:solidFill>
@@ -32054,9 +34571,1542 @@
                 <a:ea typeface="Arial" pitchFamily="34" charset="-122"/>
                 <a:cs typeface="Arial" pitchFamily="34" charset="-120"/>
               </a:rPr>
-              <a:t>[ 待调研补充 ]</a:t>
-            </a:r>
-            <a:endParaRPr lang="en-US" sz="900" dirty="0"/>
+              <a:t>—</a:t>
+            </a:r>
+            <a:endParaRPr lang="en-US" sz="690" dirty="0"/>
+          </a:p>
+        </p:txBody>
+      </p:sp>
+      <p:sp>
+        <p:nvSpPr>
+          <p:cNvPr id="34" name="Shape 32"/>
+          <p:cNvSpPr/>
+          <p:nvPr/>
+        </p:nvSpPr>
+        <p:spPr>
+          <a:xfrm>
+            <a:off x="4279392" y="1911096"/>
+            <a:ext cx="1572768" cy="749808"/>
+          </a:xfrm>
+          <a:prstGeom prst="roundRect">
+            <a:avLst>
+              <a:gd name="adj" fmla="val 3659"/>
+            </a:avLst>
+          </a:prstGeom>
+          <a:solidFill>
+            <a:srgbClr val="332608"/>
+          </a:solidFill>
+          <a:ln w="6350">
+            <a:solidFill>
+              <a:srgbClr val="5C4A12"/>
+            </a:solidFill>
+            <a:prstDash val="solid"/>
+          </a:ln>
+          <a:effectLst>
+            <a:outerShdw sx="100000" sy="100000" kx="0" ky="0" algn="bl" rotWithShape="0" blurRad="63500" dist="25400" dir="2700000">
+              <a:srgbClr val="000000">
+                <a:alpha val="18000"/>
+              </a:srgbClr>
+            </a:outerShdw>
+          </a:effectLst>
+        </p:spPr>
+      </p:sp>
+      <p:sp>
+        <p:nvSpPr>
+          <p:cNvPr id="35" name="Text 33"/>
+          <p:cNvSpPr/>
+          <p:nvPr/>
+        </p:nvSpPr>
+        <p:spPr>
+          <a:xfrm>
+            <a:off x="4325112" y="1965960"/>
+            <a:ext cx="1481328" cy="310896"/>
+          </a:xfrm>
+          <a:prstGeom prst="rect">
+            <a:avLst/>
+          </a:prstGeom>
+          <a:noFill/>
+          <a:ln/>
+        </p:spPr>
+        <p:txBody>
+          <a:bodyPr wrap="square" lIns="0" tIns="0" rIns="0" bIns="0" rtlCol="0" anchor="ctr"/>
+          <a:lstStyle/>
+          <a:p>
+            <a:pPr indent="0" marL="0">
+              <a:buNone/>
+            </a:pPr>
+            <a:r>
+              <a:rPr lang="en-US" sz="690" b="1" dirty="0">
+                <a:solidFill>
+                  <a:srgbClr val="F8FAFC"/>
+                </a:solidFill>
+                <a:latin typeface="Arial" pitchFamily="34" charset="0"/>
+                <a:ea typeface="Arial" pitchFamily="34" charset="-122"/>
+                <a:cs typeface="Arial" pitchFamily="34" charset="-120"/>
+              </a:rPr>
+              <a:t>识图·非情绪</a:t>
+            </a:r>
+            <a:endParaRPr lang="en-US" sz="690" dirty="0"/>
+          </a:p>
+        </p:txBody>
+      </p:sp>
+      <p:sp>
+        <p:nvSpPr>
+          <p:cNvPr id="36" name="Shape 34"/>
+          <p:cNvSpPr/>
+          <p:nvPr/>
+        </p:nvSpPr>
+        <p:spPr>
+          <a:xfrm>
+            <a:off x="5888736" y="1911096"/>
+            <a:ext cx="1572768" cy="749808"/>
+          </a:xfrm>
+          <a:prstGeom prst="roundRect">
+            <a:avLst>
+              <a:gd name="adj" fmla="val 3659"/>
+            </a:avLst>
+          </a:prstGeom>
+          <a:solidFill>
+            <a:srgbClr val="0C1A10"/>
+          </a:solidFill>
+          <a:ln w="11430">
+            <a:solidFill>
+              <a:srgbClr val="4ADE80"/>
+            </a:solidFill>
+            <a:prstDash val="solid"/>
+          </a:ln>
+          <a:effectLst>
+            <a:outerShdw sx="100000" sy="100000" kx="0" ky="0" algn="bl" rotWithShape="0" blurRad="63500" dist="25400" dir="2700000">
+              <a:srgbClr val="000000">
+                <a:alpha val="18000"/>
+              </a:srgbClr>
+            </a:outerShdw>
+          </a:effectLst>
+        </p:spPr>
+      </p:sp>
+      <p:sp>
+        <p:nvSpPr>
+          <p:cNvPr id="37" name="Text 35"/>
+          <p:cNvSpPr/>
+          <p:nvPr/>
+        </p:nvSpPr>
+        <p:spPr>
+          <a:xfrm>
+            <a:off x="5934456" y="1965960"/>
+            <a:ext cx="1481328" cy="310896"/>
+          </a:xfrm>
+          <a:prstGeom prst="rect">
+            <a:avLst/>
+          </a:prstGeom>
+          <a:noFill/>
+          <a:ln/>
+        </p:spPr>
+        <p:txBody>
+          <a:bodyPr wrap="square" lIns="0" tIns="0" rIns="0" bIns="0" rtlCol="0" anchor="ctr"/>
+          <a:lstStyle/>
+          <a:p>
+            <a:pPr indent="0" marL="0">
+              <a:buNone/>
+            </a:pPr>
+            <a:r>
+              <a:rPr lang="en-US" sz="690" b="1" dirty="0">
+                <a:solidFill>
+                  <a:srgbClr val="F8FAFC"/>
+                </a:solidFill>
+                <a:latin typeface="Arial" pitchFamily="34" charset="0"/>
+                <a:ea typeface="Arial" pitchFamily="34" charset="-122"/>
+                <a:cs typeface="Arial" pitchFamily="34" charset="-120"/>
+              </a:rPr>
+              <a:t>Energy Score 0-100</a:t>
+            </a:r>
+            <a:endParaRPr lang="en-US" sz="690" dirty="0"/>
+          </a:p>
+        </p:txBody>
+      </p:sp>
+      <p:sp>
+        <p:nvSpPr>
+          <p:cNvPr id="38" name="Text 36"/>
+          <p:cNvSpPr/>
+          <p:nvPr/>
+        </p:nvSpPr>
+        <p:spPr>
+          <a:xfrm>
+            <a:off x="5934456" y="2295144"/>
+            <a:ext cx="1481328" cy="347472"/>
+          </a:xfrm>
+          <a:prstGeom prst="rect">
+            <a:avLst/>
+          </a:prstGeom>
+          <a:noFill/>
+          <a:ln/>
+        </p:spPr>
+        <p:txBody>
+          <a:bodyPr wrap="square" lIns="0" tIns="0" rIns="0" bIns="0" rtlCol="0" anchor="ctr"/>
+          <a:lstStyle/>
+          <a:p>
+            <a:pPr indent="0" marL="0">
+              <a:buNone/>
+            </a:pPr>
+            <a:r>
+              <a:rPr lang="en-US" sz="610" dirty="0">
+                <a:solidFill>
+                  <a:srgbClr val="94A3B8"/>
+                </a:solidFill>
+                <a:latin typeface="Arial" pitchFamily="34" charset="0"/>
+                <a:ea typeface="Arial" pitchFamily="34" charset="-122"/>
+                <a:cs typeface="Arial" pitchFamily="34" charset="-120"/>
+              </a:rPr>
+              <a:t>恢复状态推断</a:t>
+            </a:r>
+            <a:endParaRPr lang="en-US" sz="610" dirty="0"/>
+          </a:p>
+        </p:txBody>
+      </p:sp>
+      <p:sp>
+        <p:nvSpPr>
+          <p:cNvPr id="39" name="Shape 37"/>
+          <p:cNvSpPr/>
+          <p:nvPr/>
+        </p:nvSpPr>
+        <p:spPr>
+          <a:xfrm>
+            <a:off x="7498080" y="1911096"/>
+            <a:ext cx="1572768" cy="749808"/>
+          </a:xfrm>
+          <a:prstGeom prst="roundRect">
+            <a:avLst>
+              <a:gd name="adj" fmla="val 3659"/>
+            </a:avLst>
+          </a:prstGeom>
+          <a:solidFill>
+            <a:srgbClr val="0A0C11"/>
+          </a:solidFill>
+          <a:ln w="6350">
+            <a:solidFill>
+              <a:srgbClr val="1A1F2E"/>
+            </a:solidFill>
+            <a:prstDash val="solid"/>
+          </a:ln>
+          <a:effectLst>
+            <a:outerShdw sx="100000" sy="100000" kx="0" ky="0" algn="bl" rotWithShape="0" blurRad="63500" dist="25400" dir="2700000">
+              <a:srgbClr val="000000">
+                <a:alpha val="18000"/>
+              </a:srgbClr>
+            </a:outerShdw>
+          </a:effectLst>
+        </p:spPr>
+      </p:sp>
+      <p:sp>
+        <p:nvSpPr>
+          <p:cNvPr id="40" name="Text 38"/>
+          <p:cNvSpPr/>
+          <p:nvPr/>
+        </p:nvSpPr>
+        <p:spPr>
+          <a:xfrm>
+            <a:off x="7543800" y="1965960"/>
+            <a:ext cx="1481328" cy="310896"/>
+          </a:xfrm>
+          <a:prstGeom prst="rect">
+            <a:avLst/>
+          </a:prstGeom>
+          <a:noFill/>
+          <a:ln/>
+        </p:spPr>
+        <p:txBody>
+          <a:bodyPr wrap="square" lIns="0" tIns="0" rIns="0" bIns="0" rtlCol="0" anchor="ctr"/>
+          <a:lstStyle/>
+          <a:p>
+            <a:pPr indent="0" marL="0">
+              <a:buNone/>
+            </a:pPr>
+            <a:r>
+              <a:rPr lang="en-US" sz="690" b="1" dirty="0">
+                <a:solidFill>
+                  <a:srgbClr val="475569"/>
+                </a:solidFill>
+                <a:latin typeface="Arial" pitchFamily="34" charset="0"/>
+                <a:ea typeface="Arial" pitchFamily="34" charset="-122"/>
+                <a:cs typeface="Arial" pitchFamily="34" charset="-120"/>
+              </a:rPr>
+              <a:t>—</a:t>
+            </a:r>
+            <a:endParaRPr lang="en-US" sz="690" dirty="0"/>
+          </a:p>
+        </p:txBody>
+      </p:sp>
+      <p:sp>
+        <p:nvSpPr>
+          <p:cNvPr id="41" name="Shape 39"/>
+          <p:cNvSpPr/>
+          <p:nvPr/>
+        </p:nvSpPr>
+        <p:spPr>
+          <a:xfrm>
+            <a:off x="365760" y="2706624"/>
+            <a:ext cx="658368" cy="749808"/>
+          </a:xfrm>
+          <a:prstGeom prst="roundRect">
+            <a:avLst>
+              <a:gd name="adj" fmla="val 4167"/>
+            </a:avLst>
+          </a:prstGeom>
+          <a:solidFill>
+            <a:srgbClr val="0D1017"/>
+          </a:solidFill>
+          <a:ln w="10160">
+            <a:solidFill>
+              <a:srgbClr val="4ADE80"/>
+            </a:solidFill>
+            <a:prstDash val="solid"/>
+          </a:ln>
+          <a:effectLst>
+            <a:outerShdw sx="100000" sy="100000" kx="0" ky="0" algn="bl" rotWithShape="0" blurRad="63500" dist="25400" dir="2700000">
+              <a:srgbClr val="000000">
+                <a:alpha val="18000"/>
+              </a:srgbClr>
+            </a:outerShdw>
+          </a:effectLst>
+        </p:spPr>
+      </p:sp>
+      <p:sp>
+        <p:nvSpPr>
+          <p:cNvPr id="42" name="Text 40"/>
+          <p:cNvSpPr/>
+          <p:nvPr/>
+        </p:nvSpPr>
+        <p:spPr>
+          <a:xfrm>
+            <a:off x="365760" y="2798064"/>
+            <a:ext cx="658368" cy="219456"/>
+          </a:xfrm>
+          <a:prstGeom prst="rect">
+            <a:avLst/>
+          </a:prstGeom>
+          <a:noFill/>
+          <a:ln/>
+        </p:spPr>
+        <p:txBody>
+          <a:bodyPr wrap="square" lIns="0" tIns="0" rIns="0" bIns="0" rtlCol="0" anchor="ctr"/>
+          <a:lstStyle/>
+          <a:p>
+            <a:pPr algn="ctr" indent="0" marL="0">
+              <a:buNone/>
+            </a:pPr>
+            <a:r>
+              <a:rPr lang="en-US" sz="950" b="1" dirty="0">
+                <a:solidFill>
+                  <a:srgbClr val="4ADE80"/>
+                </a:solidFill>
+                <a:latin typeface="Cambria" pitchFamily="34" charset="0"/>
+                <a:ea typeface="Cambria" pitchFamily="34" charset="-122"/>
+                <a:cs typeface="Cambria" pitchFamily="34" charset="-120"/>
+              </a:rPr>
+              <a:t>L2</a:t>
+            </a:r>
+            <a:endParaRPr lang="en-US" sz="950" dirty="0"/>
+          </a:p>
+        </p:txBody>
+      </p:sp>
+      <p:sp>
+        <p:nvSpPr>
+          <p:cNvPr id="43" name="Text 41"/>
+          <p:cNvSpPr/>
+          <p:nvPr/>
+        </p:nvSpPr>
+        <p:spPr>
+          <a:xfrm>
+            <a:off x="384048" y="3035808"/>
+            <a:ext cx="621792" cy="365760"/>
+          </a:xfrm>
+          <a:prstGeom prst="rect">
+            <a:avLst/>
+          </a:prstGeom>
+          <a:noFill/>
+          <a:ln/>
+        </p:spPr>
+        <p:txBody>
+          <a:bodyPr wrap="square" lIns="0" tIns="0" rIns="0" bIns="0" rtlCol="0" anchor="ctr"/>
+          <a:lstStyle/>
+          <a:p>
+            <a:pPr algn="ctr" indent="0" marL="0">
+              <a:buNone/>
+            </a:pPr>
+            <a:r>
+              <a:rPr lang="en-US" sz="630" b="1" dirty="0">
+                <a:solidFill>
+                  <a:srgbClr val="4ADE80"/>
+                </a:solidFill>
+                <a:latin typeface="Arial" pitchFamily="34" charset="0"/>
+                <a:ea typeface="Arial" pitchFamily="34" charset="-122"/>
+                <a:cs typeface="Arial" pitchFamily="34" charset="-120"/>
+              </a:rPr>
+              <a:t>特征/处理</a:t>
+            </a:r>
+            <a:endParaRPr lang="en-US" sz="630" dirty="0"/>
+          </a:p>
+        </p:txBody>
+      </p:sp>
+      <p:sp>
+        <p:nvSpPr>
+          <p:cNvPr id="44" name="Shape 42"/>
+          <p:cNvSpPr/>
+          <p:nvPr/>
+        </p:nvSpPr>
+        <p:spPr>
+          <a:xfrm>
+            <a:off x="1060704" y="2706624"/>
+            <a:ext cx="1572768" cy="749808"/>
+          </a:xfrm>
+          <a:prstGeom prst="roundRect">
+            <a:avLst>
+              <a:gd name="adj" fmla="val 3659"/>
+            </a:avLst>
+          </a:prstGeom>
+          <a:solidFill>
+            <a:srgbClr val="332608"/>
+          </a:solidFill>
+          <a:ln w="6350">
+            <a:solidFill>
+              <a:srgbClr val="5C4A12"/>
+            </a:solidFill>
+            <a:prstDash val="solid"/>
+          </a:ln>
+          <a:effectLst>
+            <a:outerShdw sx="100000" sy="100000" kx="0" ky="0" algn="bl" rotWithShape="0" blurRad="63500" dist="25400" dir="2700000">
+              <a:srgbClr val="000000">
+                <a:alpha val="18000"/>
+              </a:srgbClr>
+            </a:outerShdw>
+          </a:effectLst>
+        </p:spPr>
+      </p:sp>
+      <p:sp>
+        <p:nvSpPr>
+          <p:cNvPr id="45" name="Text 43"/>
+          <p:cNvSpPr/>
+          <p:nvPr/>
+        </p:nvSpPr>
+        <p:spPr>
+          <a:xfrm>
+            <a:off x="1106424" y="2761488"/>
+            <a:ext cx="1481328" cy="310896"/>
+          </a:xfrm>
+          <a:prstGeom prst="rect">
+            <a:avLst/>
+          </a:prstGeom>
+          <a:noFill/>
+          <a:ln/>
+        </p:spPr>
+        <p:txBody>
+          <a:bodyPr wrap="square" lIns="0" tIns="0" rIns="0" bIns="0" rtlCol="0" anchor="ctr"/>
+          <a:lstStyle/>
+          <a:p>
+            <a:pPr indent="0" marL="0">
+              <a:buNone/>
+            </a:pPr>
+            <a:r>
+              <a:rPr lang="en-US" sz="690" b="1" dirty="0">
+                <a:solidFill>
+                  <a:srgbClr val="F8FAFC"/>
+                </a:solidFill>
+                <a:latin typeface="Arial" pitchFamily="34" charset="0"/>
+                <a:ea typeface="Arial" pitchFamily="34" charset="-122"/>
+                <a:cs typeface="Arial" pitchFamily="34" charset="-120"/>
+              </a:rPr>
+              <a:t>Galaxy AI处理</a:t>
+            </a:r>
+            <a:endParaRPr lang="en-US" sz="690" dirty="0"/>
+          </a:p>
+        </p:txBody>
+      </p:sp>
+      <p:sp>
+        <p:nvSpPr>
+          <p:cNvPr id="46" name="Text 44"/>
+          <p:cNvSpPr/>
+          <p:nvPr/>
+        </p:nvSpPr>
+        <p:spPr>
+          <a:xfrm>
+            <a:off x="1106424" y="3090672"/>
+            <a:ext cx="1481328" cy="347472"/>
+          </a:xfrm>
+          <a:prstGeom prst="rect">
+            <a:avLst/>
+          </a:prstGeom>
+          <a:noFill/>
+          <a:ln/>
+        </p:spPr>
+        <p:txBody>
+          <a:bodyPr wrap="square" lIns="0" tIns="0" rIns="0" bIns="0" rtlCol="0" anchor="ctr"/>
+          <a:lstStyle/>
+          <a:p>
+            <a:pPr indent="0" marL="0">
+              <a:buNone/>
+            </a:pPr>
+            <a:r>
+              <a:rPr lang="en-US" sz="610" dirty="0">
+                <a:solidFill>
+                  <a:srgbClr val="94A3B8"/>
+                </a:solidFill>
+                <a:latin typeface="Arial" pitchFamily="34" charset="0"/>
+                <a:ea typeface="Arial" pitchFamily="34" charset="-122"/>
+                <a:cs typeface="Arial" pitchFamily="34" charset="-120"/>
+              </a:rPr>
+              <a:t>翻译/转写·部分端侧</a:t>
+            </a:r>
+            <a:endParaRPr lang="en-US" sz="610" dirty="0"/>
+          </a:p>
+        </p:txBody>
+      </p:sp>
+      <p:sp>
+        <p:nvSpPr>
+          <p:cNvPr id="47" name="Shape 45"/>
+          <p:cNvSpPr/>
+          <p:nvPr/>
+        </p:nvSpPr>
+        <p:spPr>
+          <a:xfrm>
+            <a:off x="2670048" y="2706624"/>
+            <a:ext cx="1572768" cy="749808"/>
+          </a:xfrm>
+          <a:prstGeom prst="roundRect">
+            <a:avLst>
+              <a:gd name="adj" fmla="val 3659"/>
+            </a:avLst>
+          </a:prstGeom>
+          <a:solidFill>
+            <a:srgbClr val="332608"/>
+          </a:solidFill>
+          <a:ln w="6350">
+            <a:solidFill>
+              <a:srgbClr val="5C4A12"/>
+            </a:solidFill>
+            <a:prstDash val="solid"/>
+          </a:ln>
+          <a:effectLst>
+            <a:outerShdw sx="100000" sy="100000" kx="0" ky="0" algn="bl" rotWithShape="0" blurRad="63500" dist="25400" dir="2700000">
+              <a:srgbClr val="000000">
+                <a:alpha val="18000"/>
+              </a:srgbClr>
+            </a:outerShdw>
+          </a:effectLst>
+        </p:spPr>
+      </p:sp>
+      <p:sp>
+        <p:nvSpPr>
+          <p:cNvPr id="48" name="Text 46"/>
+          <p:cNvSpPr/>
+          <p:nvPr/>
+        </p:nvSpPr>
+        <p:spPr>
+          <a:xfrm>
+            <a:off x="2715768" y="2761488"/>
+            <a:ext cx="1481328" cy="310896"/>
+          </a:xfrm>
+          <a:prstGeom prst="rect">
+            <a:avLst/>
+          </a:prstGeom>
+          <a:noFill/>
+          <a:ln/>
+        </p:spPr>
+        <p:txBody>
+          <a:bodyPr wrap="square" lIns="0" tIns="0" rIns="0" bIns="0" rtlCol="0" anchor="ctr"/>
+          <a:lstStyle/>
+          <a:p>
+            <a:pPr indent="0" marL="0">
+              <a:buNone/>
+            </a:pPr>
+            <a:r>
+              <a:rPr lang="en-US" sz="690" b="1" dirty="0">
+                <a:solidFill>
+                  <a:srgbClr val="F8FAFC"/>
+                </a:solidFill>
+                <a:latin typeface="Arial" pitchFamily="34" charset="0"/>
+                <a:ea typeface="Arial" pitchFamily="34" charset="-122"/>
+                <a:cs typeface="Arial" pitchFamily="34" charset="-120"/>
+              </a:rPr>
+              <a:t>语音转写</a:t>
+            </a:r>
+            <a:endParaRPr lang="en-US" sz="690" dirty="0"/>
+          </a:p>
+        </p:txBody>
+      </p:sp>
+      <p:sp>
+        <p:nvSpPr>
+          <p:cNvPr id="49" name="Text 47"/>
+          <p:cNvSpPr/>
+          <p:nvPr/>
+        </p:nvSpPr>
+        <p:spPr>
+          <a:xfrm>
+            <a:off x="2715768" y="3090672"/>
+            <a:ext cx="1481328" cy="347472"/>
+          </a:xfrm>
+          <a:prstGeom prst="rect">
+            <a:avLst/>
+          </a:prstGeom>
+          <a:noFill/>
+          <a:ln/>
+        </p:spPr>
+        <p:txBody>
+          <a:bodyPr wrap="square" lIns="0" tIns="0" rIns="0" bIns="0" rtlCol="0" anchor="ctr"/>
+          <a:lstStyle/>
+          <a:p>
+            <a:pPr indent="0" marL="0">
+              <a:buNone/>
+            </a:pPr>
+            <a:r>
+              <a:rPr lang="en-US" sz="610" dirty="0">
+                <a:solidFill>
+                  <a:srgbClr val="94A3B8"/>
+                </a:solidFill>
+                <a:latin typeface="Arial" pitchFamily="34" charset="0"/>
+                <a:ea typeface="Arial" pitchFamily="34" charset="-122"/>
+                <a:cs typeface="Arial" pitchFamily="34" charset="-120"/>
+              </a:rPr>
+              <a:t>通话摘要</a:t>
+            </a:r>
+            <a:endParaRPr lang="en-US" sz="610" dirty="0"/>
+          </a:p>
+        </p:txBody>
+      </p:sp>
+      <p:sp>
+        <p:nvSpPr>
+          <p:cNvPr id="50" name="Shape 48"/>
+          <p:cNvSpPr/>
+          <p:nvPr/>
+        </p:nvSpPr>
+        <p:spPr>
+          <a:xfrm>
+            <a:off x="4279392" y="2706624"/>
+            <a:ext cx="1572768" cy="749808"/>
+          </a:xfrm>
+          <a:prstGeom prst="roundRect">
+            <a:avLst>
+              <a:gd name="adj" fmla="val 3659"/>
+            </a:avLst>
+          </a:prstGeom>
+          <a:solidFill>
+            <a:srgbClr val="332608"/>
+          </a:solidFill>
+          <a:ln w="6350">
+            <a:solidFill>
+              <a:srgbClr val="5C4A12"/>
+            </a:solidFill>
+            <a:prstDash val="solid"/>
+          </a:ln>
+          <a:effectLst>
+            <a:outerShdw sx="100000" sy="100000" kx="0" ky="0" algn="bl" rotWithShape="0" blurRad="63500" dist="25400" dir="2700000">
+              <a:srgbClr val="000000">
+                <a:alpha val="18000"/>
+              </a:srgbClr>
+            </a:outerShdw>
+          </a:effectLst>
+        </p:spPr>
+      </p:sp>
+      <p:sp>
+        <p:nvSpPr>
+          <p:cNvPr id="51" name="Text 49"/>
+          <p:cNvSpPr/>
+          <p:nvPr/>
+        </p:nvSpPr>
+        <p:spPr>
+          <a:xfrm>
+            <a:off x="4325112" y="2761488"/>
+            <a:ext cx="1481328" cy="310896"/>
+          </a:xfrm>
+          <a:prstGeom prst="rect">
+            <a:avLst/>
+          </a:prstGeom>
+          <a:noFill/>
+          <a:ln/>
+        </p:spPr>
+        <p:txBody>
+          <a:bodyPr wrap="square" lIns="0" tIns="0" rIns="0" bIns="0" rtlCol="0" anchor="ctr"/>
+          <a:lstStyle/>
+          <a:p>
+            <a:pPr indent="0" marL="0">
+              <a:buNone/>
+            </a:pPr>
+            <a:r>
+              <a:rPr lang="en-US" sz="690" b="1" dirty="0">
+                <a:solidFill>
+                  <a:srgbClr val="F8FAFC"/>
+                </a:solidFill>
+                <a:latin typeface="Arial" pitchFamily="34" charset="0"/>
+                <a:ea typeface="Arial" pitchFamily="34" charset="-122"/>
+                <a:cs typeface="Arial" pitchFamily="34" charset="-120"/>
+              </a:rPr>
+              <a:t>图像处理</a:t>
+            </a:r>
+            <a:endParaRPr lang="en-US" sz="690" dirty="0"/>
+          </a:p>
+        </p:txBody>
+      </p:sp>
+      <p:sp>
+        <p:nvSpPr>
+          <p:cNvPr id="52" name="Text 50"/>
+          <p:cNvSpPr/>
+          <p:nvPr/>
+        </p:nvSpPr>
+        <p:spPr>
+          <a:xfrm>
+            <a:off x="4325112" y="3090672"/>
+            <a:ext cx="1481328" cy="347472"/>
+          </a:xfrm>
+          <a:prstGeom prst="rect">
+            <a:avLst/>
+          </a:prstGeom>
+          <a:noFill/>
+          <a:ln/>
+        </p:spPr>
+        <p:txBody>
+          <a:bodyPr wrap="square" lIns="0" tIns="0" rIns="0" bIns="0" rtlCol="0" anchor="ctr"/>
+          <a:lstStyle/>
+          <a:p>
+            <a:pPr indent="0" marL="0">
+              <a:buNone/>
+            </a:pPr>
+            <a:r>
+              <a:rPr lang="en-US" sz="610" dirty="0">
+                <a:solidFill>
+                  <a:srgbClr val="94A3B8"/>
+                </a:solidFill>
+                <a:latin typeface="Arial" pitchFamily="34" charset="0"/>
+                <a:ea typeface="Arial" pitchFamily="34" charset="-122"/>
+                <a:cs typeface="Arial" pitchFamily="34" charset="-120"/>
+              </a:rPr>
+              <a:t>Photo Assist</a:t>
+            </a:r>
+            <a:endParaRPr lang="en-US" sz="610" dirty="0"/>
+          </a:p>
+        </p:txBody>
+      </p:sp>
+      <p:sp>
+        <p:nvSpPr>
+          <p:cNvPr id="53" name="Shape 51"/>
+          <p:cNvSpPr/>
+          <p:nvPr/>
+        </p:nvSpPr>
+        <p:spPr>
+          <a:xfrm>
+            <a:off x="5888736" y="2706624"/>
+            <a:ext cx="1572768" cy="749808"/>
+          </a:xfrm>
+          <a:prstGeom prst="roundRect">
+            <a:avLst>
+              <a:gd name="adj" fmla="val 3659"/>
+            </a:avLst>
+          </a:prstGeom>
+          <a:solidFill>
+            <a:srgbClr val="0C1A10"/>
+          </a:solidFill>
+          <a:ln w="11430">
+            <a:solidFill>
+              <a:srgbClr val="4ADE80"/>
+            </a:solidFill>
+            <a:prstDash val="solid"/>
+          </a:ln>
+          <a:effectLst>
+            <a:outerShdw sx="100000" sy="100000" kx="0" ky="0" algn="bl" rotWithShape="0" blurRad="63500" dist="25400" dir="2700000">
+              <a:srgbClr val="000000">
+                <a:alpha val="18000"/>
+              </a:srgbClr>
+            </a:outerShdw>
+          </a:effectLst>
+        </p:spPr>
+      </p:sp>
+      <p:sp>
+        <p:nvSpPr>
+          <p:cNvPr id="54" name="Text 52"/>
+          <p:cNvSpPr/>
+          <p:nvPr/>
+        </p:nvSpPr>
+        <p:spPr>
+          <a:xfrm>
+            <a:off x="5934456" y="2761488"/>
+            <a:ext cx="1481328" cy="310896"/>
+          </a:xfrm>
+          <a:prstGeom prst="rect">
+            <a:avLst/>
+          </a:prstGeom>
+          <a:noFill/>
+          <a:ln/>
+        </p:spPr>
+        <p:txBody>
+          <a:bodyPr wrap="square" lIns="0" tIns="0" rIns="0" bIns="0" rtlCol="0" anchor="ctr"/>
+          <a:lstStyle/>
+          <a:p>
+            <a:pPr indent="0" marL="0">
+              <a:buNone/>
+            </a:pPr>
+            <a:r>
+              <a:rPr lang="en-US" sz="690" b="1" dirty="0">
+                <a:solidFill>
+                  <a:srgbClr val="F8FAFC"/>
+                </a:solidFill>
+                <a:latin typeface="Arial" pitchFamily="34" charset="0"/>
+                <a:ea typeface="Arial" pitchFamily="34" charset="-122"/>
+                <a:cs typeface="Arial" pitchFamily="34" charset="-120"/>
+              </a:rPr>
+              <a:t>Vitals基线</a:t>
+            </a:r>
+            <a:endParaRPr lang="en-US" sz="690" dirty="0"/>
+          </a:p>
+        </p:txBody>
+      </p:sp>
+      <p:sp>
+        <p:nvSpPr>
+          <p:cNvPr id="55" name="Text 53"/>
+          <p:cNvSpPr/>
+          <p:nvPr/>
+        </p:nvSpPr>
+        <p:spPr>
+          <a:xfrm>
+            <a:off x="5934456" y="3090672"/>
+            <a:ext cx="1481328" cy="347472"/>
+          </a:xfrm>
+          <a:prstGeom prst="rect">
+            <a:avLst/>
+          </a:prstGeom>
+          <a:noFill/>
+          <a:ln/>
+        </p:spPr>
+        <p:txBody>
+          <a:bodyPr wrap="square" lIns="0" tIns="0" rIns="0" bIns="0" rtlCol="0" anchor="ctr"/>
+          <a:lstStyle/>
+          <a:p>
+            <a:pPr indent="0" marL="0">
+              <a:buNone/>
+            </a:pPr>
+            <a:r>
+              <a:rPr lang="en-US" sz="610" dirty="0">
+                <a:solidFill>
+                  <a:srgbClr val="94A3B8"/>
+                </a:solidFill>
+                <a:latin typeface="Arial" pitchFamily="34" charset="0"/>
+                <a:ea typeface="Arial" pitchFamily="34" charset="-122"/>
+                <a:cs typeface="Arial" pitchFamily="34" charset="-120"/>
+              </a:rPr>
+              <a:t>5信号vs个人静息基线</a:t>
+            </a:r>
+            <a:endParaRPr lang="en-US" sz="610" dirty="0"/>
+          </a:p>
+        </p:txBody>
+      </p:sp>
+      <p:sp>
+        <p:nvSpPr>
+          <p:cNvPr id="56" name="Shape 54"/>
+          <p:cNvSpPr/>
+          <p:nvPr/>
+        </p:nvSpPr>
+        <p:spPr>
+          <a:xfrm>
+            <a:off x="7498080" y="2706624"/>
+            <a:ext cx="1572768" cy="749808"/>
+          </a:xfrm>
+          <a:prstGeom prst="roundRect">
+            <a:avLst>
+              <a:gd name="adj" fmla="val 3659"/>
+            </a:avLst>
+          </a:prstGeom>
+          <a:solidFill>
+            <a:srgbClr val="332608"/>
+          </a:solidFill>
+          <a:ln w="6350">
+            <a:solidFill>
+              <a:srgbClr val="5C4A12"/>
+            </a:solidFill>
+            <a:prstDash val="solid"/>
+          </a:ln>
+          <a:effectLst>
+            <a:outerShdw sx="100000" sy="100000" kx="0" ky="0" algn="bl" rotWithShape="0" blurRad="63500" dist="25400" dir="2700000">
+              <a:srgbClr val="000000">
+                <a:alpha val="18000"/>
+              </a:srgbClr>
+            </a:outerShdw>
+          </a:effectLst>
+        </p:spPr>
+      </p:sp>
+      <p:sp>
+        <p:nvSpPr>
+          <p:cNvPr id="57" name="Text 55"/>
+          <p:cNvSpPr/>
+          <p:nvPr/>
+        </p:nvSpPr>
+        <p:spPr>
+          <a:xfrm>
+            <a:off x="7543800" y="2761488"/>
+            <a:ext cx="1481328" cy="310896"/>
+          </a:xfrm>
+          <a:prstGeom prst="rect">
+            <a:avLst/>
+          </a:prstGeom>
+          <a:noFill/>
+          <a:ln/>
+        </p:spPr>
+        <p:txBody>
+          <a:bodyPr wrap="square" lIns="0" tIns="0" rIns="0" bIns="0" rtlCol="0" anchor="ctr"/>
+          <a:lstStyle/>
+          <a:p>
+            <a:pPr indent="0" marL="0">
+              <a:buNone/>
+            </a:pPr>
+            <a:r>
+              <a:rPr lang="en-US" sz="690" b="1" dirty="0">
+                <a:solidFill>
+                  <a:srgbClr val="F8FAFC"/>
+                </a:solidFill>
+                <a:latin typeface="Arial" pitchFamily="34" charset="0"/>
+                <a:ea typeface="Arial" pitchFamily="34" charset="-122"/>
+                <a:cs typeface="Arial" pitchFamily="34" charset="-120"/>
+              </a:rPr>
+              <a:t>使用统计</a:t>
+            </a:r>
+            <a:endParaRPr lang="en-US" sz="690" dirty="0"/>
+          </a:p>
+        </p:txBody>
+      </p:sp>
+      <p:sp>
+        <p:nvSpPr>
+          <p:cNvPr id="58" name="Text 56"/>
+          <p:cNvSpPr/>
+          <p:nvPr/>
+        </p:nvSpPr>
+        <p:spPr>
+          <a:xfrm>
+            <a:off x="7543800" y="3090672"/>
+            <a:ext cx="1481328" cy="347472"/>
+          </a:xfrm>
+          <a:prstGeom prst="rect">
+            <a:avLst/>
+          </a:prstGeom>
+          <a:noFill/>
+          <a:ln/>
+        </p:spPr>
+        <p:txBody>
+          <a:bodyPr wrap="square" lIns="0" tIns="0" rIns="0" bIns="0" rtlCol="0" anchor="ctr"/>
+          <a:lstStyle/>
+          <a:p>
+            <a:pPr indent="0" marL="0">
+              <a:buNone/>
+            </a:pPr>
+            <a:r>
+              <a:rPr lang="en-US" sz="610" dirty="0">
+                <a:solidFill>
+                  <a:srgbClr val="94A3B8"/>
+                </a:solidFill>
+                <a:latin typeface="Arial" pitchFamily="34" charset="0"/>
+                <a:ea typeface="Arial" pitchFamily="34" charset="-122"/>
+                <a:cs typeface="Arial" pitchFamily="34" charset="-120"/>
+              </a:rPr>
+              <a:t>数字健康</a:t>
+            </a:r>
+            <a:endParaRPr lang="en-US" sz="610" dirty="0"/>
+          </a:p>
+        </p:txBody>
+      </p:sp>
+      <p:sp>
+        <p:nvSpPr>
+          <p:cNvPr id="59" name="Shape 57"/>
+          <p:cNvSpPr/>
+          <p:nvPr/>
+        </p:nvSpPr>
+        <p:spPr>
+          <a:xfrm>
+            <a:off x="365760" y="3502152"/>
+            <a:ext cx="658368" cy="749808"/>
+          </a:xfrm>
+          <a:prstGeom prst="roundRect">
+            <a:avLst>
+              <a:gd name="adj" fmla="val 4167"/>
+            </a:avLst>
+          </a:prstGeom>
+          <a:solidFill>
+            <a:srgbClr val="0D1017"/>
+          </a:solidFill>
+          <a:ln w="10160">
+            <a:solidFill>
+              <a:srgbClr val="FB923C"/>
+            </a:solidFill>
+            <a:prstDash val="solid"/>
+          </a:ln>
+          <a:effectLst>
+            <a:outerShdw sx="100000" sy="100000" kx="0" ky="0" algn="bl" rotWithShape="0" blurRad="63500" dist="25400" dir="2700000">
+              <a:srgbClr val="000000">
+                <a:alpha val="18000"/>
+              </a:srgbClr>
+            </a:outerShdw>
+          </a:effectLst>
+        </p:spPr>
+      </p:sp>
+      <p:sp>
+        <p:nvSpPr>
+          <p:cNvPr id="60" name="Text 58"/>
+          <p:cNvSpPr/>
+          <p:nvPr/>
+        </p:nvSpPr>
+        <p:spPr>
+          <a:xfrm>
+            <a:off x="365760" y="3593592"/>
+            <a:ext cx="658368" cy="219456"/>
+          </a:xfrm>
+          <a:prstGeom prst="rect">
+            <a:avLst/>
+          </a:prstGeom>
+          <a:noFill/>
+          <a:ln/>
+        </p:spPr>
+        <p:txBody>
+          <a:bodyPr wrap="square" lIns="0" tIns="0" rIns="0" bIns="0" rtlCol="0" anchor="ctr"/>
+          <a:lstStyle/>
+          <a:p>
+            <a:pPr algn="ctr" indent="0" marL="0">
+              <a:buNone/>
+            </a:pPr>
+            <a:r>
+              <a:rPr lang="en-US" sz="950" b="1" dirty="0">
+                <a:solidFill>
+                  <a:srgbClr val="FB923C"/>
+                </a:solidFill>
+                <a:latin typeface="Cambria" pitchFamily="34" charset="0"/>
+                <a:ea typeface="Cambria" pitchFamily="34" charset="-122"/>
+                <a:cs typeface="Cambria" pitchFamily="34" charset="-120"/>
+              </a:rPr>
+              <a:t>L1</a:t>
+            </a:r>
+            <a:endParaRPr lang="en-US" sz="950" dirty="0"/>
+          </a:p>
+        </p:txBody>
+      </p:sp>
+      <p:sp>
+        <p:nvSpPr>
+          <p:cNvPr id="61" name="Text 59"/>
+          <p:cNvSpPr/>
+          <p:nvPr/>
+        </p:nvSpPr>
+        <p:spPr>
+          <a:xfrm>
+            <a:off x="384048" y="3831336"/>
+            <a:ext cx="621792" cy="365760"/>
+          </a:xfrm>
+          <a:prstGeom prst="rect">
+            <a:avLst/>
+          </a:prstGeom>
+          <a:noFill/>
+          <a:ln/>
+        </p:spPr>
+        <p:txBody>
+          <a:bodyPr wrap="square" lIns="0" tIns="0" rIns="0" bIns="0" rtlCol="0" anchor="ctr"/>
+          <a:lstStyle/>
+          <a:p>
+            <a:pPr algn="ctr" indent="0" marL="0">
+              <a:buNone/>
+            </a:pPr>
+            <a:r>
+              <a:rPr lang="en-US" sz="630" b="1" dirty="0">
+                <a:solidFill>
+                  <a:srgbClr val="FB923C"/>
+                </a:solidFill>
+                <a:latin typeface="Arial" pitchFamily="34" charset="0"/>
+                <a:ea typeface="Arial" pitchFamily="34" charset="-122"/>
+                <a:cs typeface="Arial" pitchFamily="34" charset="-120"/>
+              </a:rPr>
+              <a:t>信号采集</a:t>
+            </a:r>
+            <a:endParaRPr lang="en-US" sz="630" dirty="0"/>
+          </a:p>
+        </p:txBody>
+      </p:sp>
+      <p:sp>
+        <p:nvSpPr>
+          <p:cNvPr id="62" name="Shape 60"/>
+          <p:cNvSpPr/>
+          <p:nvPr/>
+        </p:nvSpPr>
+        <p:spPr>
+          <a:xfrm>
+            <a:off x="1060704" y="3502152"/>
+            <a:ext cx="1572768" cy="749808"/>
+          </a:xfrm>
+          <a:prstGeom prst="roundRect">
+            <a:avLst>
+              <a:gd name="adj" fmla="val 3659"/>
+            </a:avLst>
+          </a:prstGeom>
+          <a:solidFill>
+            <a:srgbClr val="332608"/>
+          </a:solidFill>
+          <a:ln w="6350">
+            <a:solidFill>
+              <a:srgbClr val="5C4A12"/>
+            </a:solidFill>
+            <a:prstDash val="solid"/>
+          </a:ln>
+          <a:effectLst>
+            <a:outerShdw sx="100000" sy="100000" kx="0" ky="0" algn="bl" rotWithShape="0" blurRad="63500" dist="25400" dir="2700000">
+              <a:srgbClr val="000000">
+                <a:alpha val="18000"/>
+              </a:srgbClr>
+            </a:outerShdw>
+          </a:effectLst>
+        </p:spPr>
+      </p:sp>
+      <p:sp>
+        <p:nvSpPr>
+          <p:cNvPr id="63" name="Text 61"/>
+          <p:cNvSpPr/>
+          <p:nvPr/>
+        </p:nvSpPr>
+        <p:spPr>
+          <a:xfrm>
+            <a:off x="1106424" y="3557016"/>
+            <a:ext cx="1481328" cy="310896"/>
+          </a:xfrm>
+          <a:prstGeom prst="rect">
+            <a:avLst/>
+          </a:prstGeom>
+          <a:noFill/>
+          <a:ln/>
+        </p:spPr>
+        <p:txBody>
+          <a:bodyPr wrap="square" lIns="0" tIns="0" rIns="0" bIns="0" rtlCol="0" anchor="ctr"/>
+          <a:lstStyle/>
+          <a:p>
+            <a:pPr indent="0" marL="0">
+              <a:buNone/>
+            </a:pPr>
+            <a:r>
+              <a:rPr lang="en-US" sz="690" b="1" dirty="0">
+                <a:solidFill>
+                  <a:srgbClr val="F8FAFC"/>
+                </a:solidFill>
+                <a:latin typeface="Arial" pitchFamily="34" charset="0"/>
+                <a:ea typeface="Arial" pitchFamily="34" charset="-122"/>
+                <a:cs typeface="Arial" pitchFamily="34" charset="-120"/>
+              </a:rPr>
+              <a:t>键盘/信息</a:t>
+            </a:r>
+            <a:endParaRPr lang="en-US" sz="690" dirty="0"/>
+          </a:p>
+        </p:txBody>
+      </p:sp>
+      <p:sp>
+        <p:nvSpPr>
+          <p:cNvPr id="64" name="Shape 62"/>
+          <p:cNvSpPr/>
+          <p:nvPr/>
+        </p:nvSpPr>
+        <p:spPr>
+          <a:xfrm>
+            <a:off x="2670048" y="3502152"/>
+            <a:ext cx="1572768" cy="749808"/>
+          </a:xfrm>
+          <a:prstGeom prst="roundRect">
+            <a:avLst>
+              <a:gd name="adj" fmla="val 3659"/>
+            </a:avLst>
+          </a:prstGeom>
+          <a:solidFill>
+            <a:srgbClr val="332608"/>
+          </a:solidFill>
+          <a:ln w="6350">
+            <a:solidFill>
+              <a:srgbClr val="5C4A12"/>
+            </a:solidFill>
+            <a:prstDash val="solid"/>
+          </a:ln>
+          <a:effectLst>
+            <a:outerShdw sx="100000" sy="100000" kx="0" ky="0" algn="bl" rotWithShape="0" blurRad="63500" dist="25400" dir="2700000">
+              <a:srgbClr val="000000">
+                <a:alpha val="18000"/>
+              </a:srgbClr>
+            </a:outerShdw>
+          </a:effectLst>
+        </p:spPr>
+      </p:sp>
+      <p:sp>
+        <p:nvSpPr>
+          <p:cNvPr id="65" name="Text 63"/>
+          <p:cNvSpPr/>
+          <p:nvPr/>
+        </p:nvSpPr>
+        <p:spPr>
+          <a:xfrm>
+            <a:off x="2715768" y="3557016"/>
+            <a:ext cx="1481328" cy="310896"/>
+          </a:xfrm>
+          <a:prstGeom prst="rect">
+            <a:avLst/>
+          </a:prstGeom>
+          <a:noFill/>
+          <a:ln/>
+        </p:spPr>
+        <p:txBody>
+          <a:bodyPr wrap="square" lIns="0" tIns="0" rIns="0" bIns="0" rtlCol="0" anchor="ctr"/>
+          <a:lstStyle/>
+          <a:p>
+            <a:pPr indent="0" marL="0">
+              <a:buNone/>
+            </a:pPr>
+            <a:r>
+              <a:rPr lang="en-US" sz="690" b="1" dirty="0">
+                <a:solidFill>
+                  <a:srgbClr val="F8FAFC"/>
+                </a:solidFill>
+                <a:latin typeface="Arial" pitchFamily="34" charset="0"/>
+                <a:ea typeface="Arial" pitchFamily="34" charset="-122"/>
+                <a:cs typeface="Arial" pitchFamily="34" charset="-120"/>
+              </a:rPr>
+              <a:t>通话/麦克风</a:t>
+            </a:r>
+            <a:endParaRPr lang="en-US" sz="690" dirty="0"/>
+          </a:p>
+        </p:txBody>
+      </p:sp>
+      <p:sp>
+        <p:nvSpPr>
+          <p:cNvPr id="66" name="Shape 64"/>
+          <p:cNvSpPr/>
+          <p:nvPr/>
+        </p:nvSpPr>
+        <p:spPr>
+          <a:xfrm>
+            <a:off x="4279392" y="3502152"/>
+            <a:ext cx="1572768" cy="749808"/>
+          </a:xfrm>
+          <a:prstGeom prst="roundRect">
+            <a:avLst>
+              <a:gd name="adj" fmla="val 3659"/>
+            </a:avLst>
+          </a:prstGeom>
+          <a:solidFill>
+            <a:srgbClr val="332608"/>
+          </a:solidFill>
+          <a:ln w="6350">
+            <a:solidFill>
+              <a:srgbClr val="5C4A12"/>
+            </a:solidFill>
+            <a:prstDash val="solid"/>
+          </a:ln>
+          <a:effectLst>
+            <a:outerShdw sx="100000" sy="100000" kx="0" ky="0" algn="bl" rotWithShape="0" blurRad="63500" dist="25400" dir="2700000">
+              <a:srgbClr val="000000">
+                <a:alpha val="18000"/>
+              </a:srgbClr>
+            </a:outerShdw>
+          </a:effectLst>
+        </p:spPr>
+      </p:sp>
+      <p:sp>
+        <p:nvSpPr>
+          <p:cNvPr id="67" name="Text 65"/>
+          <p:cNvSpPr/>
+          <p:nvPr/>
+        </p:nvSpPr>
+        <p:spPr>
+          <a:xfrm>
+            <a:off x="4325112" y="3557016"/>
+            <a:ext cx="1481328" cy="310896"/>
+          </a:xfrm>
+          <a:prstGeom prst="rect">
+            <a:avLst/>
+          </a:prstGeom>
+          <a:noFill/>
+          <a:ln/>
+        </p:spPr>
+        <p:txBody>
+          <a:bodyPr wrap="square" lIns="0" tIns="0" rIns="0" bIns="0" rtlCol="0" anchor="ctr"/>
+          <a:lstStyle/>
+          <a:p>
+            <a:pPr indent="0" marL="0">
+              <a:buNone/>
+            </a:pPr>
+            <a:r>
+              <a:rPr lang="en-US" sz="690" b="1" dirty="0">
+                <a:solidFill>
+                  <a:srgbClr val="F8FAFC"/>
+                </a:solidFill>
+                <a:latin typeface="Arial" pitchFamily="34" charset="0"/>
+                <a:ea typeface="Arial" pitchFamily="34" charset="-122"/>
+                <a:cs typeface="Arial" pitchFamily="34" charset="-120"/>
+              </a:rPr>
+              <a:t>相机/屏幕</a:t>
+            </a:r>
+            <a:endParaRPr lang="en-US" sz="690" dirty="0"/>
+          </a:p>
+        </p:txBody>
+      </p:sp>
+      <p:sp>
+        <p:nvSpPr>
+          <p:cNvPr id="68" name="Shape 66"/>
+          <p:cNvSpPr/>
+          <p:nvPr/>
+        </p:nvSpPr>
+        <p:spPr>
+          <a:xfrm>
+            <a:off x="5888736" y="3502152"/>
+            <a:ext cx="1572768" cy="749808"/>
+          </a:xfrm>
+          <a:prstGeom prst="roundRect">
+            <a:avLst>
+              <a:gd name="adj" fmla="val 3659"/>
+            </a:avLst>
+          </a:prstGeom>
+          <a:solidFill>
+            <a:srgbClr val="0C1A10"/>
+          </a:solidFill>
+          <a:ln w="11430">
+            <a:solidFill>
+              <a:srgbClr val="4ADE80"/>
+            </a:solidFill>
+            <a:prstDash val="solid"/>
+          </a:ln>
+          <a:effectLst>
+            <a:outerShdw sx="100000" sy="100000" kx="0" ky="0" algn="bl" rotWithShape="0" blurRad="63500" dist="25400" dir="2700000">
+              <a:srgbClr val="000000">
+                <a:alpha val="18000"/>
+              </a:srgbClr>
+            </a:outerShdw>
+          </a:effectLst>
+        </p:spPr>
+      </p:sp>
+      <p:sp>
+        <p:nvSpPr>
+          <p:cNvPr id="69" name="Text 67"/>
+          <p:cNvSpPr/>
+          <p:nvPr/>
+        </p:nvSpPr>
+        <p:spPr>
+          <a:xfrm>
+            <a:off x="5934456" y="3557016"/>
+            <a:ext cx="1481328" cy="310896"/>
+          </a:xfrm>
+          <a:prstGeom prst="rect">
+            <a:avLst/>
+          </a:prstGeom>
+          <a:noFill/>
+          <a:ln/>
+        </p:spPr>
+        <p:txBody>
+          <a:bodyPr wrap="square" lIns="0" tIns="0" rIns="0" bIns="0" rtlCol="0" anchor="ctr"/>
+          <a:lstStyle/>
+          <a:p>
+            <a:pPr indent="0" marL="0">
+              <a:buNone/>
+            </a:pPr>
+            <a:r>
+              <a:rPr lang="en-US" sz="690" b="1" dirty="0">
+                <a:solidFill>
+                  <a:srgbClr val="F8FAFC"/>
+                </a:solidFill>
+                <a:latin typeface="Arial" pitchFamily="34" charset="0"/>
+                <a:ea typeface="Arial" pitchFamily="34" charset="-122"/>
+                <a:cs typeface="Arial" pitchFamily="34" charset="-120"/>
+              </a:rPr>
+              <a:t>Watch/Ring传感</a:t>
+            </a:r>
+            <a:endParaRPr lang="en-US" sz="690" dirty="0"/>
+          </a:p>
+        </p:txBody>
+      </p:sp>
+      <p:sp>
+        <p:nvSpPr>
+          <p:cNvPr id="70" name="Text 68"/>
+          <p:cNvSpPr/>
+          <p:nvPr/>
+        </p:nvSpPr>
+        <p:spPr>
+          <a:xfrm>
+            <a:off x="5934456" y="3886200"/>
+            <a:ext cx="1481328" cy="347472"/>
+          </a:xfrm>
+          <a:prstGeom prst="rect">
+            <a:avLst/>
+          </a:prstGeom>
+          <a:noFill/>
+          <a:ln/>
+        </p:spPr>
+        <p:txBody>
+          <a:bodyPr wrap="square" lIns="0" tIns="0" rIns="0" bIns="0" rtlCol="0" anchor="ctr"/>
+          <a:lstStyle/>
+          <a:p>
+            <a:pPr indent="0" marL="0">
+              <a:buNone/>
+            </a:pPr>
+            <a:r>
+              <a:rPr lang="en-US" sz="610" dirty="0">
+                <a:solidFill>
+                  <a:srgbClr val="94A3B8"/>
+                </a:solidFill>
+                <a:latin typeface="Arial" pitchFamily="34" charset="0"/>
+                <a:ea typeface="Arial" pitchFamily="34" charset="-122"/>
+                <a:cs typeface="Arial" pitchFamily="34" charset="-120"/>
+              </a:rPr>
+              <a:t>HR/HRV/皮温/SpO2</a:t>
+            </a:r>
+            <a:endParaRPr lang="en-US" sz="610" dirty="0"/>
+          </a:p>
+        </p:txBody>
+      </p:sp>
+      <p:sp>
+        <p:nvSpPr>
+          <p:cNvPr id="71" name="Shape 69"/>
+          <p:cNvSpPr/>
+          <p:nvPr/>
+        </p:nvSpPr>
+        <p:spPr>
+          <a:xfrm>
+            <a:off x="7498080" y="3502152"/>
+            <a:ext cx="1572768" cy="749808"/>
+          </a:xfrm>
+          <a:prstGeom prst="roundRect">
+            <a:avLst>
+              <a:gd name="adj" fmla="val 3659"/>
+            </a:avLst>
+          </a:prstGeom>
+          <a:solidFill>
+            <a:srgbClr val="332608"/>
+          </a:solidFill>
+          <a:ln w="6350">
+            <a:solidFill>
+              <a:srgbClr val="5C4A12"/>
+            </a:solidFill>
+            <a:prstDash val="solid"/>
+          </a:ln>
+          <a:effectLst>
+            <a:outerShdw sx="100000" sy="100000" kx="0" ky="0" algn="bl" rotWithShape="0" blurRad="63500" dist="25400" dir="2700000">
+              <a:srgbClr val="000000">
+                <a:alpha val="18000"/>
+              </a:srgbClr>
+            </a:outerShdw>
+          </a:effectLst>
+        </p:spPr>
+      </p:sp>
+      <p:sp>
+        <p:nvSpPr>
+          <p:cNvPr id="72" name="Text 70"/>
+          <p:cNvSpPr/>
+          <p:nvPr/>
+        </p:nvSpPr>
+        <p:spPr>
+          <a:xfrm>
+            <a:off x="7543800" y="3557016"/>
+            <a:ext cx="1481328" cy="310896"/>
+          </a:xfrm>
+          <a:prstGeom prst="rect">
+            <a:avLst/>
+          </a:prstGeom>
+          <a:noFill/>
+          <a:ln/>
+        </p:spPr>
+        <p:txBody>
+          <a:bodyPr wrap="square" lIns="0" tIns="0" rIns="0" bIns="0" rtlCol="0" anchor="ctr"/>
+          <a:lstStyle/>
+          <a:p>
+            <a:pPr indent="0" marL="0">
+              <a:buNone/>
+            </a:pPr>
+            <a:r>
+              <a:rPr lang="en-US" sz="690" b="1" dirty="0">
+                <a:solidFill>
+                  <a:srgbClr val="F8FAFC"/>
+                </a:solidFill>
+                <a:latin typeface="Arial" pitchFamily="34" charset="0"/>
+                <a:ea typeface="Arial" pitchFamily="34" charset="-122"/>
+                <a:cs typeface="Arial" pitchFamily="34" charset="-120"/>
+              </a:rPr>
+              <a:t>屏时/解锁采集</a:t>
+            </a:r>
+            <a:endParaRPr lang="en-US" sz="690" dirty="0"/>
+          </a:p>
+        </p:txBody>
+      </p:sp>
+      <p:sp>
+        <p:nvSpPr>
+          <p:cNvPr id="73" name="Shape 71"/>
+          <p:cNvSpPr/>
+          <p:nvPr/>
+        </p:nvSpPr>
+        <p:spPr>
+          <a:xfrm>
+            <a:off x="365760" y="4626864"/>
+            <a:ext cx="8412480" cy="411480"/>
+          </a:xfrm>
+          <a:prstGeom prst="roundRect">
+            <a:avLst>
+              <a:gd name="adj" fmla="val 6667"/>
+            </a:avLst>
+          </a:prstGeom>
+          <a:solidFill>
+            <a:srgbClr val="0A1A1F"/>
+          </a:solidFill>
+          <a:ln w="11430">
+            <a:solidFill>
+              <a:srgbClr val="22D3EE"/>
+            </a:solidFill>
+            <a:prstDash val="solid"/>
+          </a:ln>
+          <a:effectLst>
+            <a:outerShdw sx="100000" sy="100000" kx="0" ky="0" algn="bl" rotWithShape="0" blurRad="63500" dist="25400" dir="2700000">
+              <a:srgbClr val="000000">
+                <a:alpha val="18000"/>
+              </a:srgbClr>
+            </a:outerShdw>
+          </a:effectLst>
+        </p:spPr>
+      </p:sp>
+      <p:sp>
+        <p:nvSpPr>
+          <p:cNvPr id="74" name="Text 72"/>
+          <p:cNvSpPr/>
+          <p:nvPr/>
+        </p:nvSpPr>
+        <p:spPr>
+          <a:xfrm>
+            <a:off x="502920" y="4626864"/>
+            <a:ext cx="8138160" cy="411480"/>
+          </a:xfrm>
+          <a:prstGeom prst="rect">
+            <a:avLst/>
+          </a:prstGeom>
+          <a:noFill/>
+          <a:ln/>
+        </p:spPr>
+        <p:txBody>
+          <a:bodyPr wrap="square" lIns="0" tIns="0" rIns="0" bIns="0" rtlCol="0" anchor="ctr"/>
+          <a:lstStyle/>
+          <a:p>
+            <a:pPr indent="0" marL="0">
+              <a:buNone/>
+            </a:pPr>
+            <a:r>
+              <a:rPr lang="en-US" sz="760" b="1" dirty="0">
+                <a:solidFill>
+                  <a:srgbClr val="22D3EE"/>
+                </a:solidFill>
+                <a:latin typeface="Arial" pitchFamily="34" charset="0"/>
+                <a:ea typeface="Arial" pitchFamily="34" charset="-122"/>
+                <a:cs typeface="Arial" pitchFamily="34" charset="-120"/>
+              </a:rPr>
+              <a:t>洞察：</a:t>
+            </a:r>
+            <a:pPr indent="0" marL="0">
+              <a:buNone/>
+            </a:pPr>
+            <a:r>
+              <a:rPr lang="en-US" sz="760" dirty="0">
+                <a:solidFill>
+                  <a:srgbClr val="94A3B8"/>
+                </a:solidFill>
+                <a:latin typeface="Arial" pitchFamily="34" charset="0"/>
+                <a:ea typeface="Arial" pitchFamily="34" charset="-122"/>
+                <a:cs typeface="Arial" pitchFamily="34" charset="-120"/>
+              </a:rPr>
+              <a:t>继Apple后第二家④全栈绿(穿戴生态+个人基线方法论最接近UTM的L2)；但①②③智能层外包Gemini、无自研情感能力，⑤完全空白——生理路线的护城河同时是天花板：状态推断被锁死在健康域，未进入系统策略层</a:t>
+            </a:r>
+            <a:endParaRPr lang="en-US" sz="760" dirty="0"/>
           </a:p>
         </p:txBody>
       </p:sp>
